--- a/data-science.pptx
+++ b/data-science.pptx
@@ -9666,6 +9666,47 @@
           </a:effectLst>
         </p:spPr>
       </p:pic>
+      <p:sp>
+        <p:nvSpPr>
+          <p:cNvPr id="3" name="TextBox 2">
+            <a:extLst>
+              <a:ext uri="{FF2B5EF4-FFF2-40B4-BE49-F238E27FC236}">
+                <a16:creationId xmlns:a16="http://schemas.microsoft.com/office/drawing/2014/main" id="{A8CD694F-A91B-400D-0BDB-76A3D7E8664D}"/>
+              </a:ext>
+            </a:extLst>
+          </p:cNvPr>
+          <p:cNvSpPr txBox="1"/>
+          <p:nvPr/>
+        </p:nvSpPr>
+        <p:spPr>
+          <a:xfrm>
+            <a:off x="1317523" y="1465623"/>
+            <a:ext cx="9556954" cy="338554"/>
+          </a:xfrm>
+          <a:prstGeom prst="rect">
+            <a:avLst/>
+          </a:prstGeom>
+          <a:noFill/>
+        </p:spPr>
+        <p:txBody>
+          <a:bodyPr wrap="square" rtlCol="0">
+            <a:spAutoFit/>
+          </a:bodyPr>
+          <a:lstStyle/>
+          <a:p>
+            <a:r>
+              <a:rPr lang="en-US" sz="1600" dirty="0">
+                <a:solidFill>
+                  <a:srgbClr val="FF0000"/>
+                </a:solidFill>
+                <a:latin typeface="Anuphan" pitchFamily="2" charset="-34"/>
+                <a:cs typeface="Anuphan" pitchFamily="2" charset="-34"/>
+              </a:rPr>
+              <a:t>** X shape should be 8 columns. **</a:t>
+            </a:r>
+          </a:p>
+        </p:txBody>
+      </p:sp>
     </p:spTree>
     <p:extLst>
       <p:ext uri="{BB962C8B-B14F-4D97-AF65-F5344CB8AC3E}">

--- a/data-science.pptx
+++ b/data-science.pptx
@@ -55,51 +55,55 @@
     <p:sldId id="299" r:id="rId49"/>
     <p:sldId id="300" r:id="rId50"/>
     <p:sldId id="301" r:id="rId51"/>
-    <p:sldId id="302" r:id="rId52"/>
-    <p:sldId id="303" r:id="rId53"/>
-    <p:sldId id="304" r:id="rId54"/>
-    <p:sldId id="305" r:id="rId55"/>
-    <p:sldId id="306" r:id="rId56"/>
-    <p:sldId id="307" r:id="rId57"/>
-    <p:sldId id="308" r:id="rId58"/>
-    <p:sldId id="309" r:id="rId59"/>
-    <p:sldId id="310" r:id="rId60"/>
-    <p:sldId id="311" r:id="rId61"/>
-    <p:sldId id="312" r:id="rId62"/>
-    <p:sldId id="313" r:id="rId63"/>
-    <p:sldId id="314" r:id="rId64"/>
-    <p:sldId id="315" r:id="rId65"/>
-    <p:sldId id="316" r:id="rId66"/>
-    <p:sldId id="317" r:id="rId67"/>
-    <p:sldId id="318" r:id="rId68"/>
-    <p:sldId id="319" r:id="rId69"/>
-    <p:sldId id="320" r:id="rId70"/>
-    <p:sldId id="321" r:id="rId71"/>
-    <p:sldId id="322" r:id="rId72"/>
-    <p:sldId id="323" r:id="rId73"/>
-    <p:sldId id="324" r:id="rId74"/>
-    <p:sldId id="325" r:id="rId75"/>
-    <p:sldId id="326" r:id="rId76"/>
-    <p:sldId id="327" r:id="rId77"/>
-    <p:sldId id="328" r:id="rId78"/>
-    <p:sldId id="329" r:id="rId79"/>
-    <p:sldId id="330" r:id="rId80"/>
-    <p:sldId id="331" r:id="rId81"/>
-    <p:sldId id="332" r:id="rId82"/>
-    <p:sldId id="333" r:id="rId83"/>
-    <p:sldId id="334" r:id="rId84"/>
-    <p:sldId id="335" r:id="rId85"/>
-    <p:sldId id="336" r:id="rId86"/>
-    <p:sldId id="337" r:id="rId87"/>
-    <p:sldId id="338" r:id="rId88"/>
+    <p:sldId id="343" r:id="rId52"/>
+    <p:sldId id="302" r:id="rId53"/>
+    <p:sldId id="303" r:id="rId54"/>
+    <p:sldId id="304" r:id="rId55"/>
+    <p:sldId id="344" r:id="rId56"/>
+    <p:sldId id="305" r:id="rId57"/>
+    <p:sldId id="306" r:id="rId58"/>
+    <p:sldId id="307" r:id="rId59"/>
+    <p:sldId id="308" r:id="rId60"/>
+    <p:sldId id="309" r:id="rId61"/>
+    <p:sldId id="310" r:id="rId62"/>
+    <p:sldId id="345" r:id="rId63"/>
+    <p:sldId id="311" r:id="rId64"/>
+    <p:sldId id="346" r:id="rId65"/>
+    <p:sldId id="312" r:id="rId66"/>
+    <p:sldId id="313" r:id="rId67"/>
+    <p:sldId id="314" r:id="rId68"/>
+    <p:sldId id="315" r:id="rId69"/>
+    <p:sldId id="316" r:id="rId70"/>
+    <p:sldId id="317" r:id="rId71"/>
+    <p:sldId id="318" r:id="rId72"/>
+    <p:sldId id="319" r:id="rId73"/>
+    <p:sldId id="320" r:id="rId74"/>
+    <p:sldId id="321" r:id="rId75"/>
+    <p:sldId id="322" r:id="rId76"/>
+    <p:sldId id="323" r:id="rId77"/>
+    <p:sldId id="324" r:id="rId78"/>
+    <p:sldId id="325" r:id="rId79"/>
+    <p:sldId id="326" r:id="rId80"/>
+    <p:sldId id="327" r:id="rId81"/>
+    <p:sldId id="328" r:id="rId82"/>
+    <p:sldId id="329" r:id="rId83"/>
+    <p:sldId id="330" r:id="rId84"/>
+    <p:sldId id="331" r:id="rId85"/>
+    <p:sldId id="332" r:id="rId86"/>
+    <p:sldId id="333" r:id="rId87"/>
+    <p:sldId id="334" r:id="rId88"/>
+    <p:sldId id="335" r:id="rId89"/>
+    <p:sldId id="336" r:id="rId90"/>
+    <p:sldId id="337" r:id="rId91"/>
+    <p:sldId id="338" r:id="rId92"/>
   </p:sldIdLst>
   <p:sldSz cx="12192000" cy="6858000"/>
   <p:notesSz cx="6858000" cy="9144000"/>
   <p:embeddedFontLst>
     <p:embeddedFont>
       <p:font typeface="Anuphan" pitchFamily="2" charset="-34"/>
-      <p:regular r:id="rId89"/>
-      <p:bold r:id="rId90"/>
+      <p:regular r:id="rId93"/>
+      <p:bold r:id="rId94"/>
     </p:embeddedFont>
   </p:embeddedFontLst>
   <p:defaultTextStyle>
@@ -352,7 +356,7 @@
           <a:p>
             <a:fld id="{E949BF3A-06AA-4A8E-924F-CCE39BC55DF2}" type="datetimeFigureOut">
               <a:rPr lang="en-US" smtClean="0"/>
-              <a:t>4/16/2026</a:t>
+              <a:t>4/17/2026</a:t>
             </a:fld>
             <a:endParaRPr lang="en-US"/>
           </a:p>
@@ -550,7 +554,7 @@
           <a:p>
             <a:fld id="{E949BF3A-06AA-4A8E-924F-CCE39BC55DF2}" type="datetimeFigureOut">
               <a:rPr lang="en-US" smtClean="0"/>
-              <a:t>4/16/2026</a:t>
+              <a:t>4/17/2026</a:t>
             </a:fld>
             <a:endParaRPr lang="en-US"/>
           </a:p>
@@ -758,7 +762,7 @@
           <a:p>
             <a:fld id="{E949BF3A-06AA-4A8E-924F-CCE39BC55DF2}" type="datetimeFigureOut">
               <a:rPr lang="en-US" smtClean="0"/>
-              <a:t>4/16/2026</a:t>
+              <a:t>4/17/2026</a:t>
             </a:fld>
             <a:endParaRPr lang="en-US"/>
           </a:p>
@@ -956,7 +960,7 @@
           <a:p>
             <a:fld id="{E949BF3A-06AA-4A8E-924F-CCE39BC55DF2}" type="datetimeFigureOut">
               <a:rPr lang="en-US" smtClean="0"/>
-              <a:t>4/16/2026</a:t>
+              <a:t>4/17/2026</a:t>
             </a:fld>
             <a:endParaRPr lang="en-US"/>
           </a:p>
@@ -1231,7 +1235,7 @@
           <a:p>
             <a:fld id="{E949BF3A-06AA-4A8E-924F-CCE39BC55DF2}" type="datetimeFigureOut">
               <a:rPr lang="en-US" smtClean="0"/>
-              <a:t>4/16/2026</a:t>
+              <a:t>4/17/2026</a:t>
             </a:fld>
             <a:endParaRPr lang="en-US"/>
           </a:p>
@@ -1496,7 +1500,7 @@
           <a:p>
             <a:fld id="{E949BF3A-06AA-4A8E-924F-CCE39BC55DF2}" type="datetimeFigureOut">
               <a:rPr lang="en-US" smtClean="0"/>
-              <a:t>4/16/2026</a:t>
+              <a:t>4/17/2026</a:t>
             </a:fld>
             <a:endParaRPr lang="en-US"/>
           </a:p>
@@ -1908,7 +1912,7 @@
           <a:p>
             <a:fld id="{E949BF3A-06AA-4A8E-924F-CCE39BC55DF2}" type="datetimeFigureOut">
               <a:rPr lang="en-US" smtClean="0"/>
-              <a:t>4/16/2026</a:t>
+              <a:t>4/17/2026</a:t>
             </a:fld>
             <a:endParaRPr lang="en-US"/>
           </a:p>
@@ -2049,7 +2053,7 @@
           <a:p>
             <a:fld id="{E949BF3A-06AA-4A8E-924F-CCE39BC55DF2}" type="datetimeFigureOut">
               <a:rPr lang="en-US" smtClean="0"/>
-              <a:t>4/16/2026</a:t>
+              <a:t>4/17/2026</a:t>
             </a:fld>
             <a:endParaRPr lang="en-US"/>
           </a:p>
@@ -2162,7 +2166,7 @@
           <a:p>
             <a:fld id="{E949BF3A-06AA-4A8E-924F-CCE39BC55DF2}" type="datetimeFigureOut">
               <a:rPr lang="en-US" smtClean="0"/>
-              <a:t>4/16/2026</a:t>
+              <a:t>4/17/2026</a:t>
             </a:fld>
             <a:endParaRPr lang="en-US"/>
           </a:p>
@@ -2473,7 +2477,7 @@
           <a:p>
             <a:fld id="{E949BF3A-06AA-4A8E-924F-CCE39BC55DF2}" type="datetimeFigureOut">
               <a:rPr lang="en-US" smtClean="0"/>
-              <a:t>4/16/2026</a:t>
+              <a:t>4/17/2026</a:t>
             </a:fld>
             <a:endParaRPr lang="en-US"/>
           </a:p>
@@ -2761,7 +2765,7 @@
           <a:p>
             <a:fld id="{E949BF3A-06AA-4A8E-924F-CCE39BC55DF2}" type="datetimeFigureOut">
               <a:rPr lang="en-US" smtClean="0"/>
-              <a:t>4/16/2026</a:t>
+              <a:t>4/17/2026</a:t>
             </a:fld>
             <a:endParaRPr lang="en-US"/>
           </a:p>
@@ -3002,7 +3006,7 @@
           <a:p>
             <a:fld id="{E949BF3A-06AA-4A8E-924F-CCE39BC55DF2}" type="datetimeFigureOut">
               <a:rPr lang="en-US" smtClean="0"/>
-              <a:t>4/16/2026</a:t>
+              <a:t>4/17/2026</a:t>
             </a:fld>
             <a:endParaRPr lang="en-US"/>
           </a:p>
@@ -12063,6 +12067,818 @@
         <p:cNvPr id="1" name="">
           <a:extLst>
             <a:ext uri="{FF2B5EF4-FFF2-40B4-BE49-F238E27FC236}">
+              <a16:creationId xmlns:a16="http://schemas.microsoft.com/office/drawing/2014/main" id="{9C1E0491-40FB-D585-8EFD-DF0F8A6ED4E1}"/>
+            </a:ext>
+          </a:extLst>
+        </p:cNvPr>
+        <p:cNvGrpSpPr/>
+        <p:nvPr/>
+      </p:nvGrpSpPr>
+      <p:grpSpPr>
+        <a:xfrm>
+          <a:off x="0" y="0"/>
+          <a:ext cx="0" cy="0"/>
+          <a:chOff x="0" y="0"/>
+          <a:chExt cx="0" cy="0"/>
+        </a:xfrm>
+      </p:grpSpPr>
+      <p:sp>
+        <p:nvSpPr>
+          <p:cNvPr id="2" name="Title 1">
+            <a:extLst>
+              <a:ext uri="{FF2B5EF4-FFF2-40B4-BE49-F238E27FC236}">
+                <a16:creationId xmlns:a16="http://schemas.microsoft.com/office/drawing/2014/main" id="{FBF8DF0F-D97C-E139-FF13-00BED76329E8}"/>
+              </a:ext>
+            </a:extLst>
+          </p:cNvPr>
+          <p:cNvSpPr>
+            <a:spLocks noGrp="1"/>
+          </p:cNvSpPr>
+          <p:nvPr>
+            <p:ph type="ctrTitle"/>
+          </p:nvPr>
+        </p:nvSpPr>
+        <p:spPr>
+          <a:xfrm>
+            <a:off x="1317523" y="333332"/>
+            <a:ext cx="9556954" cy="825910"/>
+          </a:xfrm>
+        </p:spPr>
+        <p:txBody>
+          <a:bodyPr>
+            <a:noAutofit/>
+          </a:bodyPr>
+          <a:lstStyle/>
+          <a:p>
+            <a:pPr algn="l"/>
+            <a:r>
+              <a:rPr lang="en-US" sz="4000" dirty="0">
+                <a:solidFill>
+                  <a:schemeClr val="tx1">
+                    <a:lumMod val="75000"/>
+                    <a:lumOff val="25000"/>
+                  </a:schemeClr>
+                </a:solidFill>
+                <a:latin typeface="Anuphan" pitchFamily="2" charset="-34"/>
+                <a:cs typeface="Anuphan" pitchFamily="2" charset="-34"/>
+              </a:rPr>
+              <a:t>Using Machine Learning Model</a:t>
+            </a:r>
+          </a:p>
+        </p:txBody>
+      </p:sp>
+      <p:sp>
+        <p:nvSpPr>
+          <p:cNvPr id="4" name="TextBox 3">
+            <a:extLst>
+              <a:ext uri="{FF2B5EF4-FFF2-40B4-BE49-F238E27FC236}">
+                <a16:creationId xmlns:a16="http://schemas.microsoft.com/office/drawing/2014/main" id="{1C9E2578-D120-590A-CC8F-C9821125E45D}"/>
+              </a:ext>
+            </a:extLst>
+          </p:cNvPr>
+          <p:cNvSpPr txBox="1"/>
+          <p:nvPr/>
+        </p:nvSpPr>
+        <p:spPr>
+          <a:xfrm>
+            <a:off x="1317523" y="1159242"/>
+            <a:ext cx="9556954" cy="338554"/>
+          </a:xfrm>
+          <a:prstGeom prst="rect">
+            <a:avLst/>
+          </a:prstGeom>
+          <a:noFill/>
+        </p:spPr>
+        <p:txBody>
+          <a:bodyPr wrap="square" rtlCol="0">
+            <a:spAutoFit/>
+          </a:bodyPr>
+          <a:lstStyle/>
+          <a:p>
+            <a:r>
+              <a:rPr lang="en-US" sz="1600" dirty="0">
+                <a:solidFill>
+                  <a:schemeClr val="tx1">
+                    <a:lumMod val="75000"/>
+                    <a:lumOff val="25000"/>
+                  </a:schemeClr>
+                </a:solidFill>
+                <a:latin typeface="Anuphan" pitchFamily="2" charset="-34"/>
+                <a:cs typeface="Anuphan" pitchFamily="2" charset="-34"/>
+              </a:rPr>
+              <a:t>made by Claude</a:t>
+            </a:r>
+          </a:p>
+        </p:txBody>
+      </p:sp>
+      <p:sp>
+        <p:nvSpPr>
+          <p:cNvPr id="14" name="TextBox 13">
+            <a:extLst>
+              <a:ext uri="{FF2B5EF4-FFF2-40B4-BE49-F238E27FC236}">
+                <a16:creationId xmlns:a16="http://schemas.microsoft.com/office/drawing/2014/main" id="{B58033DE-468B-63B7-E5F1-48AF1D8B300A}"/>
+              </a:ext>
+            </a:extLst>
+          </p:cNvPr>
+          <p:cNvSpPr txBox="1"/>
+          <p:nvPr/>
+        </p:nvSpPr>
+        <p:spPr>
+          <a:xfrm>
+            <a:off x="1317523" y="1803846"/>
+            <a:ext cx="6096000" cy="3894912"/>
+          </a:xfrm>
+          <a:prstGeom prst="rect">
+            <a:avLst/>
+          </a:prstGeom>
+          <a:noFill/>
+        </p:spPr>
+        <p:txBody>
+          <a:bodyPr wrap="square">
+            <a:spAutoFit/>
+          </a:bodyPr>
+          <a:lstStyle/>
+          <a:p>
+            <a:pPr marL="0" marR="0">
+              <a:lnSpc>
+                <a:spcPct val="115000"/>
+              </a:lnSpc>
+              <a:spcAft>
+                <a:spcPts val="800"/>
+              </a:spcAft>
+              <a:buNone/>
+            </a:pPr>
+            <a:r>
+              <a:rPr lang="en-US" sz="1000" kern="100" dirty="0">
+                <a:effectLst/>
+                <a:latin typeface="Anuphan" pitchFamily="2" charset="-34"/>
+                <a:ea typeface="Aptos" panose="020B0004020202020204" pitchFamily="34" charset="0"/>
+                <a:cs typeface="Anuphan" pitchFamily="2" charset="-34"/>
+              </a:rPr>
+              <a:t>models = {</a:t>
+            </a:r>
+          </a:p>
+          <a:p>
+            <a:pPr marL="0" marR="0">
+              <a:lnSpc>
+                <a:spcPct val="115000"/>
+              </a:lnSpc>
+              <a:spcAft>
+                <a:spcPts val="800"/>
+              </a:spcAft>
+              <a:buNone/>
+            </a:pPr>
+            <a:r>
+              <a:rPr lang="en-US" sz="1000" kern="100" dirty="0">
+                <a:effectLst/>
+                <a:latin typeface="Anuphan" pitchFamily="2" charset="-34"/>
+                <a:ea typeface="Aptos" panose="020B0004020202020204" pitchFamily="34" charset="0"/>
+                <a:cs typeface="Anuphan" pitchFamily="2" charset="-34"/>
+              </a:rPr>
+              <a:t>    'Logistic Regression'   : </a:t>
+            </a:r>
+            <a:r>
+              <a:rPr lang="en-US" sz="1000" kern="100" dirty="0" err="1">
+                <a:effectLst/>
+                <a:latin typeface="Anuphan" pitchFamily="2" charset="-34"/>
+                <a:ea typeface="Aptos" panose="020B0004020202020204" pitchFamily="34" charset="0"/>
+                <a:cs typeface="Anuphan" pitchFamily="2" charset="-34"/>
+              </a:rPr>
+              <a:t>LogisticRegression</a:t>
+            </a:r>
+            <a:r>
+              <a:rPr lang="en-US" sz="1000" kern="100" dirty="0">
+                <a:effectLst/>
+                <a:latin typeface="Anuphan" pitchFamily="2" charset="-34"/>
+                <a:ea typeface="Aptos" panose="020B0004020202020204" pitchFamily="34" charset="0"/>
+                <a:cs typeface="Anuphan" pitchFamily="2" charset="-34"/>
+              </a:rPr>
+              <a:t>(</a:t>
+            </a:r>
+            <a:r>
+              <a:rPr lang="en-US" sz="1000" kern="100" dirty="0" err="1">
+                <a:effectLst/>
+                <a:latin typeface="Anuphan" pitchFamily="2" charset="-34"/>
+                <a:ea typeface="Aptos" panose="020B0004020202020204" pitchFamily="34" charset="0"/>
+                <a:cs typeface="Anuphan" pitchFamily="2" charset="-34"/>
+              </a:rPr>
+              <a:t>random_state</a:t>
+            </a:r>
+            <a:r>
+              <a:rPr lang="en-US" sz="1000" kern="100" dirty="0">
+                <a:effectLst/>
+                <a:latin typeface="Anuphan" pitchFamily="2" charset="-34"/>
+                <a:ea typeface="Aptos" panose="020B0004020202020204" pitchFamily="34" charset="0"/>
+                <a:cs typeface="Anuphan" pitchFamily="2" charset="-34"/>
+              </a:rPr>
+              <a:t>=42),</a:t>
+            </a:r>
+          </a:p>
+          <a:p>
+            <a:pPr marL="0" marR="0">
+              <a:lnSpc>
+                <a:spcPct val="115000"/>
+              </a:lnSpc>
+              <a:spcAft>
+                <a:spcPts val="800"/>
+              </a:spcAft>
+              <a:buNone/>
+            </a:pPr>
+            <a:r>
+              <a:rPr lang="en-US" sz="1000" kern="100" dirty="0">
+                <a:effectLst/>
+                <a:latin typeface="Anuphan" pitchFamily="2" charset="-34"/>
+                <a:ea typeface="Aptos" panose="020B0004020202020204" pitchFamily="34" charset="0"/>
+                <a:cs typeface="Anuphan" pitchFamily="2" charset="-34"/>
+              </a:rPr>
+              <a:t>    'Decision Tree'         : </a:t>
+            </a:r>
+            <a:r>
+              <a:rPr lang="en-US" sz="1000" kern="100" dirty="0" err="1">
+                <a:effectLst/>
+                <a:latin typeface="Anuphan" pitchFamily="2" charset="-34"/>
+                <a:ea typeface="Aptos" panose="020B0004020202020204" pitchFamily="34" charset="0"/>
+                <a:cs typeface="Anuphan" pitchFamily="2" charset="-34"/>
+              </a:rPr>
+              <a:t>DecisionTreeClassifier</a:t>
+            </a:r>
+            <a:r>
+              <a:rPr lang="en-US" sz="1000" kern="100" dirty="0">
+                <a:effectLst/>
+                <a:latin typeface="Anuphan" pitchFamily="2" charset="-34"/>
+                <a:ea typeface="Aptos" panose="020B0004020202020204" pitchFamily="34" charset="0"/>
+                <a:cs typeface="Anuphan" pitchFamily="2" charset="-34"/>
+              </a:rPr>
+              <a:t>(</a:t>
+            </a:r>
+            <a:r>
+              <a:rPr lang="en-US" sz="1000" kern="100" dirty="0" err="1">
+                <a:effectLst/>
+                <a:latin typeface="Anuphan" pitchFamily="2" charset="-34"/>
+                <a:ea typeface="Aptos" panose="020B0004020202020204" pitchFamily="34" charset="0"/>
+                <a:cs typeface="Anuphan" pitchFamily="2" charset="-34"/>
+              </a:rPr>
+              <a:t>random_state</a:t>
+            </a:r>
+            <a:r>
+              <a:rPr lang="en-US" sz="1000" kern="100" dirty="0">
+                <a:effectLst/>
+                <a:latin typeface="Anuphan" pitchFamily="2" charset="-34"/>
+                <a:ea typeface="Aptos" panose="020B0004020202020204" pitchFamily="34" charset="0"/>
+                <a:cs typeface="Anuphan" pitchFamily="2" charset="-34"/>
+              </a:rPr>
+              <a:t>=42),</a:t>
+            </a:r>
+          </a:p>
+          <a:p>
+            <a:pPr marL="0" marR="0">
+              <a:lnSpc>
+                <a:spcPct val="115000"/>
+              </a:lnSpc>
+              <a:spcAft>
+                <a:spcPts val="800"/>
+              </a:spcAft>
+              <a:buNone/>
+            </a:pPr>
+            <a:r>
+              <a:rPr lang="en-US" sz="1000" kern="100" dirty="0">
+                <a:effectLst/>
+                <a:latin typeface="Anuphan" pitchFamily="2" charset="-34"/>
+                <a:ea typeface="Aptos" panose="020B0004020202020204" pitchFamily="34" charset="0"/>
+                <a:cs typeface="Anuphan" pitchFamily="2" charset="-34"/>
+              </a:rPr>
+              <a:t>    'Random Forest'         : </a:t>
+            </a:r>
+            <a:r>
+              <a:rPr lang="en-US" sz="1000" kern="100" dirty="0" err="1">
+                <a:effectLst/>
+                <a:latin typeface="Anuphan" pitchFamily="2" charset="-34"/>
+                <a:ea typeface="Aptos" panose="020B0004020202020204" pitchFamily="34" charset="0"/>
+                <a:cs typeface="Anuphan" pitchFamily="2" charset="-34"/>
+              </a:rPr>
+              <a:t>RandomForestClassifier</a:t>
+            </a:r>
+            <a:r>
+              <a:rPr lang="en-US" sz="1000" kern="100" dirty="0">
+                <a:effectLst/>
+                <a:latin typeface="Anuphan" pitchFamily="2" charset="-34"/>
+                <a:ea typeface="Aptos" panose="020B0004020202020204" pitchFamily="34" charset="0"/>
+                <a:cs typeface="Anuphan" pitchFamily="2" charset="-34"/>
+              </a:rPr>
+              <a:t>(</a:t>
+            </a:r>
+            <a:r>
+              <a:rPr lang="en-US" sz="1000" kern="100" dirty="0" err="1">
+                <a:effectLst/>
+                <a:latin typeface="Anuphan" pitchFamily="2" charset="-34"/>
+                <a:ea typeface="Aptos" panose="020B0004020202020204" pitchFamily="34" charset="0"/>
+                <a:cs typeface="Anuphan" pitchFamily="2" charset="-34"/>
+              </a:rPr>
+              <a:t>n_estimators</a:t>
+            </a:r>
+            <a:r>
+              <a:rPr lang="en-US" sz="1000" kern="100" dirty="0">
+                <a:effectLst/>
+                <a:latin typeface="Anuphan" pitchFamily="2" charset="-34"/>
+                <a:ea typeface="Aptos" panose="020B0004020202020204" pitchFamily="34" charset="0"/>
+                <a:cs typeface="Anuphan" pitchFamily="2" charset="-34"/>
+              </a:rPr>
+              <a:t>=100, </a:t>
+            </a:r>
+            <a:r>
+              <a:rPr lang="en-US" sz="1000" kern="100" dirty="0" err="1">
+                <a:effectLst/>
+                <a:latin typeface="Anuphan" pitchFamily="2" charset="-34"/>
+                <a:ea typeface="Aptos" panose="020B0004020202020204" pitchFamily="34" charset="0"/>
+                <a:cs typeface="Anuphan" pitchFamily="2" charset="-34"/>
+              </a:rPr>
+              <a:t>random_state</a:t>
+            </a:r>
+            <a:r>
+              <a:rPr lang="en-US" sz="1000" kern="100" dirty="0">
+                <a:effectLst/>
+                <a:latin typeface="Anuphan" pitchFamily="2" charset="-34"/>
+                <a:ea typeface="Aptos" panose="020B0004020202020204" pitchFamily="34" charset="0"/>
+                <a:cs typeface="Anuphan" pitchFamily="2" charset="-34"/>
+              </a:rPr>
+              <a:t>=42),</a:t>
+            </a:r>
+          </a:p>
+          <a:p>
+            <a:pPr marL="0" marR="0">
+              <a:lnSpc>
+                <a:spcPct val="115000"/>
+              </a:lnSpc>
+              <a:spcAft>
+                <a:spcPts val="800"/>
+              </a:spcAft>
+              <a:buNone/>
+            </a:pPr>
+            <a:r>
+              <a:rPr lang="en-US" sz="1000" kern="100" dirty="0">
+                <a:effectLst/>
+                <a:latin typeface="Anuphan" pitchFamily="2" charset="-34"/>
+                <a:ea typeface="Aptos" panose="020B0004020202020204" pitchFamily="34" charset="0"/>
+                <a:cs typeface="Anuphan" pitchFamily="2" charset="-34"/>
+              </a:rPr>
+              <a:t>    'Gradient Boosting'     : </a:t>
+            </a:r>
+            <a:r>
+              <a:rPr lang="en-US" sz="1000" kern="100" dirty="0" err="1">
+                <a:effectLst/>
+                <a:latin typeface="Anuphan" pitchFamily="2" charset="-34"/>
+                <a:ea typeface="Aptos" panose="020B0004020202020204" pitchFamily="34" charset="0"/>
+                <a:cs typeface="Anuphan" pitchFamily="2" charset="-34"/>
+              </a:rPr>
+              <a:t>GradientBoostingClassifier</a:t>
+            </a:r>
+            <a:r>
+              <a:rPr lang="en-US" sz="1000" kern="100" dirty="0">
+                <a:effectLst/>
+                <a:latin typeface="Anuphan" pitchFamily="2" charset="-34"/>
+                <a:ea typeface="Aptos" panose="020B0004020202020204" pitchFamily="34" charset="0"/>
+                <a:cs typeface="Anuphan" pitchFamily="2" charset="-34"/>
+              </a:rPr>
+              <a:t>(</a:t>
+            </a:r>
+            <a:r>
+              <a:rPr lang="en-US" sz="1000" kern="100" dirty="0" err="1">
+                <a:effectLst/>
+                <a:latin typeface="Anuphan" pitchFamily="2" charset="-34"/>
+                <a:ea typeface="Aptos" panose="020B0004020202020204" pitchFamily="34" charset="0"/>
+                <a:cs typeface="Anuphan" pitchFamily="2" charset="-34"/>
+              </a:rPr>
+              <a:t>random_state</a:t>
+            </a:r>
+            <a:r>
+              <a:rPr lang="en-US" sz="1000" kern="100" dirty="0">
+                <a:effectLst/>
+                <a:latin typeface="Anuphan" pitchFamily="2" charset="-34"/>
+                <a:ea typeface="Aptos" panose="020B0004020202020204" pitchFamily="34" charset="0"/>
+                <a:cs typeface="Anuphan" pitchFamily="2" charset="-34"/>
+              </a:rPr>
+              <a:t>=42),</a:t>
+            </a:r>
+          </a:p>
+          <a:p>
+            <a:pPr marL="0" marR="0">
+              <a:lnSpc>
+                <a:spcPct val="115000"/>
+              </a:lnSpc>
+              <a:spcAft>
+                <a:spcPts val="800"/>
+              </a:spcAft>
+              <a:buNone/>
+            </a:pPr>
+            <a:r>
+              <a:rPr lang="en-US" sz="1000" kern="100" dirty="0">
+                <a:effectLst/>
+                <a:latin typeface="Anuphan" pitchFamily="2" charset="-34"/>
+                <a:ea typeface="Aptos" panose="020B0004020202020204" pitchFamily="34" charset="0"/>
+                <a:cs typeface="Anuphan" pitchFamily="2" charset="-34"/>
+              </a:rPr>
+              <a:t>    'SVM'                   : SVC(</a:t>
+            </a:r>
+            <a:r>
+              <a:rPr lang="en-US" sz="1000" kern="100" dirty="0" err="1">
+                <a:effectLst/>
+                <a:latin typeface="Anuphan" pitchFamily="2" charset="-34"/>
+                <a:ea typeface="Aptos" panose="020B0004020202020204" pitchFamily="34" charset="0"/>
+                <a:cs typeface="Anuphan" pitchFamily="2" charset="-34"/>
+              </a:rPr>
+              <a:t>random_state</a:t>
+            </a:r>
+            <a:r>
+              <a:rPr lang="en-US" sz="1000" kern="100" dirty="0">
+                <a:effectLst/>
+                <a:latin typeface="Anuphan" pitchFamily="2" charset="-34"/>
+                <a:ea typeface="Aptos" panose="020B0004020202020204" pitchFamily="34" charset="0"/>
+                <a:cs typeface="Anuphan" pitchFamily="2" charset="-34"/>
+              </a:rPr>
+              <a:t>=42),</a:t>
+            </a:r>
+          </a:p>
+          <a:p>
+            <a:pPr marL="0" marR="0">
+              <a:lnSpc>
+                <a:spcPct val="115000"/>
+              </a:lnSpc>
+              <a:spcAft>
+                <a:spcPts val="800"/>
+              </a:spcAft>
+              <a:buNone/>
+            </a:pPr>
+            <a:r>
+              <a:rPr lang="en-US" sz="1000" kern="100" dirty="0">
+                <a:effectLst/>
+                <a:latin typeface="Anuphan" pitchFamily="2" charset="-34"/>
+                <a:ea typeface="Aptos" panose="020B0004020202020204" pitchFamily="34" charset="0"/>
+                <a:cs typeface="Anuphan" pitchFamily="2" charset="-34"/>
+              </a:rPr>
+              <a:t>    'KNN'                   : </a:t>
+            </a:r>
+            <a:r>
+              <a:rPr lang="en-US" sz="1000" kern="100" dirty="0" err="1">
+                <a:effectLst/>
+                <a:latin typeface="Anuphan" pitchFamily="2" charset="-34"/>
+                <a:ea typeface="Aptos" panose="020B0004020202020204" pitchFamily="34" charset="0"/>
+                <a:cs typeface="Anuphan" pitchFamily="2" charset="-34"/>
+              </a:rPr>
+              <a:t>KNeighborsClassifier</a:t>
+            </a:r>
+            <a:r>
+              <a:rPr lang="en-US" sz="1000" kern="100" dirty="0">
+                <a:effectLst/>
+                <a:latin typeface="Anuphan" pitchFamily="2" charset="-34"/>
+                <a:ea typeface="Aptos" panose="020B0004020202020204" pitchFamily="34" charset="0"/>
+                <a:cs typeface="Anuphan" pitchFamily="2" charset="-34"/>
+              </a:rPr>
+              <a:t>()</a:t>
+            </a:r>
+          </a:p>
+          <a:p>
+            <a:pPr marL="0" marR="0">
+              <a:lnSpc>
+                <a:spcPct val="115000"/>
+              </a:lnSpc>
+              <a:spcAft>
+                <a:spcPts val="800"/>
+              </a:spcAft>
+              <a:buNone/>
+            </a:pPr>
+            <a:r>
+              <a:rPr lang="en-US" sz="1000" kern="100" dirty="0">
+                <a:effectLst/>
+                <a:latin typeface="Anuphan" pitchFamily="2" charset="-34"/>
+                <a:ea typeface="Aptos" panose="020B0004020202020204" pitchFamily="34" charset="0"/>
+                <a:cs typeface="Anuphan" pitchFamily="2" charset="-34"/>
+              </a:rPr>
+              <a:t>}</a:t>
+            </a:r>
+          </a:p>
+          <a:p>
+            <a:pPr marL="0" marR="0">
+              <a:lnSpc>
+                <a:spcPct val="115000"/>
+              </a:lnSpc>
+              <a:spcAft>
+                <a:spcPts val="800"/>
+              </a:spcAft>
+              <a:buNone/>
+            </a:pPr>
+            <a:r>
+              <a:rPr lang="en-US" sz="1000" kern="100" dirty="0">
+                <a:effectLst/>
+                <a:latin typeface="Anuphan" pitchFamily="2" charset="-34"/>
+                <a:ea typeface="Aptos" panose="020B0004020202020204" pitchFamily="34" charset="0"/>
+                <a:cs typeface="Anuphan" pitchFamily="2" charset="-34"/>
+              </a:rPr>
+              <a:t> </a:t>
+            </a:r>
+          </a:p>
+          <a:p>
+            <a:pPr marL="0" marR="0">
+              <a:lnSpc>
+                <a:spcPct val="115000"/>
+              </a:lnSpc>
+              <a:spcAft>
+                <a:spcPts val="800"/>
+              </a:spcAft>
+              <a:buNone/>
+            </a:pPr>
+            <a:r>
+              <a:rPr lang="en-US" sz="1000" kern="100" dirty="0">
+                <a:effectLst/>
+                <a:latin typeface="Anuphan" pitchFamily="2" charset="-34"/>
+                <a:ea typeface="Aptos" panose="020B0004020202020204" pitchFamily="34" charset="0"/>
+                <a:cs typeface="Anuphan" pitchFamily="2" charset="-34"/>
+              </a:rPr>
+              <a:t>for name, model in </a:t>
+            </a:r>
+            <a:r>
+              <a:rPr lang="en-US" sz="1000" kern="100" dirty="0" err="1">
+                <a:effectLst/>
+                <a:latin typeface="Anuphan" pitchFamily="2" charset="-34"/>
+                <a:ea typeface="Aptos" panose="020B0004020202020204" pitchFamily="34" charset="0"/>
+                <a:cs typeface="Anuphan" pitchFamily="2" charset="-34"/>
+              </a:rPr>
+              <a:t>models.items</a:t>
+            </a:r>
+            <a:r>
+              <a:rPr lang="en-US" sz="1000" kern="100" dirty="0">
+                <a:effectLst/>
+                <a:latin typeface="Anuphan" pitchFamily="2" charset="-34"/>
+                <a:ea typeface="Aptos" panose="020B0004020202020204" pitchFamily="34" charset="0"/>
+                <a:cs typeface="Anuphan" pitchFamily="2" charset="-34"/>
+              </a:rPr>
+              <a:t>():</a:t>
+            </a:r>
+          </a:p>
+          <a:p>
+            <a:pPr marL="0" marR="0">
+              <a:lnSpc>
+                <a:spcPct val="115000"/>
+              </a:lnSpc>
+              <a:spcAft>
+                <a:spcPts val="800"/>
+              </a:spcAft>
+              <a:buNone/>
+            </a:pPr>
+            <a:r>
+              <a:rPr lang="en-US" sz="1000" kern="100" dirty="0">
+                <a:effectLst/>
+                <a:latin typeface="Anuphan" pitchFamily="2" charset="-34"/>
+                <a:ea typeface="Aptos" panose="020B0004020202020204" pitchFamily="34" charset="0"/>
+                <a:cs typeface="Anuphan" pitchFamily="2" charset="-34"/>
+              </a:rPr>
+              <a:t>    </a:t>
+            </a:r>
+            <a:r>
+              <a:rPr lang="en-US" sz="1000" kern="100" dirty="0" err="1">
+                <a:effectLst/>
+                <a:latin typeface="Anuphan" pitchFamily="2" charset="-34"/>
+                <a:ea typeface="Aptos" panose="020B0004020202020204" pitchFamily="34" charset="0"/>
+                <a:cs typeface="Anuphan" pitchFamily="2" charset="-34"/>
+              </a:rPr>
+              <a:t>model.fit</a:t>
+            </a:r>
+            <a:r>
+              <a:rPr lang="en-US" sz="1000" kern="100" dirty="0">
+                <a:effectLst/>
+                <a:latin typeface="Anuphan" pitchFamily="2" charset="-34"/>
+                <a:ea typeface="Aptos" panose="020B0004020202020204" pitchFamily="34" charset="0"/>
+                <a:cs typeface="Anuphan" pitchFamily="2" charset="-34"/>
+              </a:rPr>
+              <a:t>(</a:t>
+            </a:r>
+            <a:r>
+              <a:rPr lang="en-US" sz="1000" kern="100" dirty="0" err="1">
+                <a:effectLst/>
+                <a:latin typeface="Anuphan" pitchFamily="2" charset="-34"/>
+                <a:ea typeface="Aptos" panose="020B0004020202020204" pitchFamily="34" charset="0"/>
+                <a:cs typeface="Anuphan" pitchFamily="2" charset="-34"/>
+              </a:rPr>
+              <a:t>X_train</a:t>
+            </a:r>
+            <a:r>
+              <a:rPr lang="en-US" sz="1000" kern="100" dirty="0">
+                <a:effectLst/>
+                <a:latin typeface="Anuphan" pitchFamily="2" charset="-34"/>
+                <a:ea typeface="Aptos" panose="020B0004020202020204" pitchFamily="34" charset="0"/>
+                <a:cs typeface="Anuphan" pitchFamily="2" charset="-34"/>
+              </a:rPr>
+              <a:t>, </a:t>
+            </a:r>
+            <a:r>
+              <a:rPr lang="en-US" sz="1000" kern="100" dirty="0" err="1">
+                <a:effectLst/>
+                <a:latin typeface="Anuphan" pitchFamily="2" charset="-34"/>
+                <a:ea typeface="Aptos" panose="020B0004020202020204" pitchFamily="34" charset="0"/>
+                <a:cs typeface="Anuphan" pitchFamily="2" charset="-34"/>
+              </a:rPr>
+              <a:t>y_train</a:t>
+            </a:r>
+            <a:r>
+              <a:rPr lang="en-US" sz="1000" kern="100" dirty="0">
+                <a:effectLst/>
+                <a:latin typeface="Anuphan" pitchFamily="2" charset="-34"/>
+                <a:ea typeface="Aptos" panose="020B0004020202020204" pitchFamily="34" charset="0"/>
+                <a:cs typeface="Anuphan" pitchFamily="2" charset="-34"/>
+              </a:rPr>
+              <a:t>)</a:t>
+            </a:r>
+          </a:p>
+          <a:p>
+            <a:pPr marL="0" marR="0">
+              <a:lnSpc>
+                <a:spcPct val="115000"/>
+              </a:lnSpc>
+              <a:spcAft>
+                <a:spcPts val="800"/>
+              </a:spcAft>
+              <a:buNone/>
+            </a:pPr>
+            <a:r>
+              <a:rPr lang="en-US" sz="1000" kern="100" dirty="0">
+                <a:effectLst/>
+                <a:latin typeface="Anuphan" pitchFamily="2" charset="-34"/>
+                <a:ea typeface="Aptos" panose="020B0004020202020204" pitchFamily="34" charset="0"/>
+                <a:cs typeface="Anuphan" pitchFamily="2" charset="-34"/>
+              </a:rPr>
+              <a:t>    </a:t>
+            </a:r>
+            <a:r>
+              <a:rPr lang="en-US" sz="1000" kern="100" dirty="0" err="1">
+                <a:effectLst/>
+                <a:latin typeface="Anuphan" pitchFamily="2" charset="-34"/>
+                <a:ea typeface="Aptos" panose="020B0004020202020204" pitchFamily="34" charset="0"/>
+                <a:cs typeface="Anuphan" pitchFamily="2" charset="-34"/>
+              </a:rPr>
+              <a:t>y_pred</a:t>
+            </a:r>
+            <a:r>
+              <a:rPr lang="en-US" sz="1000" kern="100" dirty="0">
+                <a:effectLst/>
+                <a:latin typeface="Anuphan" pitchFamily="2" charset="-34"/>
+                <a:ea typeface="Aptos" panose="020B0004020202020204" pitchFamily="34" charset="0"/>
+                <a:cs typeface="Anuphan" pitchFamily="2" charset="-34"/>
+              </a:rPr>
+              <a:t> = </a:t>
+            </a:r>
+            <a:r>
+              <a:rPr lang="en-US" sz="1000" kern="100" dirty="0" err="1">
+                <a:effectLst/>
+                <a:latin typeface="Anuphan" pitchFamily="2" charset="-34"/>
+                <a:ea typeface="Aptos" panose="020B0004020202020204" pitchFamily="34" charset="0"/>
+                <a:cs typeface="Anuphan" pitchFamily="2" charset="-34"/>
+              </a:rPr>
+              <a:t>model.predict</a:t>
+            </a:r>
+            <a:r>
+              <a:rPr lang="en-US" sz="1000" kern="100" dirty="0">
+                <a:effectLst/>
+                <a:latin typeface="Anuphan" pitchFamily="2" charset="-34"/>
+                <a:ea typeface="Aptos" panose="020B0004020202020204" pitchFamily="34" charset="0"/>
+                <a:cs typeface="Anuphan" pitchFamily="2" charset="-34"/>
+              </a:rPr>
+              <a:t>(</a:t>
+            </a:r>
+            <a:r>
+              <a:rPr lang="en-US" sz="1000" kern="100" dirty="0" err="1">
+                <a:effectLst/>
+                <a:latin typeface="Anuphan" pitchFamily="2" charset="-34"/>
+                <a:ea typeface="Aptos" panose="020B0004020202020204" pitchFamily="34" charset="0"/>
+                <a:cs typeface="Anuphan" pitchFamily="2" charset="-34"/>
+              </a:rPr>
+              <a:t>X_test</a:t>
+            </a:r>
+            <a:r>
+              <a:rPr lang="en-US" sz="1000" kern="100" dirty="0">
+                <a:effectLst/>
+                <a:latin typeface="Anuphan" pitchFamily="2" charset="-34"/>
+                <a:ea typeface="Aptos" panose="020B0004020202020204" pitchFamily="34" charset="0"/>
+                <a:cs typeface="Anuphan" pitchFamily="2" charset="-34"/>
+              </a:rPr>
+              <a:t>)</a:t>
+            </a:r>
+          </a:p>
+          <a:p>
+            <a:pPr marL="0" marR="0">
+              <a:lnSpc>
+                <a:spcPct val="115000"/>
+              </a:lnSpc>
+              <a:spcAft>
+                <a:spcPts val="800"/>
+              </a:spcAft>
+              <a:buNone/>
+            </a:pPr>
+            <a:r>
+              <a:rPr lang="en-US" sz="1000" kern="100" dirty="0">
+                <a:effectLst/>
+                <a:latin typeface="Anuphan" pitchFamily="2" charset="-34"/>
+                <a:ea typeface="Aptos" panose="020B0004020202020204" pitchFamily="34" charset="0"/>
+                <a:cs typeface="Anuphan" pitchFamily="2" charset="-34"/>
+              </a:rPr>
+              <a:t>    acc = </a:t>
+            </a:r>
+            <a:r>
+              <a:rPr lang="en-US" sz="1000" kern="100" dirty="0" err="1">
+                <a:effectLst/>
+                <a:latin typeface="Anuphan" pitchFamily="2" charset="-34"/>
+                <a:ea typeface="Aptos" panose="020B0004020202020204" pitchFamily="34" charset="0"/>
+                <a:cs typeface="Anuphan" pitchFamily="2" charset="-34"/>
+              </a:rPr>
+              <a:t>accuracy_score</a:t>
+            </a:r>
+            <a:r>
+              <a:rPr lang="en-US" sz="1000" kern="100" dirty="0">
+                <a:effectLst/>
+                <a:latin typeface="Anuphan" pitchFamily="2" charset="-34"/>
+                <a:ea typeface="Aptos" panose="020B0004020202020204" pitchFamily="34" charset="0"/>
+                <a:cs typeface="Anuphan" pitchFamily="2" charset="-34"/>
+              </a:rPr>
+              <a:t>(</a:t>
+            </a:r>
+            <a:r>
+              <a:rPr lang="en-US" sz="1000" kern="100" dirty="0" err="1">
+                <a:effectLst/>
+                <a:latin typeface="Anuphan" pitchFamily="2" charset="-34"/>
+                <a:ea typeface="Aptos" panose="020B0004020202020204" pitchFamily="34" charset="0"/>
+                <a:cs typeface="Anuphan" pitchFamily="2" charset="-34"/>
+              </a:rPr>
+              <a:t>y_test</a:t>
+            </a:r>
+            <a:r>
+              <a:rPr lang="en-US" sz="1000" kern="100" dirty="0">
+                <a:effectLst/>
+                <a:latin typeface="Anuphan" pitchFamily="2" charset="-34"/>
+                <a:ea typeface="Aptos" panose="020B0004020202020204" pitchFamily="34" charset="0"/>
+                <a:cs typeface="Anuphan" pitchFamily="2" charset="-34"/>
+              </a:rPr>
+              <a:t>, </a:t>
+            </a:r>
+            <a:r>
+              <a:rPr lang="en-US" sz="1000" kern="100" dirty="0" err="1">
+                <a:effectLst/>
+                <a:latin typeface="Anuphan" pitchFamily="2" charset="-34"/>
+                <a:ea typeface="Aptos" panose="020B0004020202020204" pitchFamily="34" charset="0"/>
+                <a:cs typeface="Anuphan" pitchFamily="2" charset="-34"/>
+              </a:rPr>
+              <a:t>y_pred</a:t>
+            </a:r>
+            <a:r>
+              <a:rPr lang="en-US" sz="1000" kern="100" dirty="0">
+                <a:effectLst/>
+                <a:latin typeface="Anuphan" pitchFamily="2" charset="-34"/>
+                <a:ea typeface="Aptos" panose="020B0004020202020204" pitchFamily="34" charset="0"/>
+                <a:cs typeface="Anuphan" pitchFamily="2" charset="-34"/>
+              </a:rPr>
+              <a:t>)</a:t>
+            </a:r>
+          </a:p>
+          <a:p>
+            <a:pPr marL="0" marR="0">
+              <a:lnSpc>
+                <a:spcPct val="115000"/>
+              </a:lnSpc>
+              <a:spcAft>
+                <a:spcPts val="800"/>
+              </a:spcAft>
+              <a:buNone/>
+            </a:pPr>
+            <a:r>
+              <a:rPr lang="en-US" sz="1000" kern="100" dirty="0">
+                <a:effectLst/>
+                <a:latin typeface="Anuphan" pitchFamily="2" charset="-34"/>
+                <a:ea typeface="Aptos" panose="020B0004020202020204" pitchFamily="34" charset="0"/>
+                <a:cs typeface="Anuphan" pitchFamily="2" charset="-34"/>
+              </a:rPr>
+              <a:t>    print(f"{name:25s} → Accuracy: {acc:.4f}")</a:t>
+            </a:r>
+          </a:p>
+        </p:txBody>
+      </p:sp>
+    </p:spTree>
+    <p:extLst>
+      <p:ext uri="{BB962C8B-B14F-4D97-AF65-F5344CB8AC3E}">
+        <p14:creationId xmlns:p14="http://schemas.microsoft.com/office/powerpoint/2010/main" val="4148125977"/>
+      </p:ext>
+    </p:extLst>
+  </p:cSld>
+  <p:clrMapOvr>
+    <a:masterClrMapping/>
+  </p:clrMapOvr>
+</p:sld>
+</file>
+
+<file path=ppt/slides/slide52.xml><?xml version="1.0" encoding="utf-8"?>
+<p:sld xmlns:a="http://schemas.openxmlformats.org/drawingml/2006/main" xmlns:r="http://schemas.openxmlformats.org/officeDocument/2006/relationships" xmlns:p="http://schemas.openxmlformats.org/presentationml/2006/main">
+  <p:cSld>
+    <p:spTree>
+      <p:nvGrpSpPr>
+        <p:cNvPr id="1" name="">
+          <a:extLst>
+            <a:ext uri="{FF2B5EF4-FFF2-40B4-BE49-F238E27FC236}">
               <a16:creationId xmlns:a16="http://schemas.microsoft.com/office/drawing/2014/main" id="{ED6B5962-71A0-F523-1290-654A1FA91639}"/>
             </a:ext>
           </a:extLst>
@@ -12224,7 +13040,7 @@
 </p:sld>
 </file>
 
-<file path=ppt/slides/slide52.xml><?xml version="1.0" encoding="utf-8"?>
+<file path=ppt/slides/slide53.xml><?xml version="1.0" encoding="utf-8"?>
 <p:sld xmlns:a="http://schemas.openxmlformats.org/drawingml/2006/main" xmlns:r="http://schemas.openxmlformats.org/officeDocument/2006/relationships" xmlns:p="http://schemas.openxmlformats.org/presentationml/2006/main">
   <p:cSld>
     <p:spTree>
@@ -12393,7 +13209,7 @@
 </p:sld>
 </file>
 
-<file path=ppt/slides/slide53.xml><?xml version="1.0" encoding="utf-8"?>
+<file path=ppt/slides/slide54.xml><?xml version="1.0" encoding="utf-8"?>
 <p:sld xmlns:a="http://schemas.openxmlformats.org/drawingml/2006/main" xmlns:r="http://schemas.openxmlformats.org/officeDocument/2006/relationships" xmlns:p="http://schemas.openxmlformats.org/presentationml/2006/main">
   <p:cSld>
     <p:spTree>
@@ -12562,7 +13378,669 @@
 </p:sld>
 </file>
 
-<file path=ppt/slides/slide54.xml><?xml version="1.0" encoding="utf-8"?>
+<file path=ppt/slides/slide55.xml><?xml version="1.0" encoding="utf-8"?>
+<p:sld xmlns:a="http://schemas.openxmlformats.org/drawingml/2006/main" xmlns:r="http://schemas.openxmlformats.org/officeDocument/2006/relationships" xmlns:p="http://schemas.openxmlformats.org/presentationml/2006/main">
+  <p:cSld>
+    <p:spTree>
+      <p:nvGrpSpPr>
+        <p:cNvPr id="1" name="">
+          <a:extLst>
+            <a:ext uri="{FF2B5EF4-FFF2-40B4-BE49-F238E27FC236}">
+              <a16:creationId xmlns:a16="http://schemas.microsoft.com/office/drawing/2014/main" id="{4F3BB634-F717-0CD7-E6E8-FC876BCE10E4}"/>
+            </a:ext>
+          </a:extLst>
+        </p:cNvPr>
+        <p:cNvGrpSpPr/>
+        <p:nvPr/>
+      </p:nvGrpSpPr>
+      <p:grpSpPr>
+        <a:xfrm>
+          <a:off x="0" y="0"/>
+          <a:ext cx="0" cy="0"/>
+          <a:chOff x="0" y="0"/>
+          <a:chExt cx="0" cy="0"/>
+        </a:xfrm>
+      </p:grpSpPr>
+      <p:sp>
+        <p:nvSpPr>
+          <p:cNvPr id="2" name="Title 1">
+            <a:extLst>
+              <a:ext uri="{FF2B5EF4-FFF2-40B4-BE49-F238E27FC236}">
+                <a16:creationId xmlns:a16="http://schemas.microsoft.com/office/drawing/2014/main" id="{DBBBBB7E-26D9-3DBA-6B36-99CE71114B90}"/>
+              </a:ext>
+            </a:extLst>
+          </p:cNvPr>
+          <p:cNvSpPr>
+            <a:spLocks noGrp="1"/>
+          </p:cNvSpPr>
+          <p:nvPr>
+            <p:ph type="ctrTitle"/>
+          </p:nvPr>
+        </p:nvSpPr>
+        <p:spPr>
+          <a:xfrm>
+            <a:off x="1317523" y="333332"/>
+            <a:ext cx="9556954" cy="825910"/>
+          </a:xfrm>
+        </p:spPr>
+        <p:txBody>
+          <a:bodyPr>
+            <a:noAutofit/>
+          </a:bodyPr>
+          <a:lstStyle/>
+          <a:p>
+            <a:pPr algn="l"/>
+            <a:r>
+              <a:rPr lang="en-US" sz="4000" dirty="0">
+                <a:solidFill>
+                  <a:schemeClr val="tx1">
+                    <a:lumMod val="75000"/>
+                    <a:lumOff val="25000"/>
+                  </a:schemeClr>
+                </a:solidFill>
+                <a:latin typeface="Anuphan" pitchFamily="2" charset="-34"/>
+                <a:cs typeface="Anuphan" pitchFamily="2" charset="-34"/>
+              </a:rPr>
+              <a:t>Using Machine Learning Model</a:t>
+            </a:r>
+          </a:p>
+        </p:txBody>
+      </p:sp>
+      <p:sp>
+        <p:nvSpPr>
+          <p:cNvPr id="4" name="TextBox 3">
+            <a:extLst>
+              <a:ext uri="{FF2B5EF4-FFF2-40B4-BE49-F238E27FC236}">
+                <a16:creationId xmlns:a16="http://schemas.microsoft.com/office/drawing/2014/main" id="{13D4C96A-A5AB-6D6F-BA78-ABAED2A39E8C}"/>
+              </a:ext>
+            </a:extLst>
+          </p:cNvPr>
+          <p:cNvSpPr txBox="1"/>
+          <p:nvPr/>
+        </p:nvSpPr>
+        <p:spPr>
+          <a:xfrm>
+            <a:off x="1317523" y="1159242"/>
+            <a:ext cx="9556954" cy="338554"/>
+          </a:xfrm>
+          <a:prstGeom prst="rect">
+            <a:avLst/>
+          </a:prstGeom>
+          <a:noFill/>
+        </p:spPr>
+        <p:txBody>
+          <a:bodyPr wrap="square" rtlCol="0">
+            <a:spAutoFit/>
+          </a:bodyPr>
+          <a:lstStyle/>
+          <a:p>
+            <a:r>
+              <a:rPr lang="en-US" sz="1600" dirty="0">
+                <a:solidFill>
+                  <a:schemeClr val="tx1">
+                    <a:lumMod val="75000"/>
+                    <a:lumOff val="25000"/>
+                  </a:schemeClr>
+                </a:solidFill>
+                <a:latin typeface="Anuphan" pitchFamily="2" charset="-34"/>
+                <a:cs typeface="Anuphan" pitchFamily="2" charset="-34"/>
+              </a:rPr>
+              <a:t>made by Claude</a:t>
+            </a:r>
+          </a:p>
+        </p:txBody>
+      </p:sp>
+      <p:sp>
+        <p:nvSpPr>
+          <p:cNvPr id="6" name="TextBox 5">
+            <a:extLst>
+              <a:ext uri="{FF2B5EF4-FFF2-40B4-BE49-F238E27FC236}">
+                <a16:creationId xmlns:a16="http://schemas.microsoft.com/office/drawing/2014/main" id="{C9958A1F-A5A7-D35B-9AD2-8A32609BB536}"/>
+              </a:ext>
+            </a:extLst>
+          </p:cNvPr>
+          <p:cNvSpPr txBox="1"/>
+          <p:nvPr/>
+        </p:nvSpPr>
+        <p:spPr>
+          <a:xfrm>
+            <a:off x="1317523" y="1832807"/>
+            <a:ext cx="6096000" cy="3477875"/>
+          </a:xfrm>
+          <a:prstGeom prst="rect">
+            <a:avLst/>
+          </a:prstGeom>
+          <a:noFill/>
+        </p:spPr>
+        <p:txBody>
+          <a:bodyPr wrap="square">
+            <a:spAutoFit/>
+          </a:bodyPr>
+          <a:lstStyle/>
+          <a:p>
+            <a:r>
+              <a:rPr lang="en-US" sz="1100" dirty="0">
+                <a:latin typeface="Anuphan" pitchFamily="2" charset="-34"/>
+                <a:cs typeface="Anuphan" pitchFamily="2" charset="-34"/>
+              </a:rPr>
+              <a:t>from </a:t>
+            </a:r>
+            <a:r>
+              <a:rPr lang="en-US" sz="1100" dirty="0" err="1">
+                <a:latin typeface="Anuphan" pitchFamily="2" charset="-34"/>
+                <a:cs typeface="Anuphan" pitchFamily="2" charset="-34"/>
+              </a:rPr>
+              <a:t>sklearn.metrics</a:t>
+            </a:r>
+            <a:r>
+              <a:rPr lang="en-US" sz="1100" dirty="0">
+                <a:latin typeface="Anuphan" pitchFamily="2" charset="-34"/>
+                <a:cs typeface="Anuphan" pitchFamily="2" charset="-34"/>
+              </a:rPr>
+              <a:t> import (</a:t>
+            </a:r>
+          </a:p>
+          <a:p>
+            <a:r>
+              <a:rPr lang="en-US" sz="1100" dirty="0">
+                <a:latin typeface="Anuphan" pitchFamily="2" charset="-34"/>
+                <a:cs typeface="Anuphan" pitchFamily="2" charset="-34"/>
+              </a:rPr>
+              <a:t>    </a:t>
+            </a:r>
+            <a:r>
+              <a:rPr lang="en-US" sz="1100" dirty="0" err="1">
+                <a:latin typeface="Anuphan" pitchFamily="2" charset="-34"/>
+                <a:cs typeface="Anuphan" pitchFamily="2" charset="-34"/>
+              </a:rPr>
+              <a:t>classification_report</a:t>
+            </a:r>
+            <a:r>
+              <a:rPr lang="en-US" sz="1100" dirty="0">
+                <a:latin typeface="Anuphan" pitchFamily="2" charset="-34"/>
+                <a:cs typeface="Anuphan" pitchFamily="2" charset="-34"/>
+              </a:rPr>
+              <a:t>,</a:t>
+            </a:r>
+          </a:p>
+          <a:p>
+            <a:r>
+              <a:rPr lang="en-US" sz="1100" dirty="0">
+                <a:latin typeface="Anuphan" pitchFamily="2" charset="-34"/>
+                <a:cs typeface="Anuphan" pitchFamily="2" charset="-34"/>
+              </a:rPr>
+              <a:t>    </a:t>
+            </a:r>
+            <a:r>
+              <a:rPr lang="en-US" sz="1100" dirty="0" err="1">
+                <a:latin typeface="Anuphan" pitchFamily="2" charset="-34"/>
+                <a:cs typeface="Anuphan" pitchFamily="2" charset="-34"/>
+              </a:rPr>
+              <a:t>confusion_matrix</a:t>
+            </a:r>
+            <a:r>
+              <a:rPr lang="en-US" sz="1100" dirty="0">
+                <a:latin typeface="Anuphan" pitchFamily="2" charset="-34"/>
+                <a:cs typeface="Anuphan" pitchFamily="2" charset="-34"/>
+              </a:rPr>
+              <a:t>,</a:t>
+            </a:r>
+          </a:p>
+          <a:p>
+            <a:r>
+              <a:rPr lang="en-US" sz="1100" dirty="0">
+                <a:latin typeface="Anuphan" pitchFamily="2" charset="-34"/>
+                <a:cs typeface="Anuphan" pitchFamily="2" charset="-34"/>
+              </a:rPr>
+              <a:t>    </a:t>
+            </a:r>
+            <a:r>
+              <a:rPr lang="en-US" sz="1100" dirty="0" err="1">
+                <a:latin typeface="Anuphan" pitchFamily="2" charset="-34"/>
+                <a:cs typeface="Anuphan" pitchFamily="2" charset="-34"/>
+              </a:rPr>
+              <a:t>roc_auc_score</a:t>
+            </a:r>
+            <a:endParaRPr lang="en-US" sz="1100" dirty="0">
+              <a:latin typeface="Anuphan" pitchFamily="2" charset="-34"/>
+              <a:cs typeface="Anuphan" pitchFamily="2" charset="-34"/>
+            </a:endParaRPr>
+          </a:p>
+          <a:p>
+            <a:r>
+              <a:rPr lang="en-US" sz="1100" dirty="0">
+                <a:latin typeface="Anuphan" pitchFamily="2" charset="-34"/>
+                <a:cs typeface="Anuphan" pitchFamily="2" charset="-34"/>
+              </a:rPr>
+              <a:t>)</a:t>
+            </a:r>
+          </a:p>
+          <a:p>
+            <a:endParaRPr lang="en-US" sz="1100" dirty="0">
+              <a:latin typeface="Anuphan" pitchFamily="2" charset="-34"/>
+              <a:cs typeface="Anuphan" pitchFamily="2" charset="-34"/>
+            </a:endParaRPr>
+          </a:p>
+          <a:p>
+            <a:r>
+              <a:rPr lang="en-US" sz="1100" dirty="0">
+                <a:latin typeface="Anuphan" pitchFamily="2" charset="-34"/>
+                <a:cs typeface="Anuphan" pitchFamily="2" charset="-34"/>
+              </a:rPr>
+              <a:t>model = </a:t>
+            </a:r>
+            <a:r>
+              <a:rPr lang="en-US" sz="1100" dirty="0" err="1">
+                <a:latin typeface="Anuphan" pitchFamily="2" charset="-34"/>
+                <a:cs typeface="Anuphan" pitchFamily="2" charset="-34"/>
+              </a:rPr>
+              <a:t>RandomForestClassifier</a:t>
+            </a:r>
+            <a:r>
+              <a:rPr lang="en-US" sz="1100" dirty="0">
+                <a:latin typeface="Anuphan" pitchFamily="2" charset="-34"/>
+                <a:cs typeface="Anuphan" pitchFamily="2" charset="-34"/>
+              </a:rPr>
+              <a:t>(</a:t>
+            </a:r>
+            <a:r>
+              <a:rPr lang="en-US" sz="1100" dirty="0" err="1">
+                <a:latin typeface="Anuphan" pitchFamily="2" charset="-34"/>
+                <a:cs typeface="Anuphan" pitchFamily="2" charset="-34"/>
+              </a:rPr>
+              <a:t>n_estimators</a:t>
+            </a:r>
+            <a:r>
+              <a:rPr lang="en-US" sz="1100" dirty="0">
+                <a:latin typeface="Anuphan" pitchFamily="2" charset="-34"/>
+                <a:cs typeface="Anuphan" pitchFamily="2" charset="-34"/>
+              </a:rPr>
+              <a:t>=100, </a:t>
+            </a:r>
+            <a:r>
+              <a:rPr lang="en-US" sz="1100" dirty="0" err="1">
+                <a:latin typeface="Anuphan" pitchFamily="2" charset="-34"/>
+                <a:cs typeface="Anuphan" pitchFamily="2" charset="-34"/>
+              </a:rPr>
+              <a:t>random_state</a:t>
+            </a:r>
+            <a:r>
+              <a:rPr lang="en-US" sz="1100" dirty="0">
+                <a:latin typeface="Anuphan" pitchFamily="2" charset="-34"/>
+                <a:cs typeface="Anuphan" pitchFamily="2" charset="-34"/>
+              </a:rPr>
+              <a:t>=42)</a:t>
+            </a:r>
+          </a:p>
+          <a:p>
+            <a:r>
+              <a:rPr lang="en-US" sz="1100" dirty="0" err="1">
+                <a:latin typeface="Anuphan" pitchFamily="2" charset="-34"/>
+                <a:cs typeface="Anuphan" pitchFamily="2" charset="-34"/>
+              </a:rPr>
+              <a:t>model.fit</a:t>
+            </a:r>
+            <a:r>
+              <a:rPr lang="en-US" sz="1100" dirty="0">
+                <a:latin typeface="Anuphan" pitchFamily="2" charset="-34"/>
+                <a:cs typeface="Anuphan" pitchFamily="2" charset="-34"/>
+              </a:rPr>
+              <a:t>(</a:t>
+            </a:r>
+            <a:r>
+              <a:rPr lang="en-US" sz="1100" dirty="0" err="1">
+                <a:latin typeface="Anuphan" pitchFamily="2" charset="-34"/>
+                <a:cs typeface="Anuphan" pitchFamily="2" charset="-34"/>
+              </a:rPr>
+              <a:t>X_train</a:t>
+            </a:r>
+            <a:r>
+              <a:rPr lang="en-US" sz="1100" dirty="0">
+                <a:latin typeface="Anuphan" pitchFamily="2" charset="-34"/>
+                <a:cs typeface="Anuphan" pitchFamily="2" charset="-34"/>
+              </a:rPr>
+              <a:t>, </a:t>
+            </a:r>
+            <a:r>
+              <a:rPr lang="en-US" sz="1100" dirty="0" err="1">
+                <a:latin typeface="Anuphan" pitchFamily="2" charset="-34"/>
+                <a:cs typeface="Anuphan" pitchFamily="2" charset="-34"/>
+              </a:rPr>
+              <a:t>y_train</a:t>
+            </a:r>
+            <a:r>
+              <a:rPr lang="en-US" sz="1100" dirty="0">
+                <a:latin typeface="Anuphan" pitchFamily="2" charset="-34"/>
+                <a:cs typeface="Anuphan" pitchFamily="2" charset="-34"/>
+              </a:rPr>
+              <a:t>)</a:t>
+            </a:r>
+          </a:p>
+          <a:p>
+            <a:r>
+              <a:rPr lang="en-US" sz="1100" dirty="0" err="1">
+                <a:latin typeface="Anuphan" pitchFamily="2" charset="-34"/>
+                <a:cs typeface="Anuphan" pitchFamily="2" charset="-34"/>
+              </a:rPr>
+              <a:t>y_pred</a:t>
+            </a:r>
+            <a:r>
+              <a:rPr lang="en-US" sz="1100" dirty="0">
+                <a:latin typeface="Anuphan" pitchFamily="2" charset="-34"/>
+                <a:cs typeface="Anuphan" pitchFamily="2" charset="-34"/>
+              </a:rPr>
+              <a:t>  = </a:t>
+            </a:r>
+            <a:r>
+              <a:rPr lang="en-US" sz="1100" dirty="0" err="1">
+                <a:latin typeface="Anuphan" pitchFamily="2" charset="-34"/>
+                <a:cs typeface="Anuphan" pitchFamily="2" charset="-34"/>
+              </a:rPr>
+              <a:t>model.predict</a:t>
+            </a:r>
+            <a:r>
+              <a:rPr lang="en-US" sz="1100" dirty="0">
+                <a:latin typeface="Anuphan" pitchFamily="2" charset="-34"/>
+                <a:cs typeface="Anuphan" pitchFamily="2" charset="-34"/>
+              </a:rPr>
+              <a:t>(</a:t>
+            </a:r>
+            <a:r>
+              <a:rPr lang="en-US" sz="1100" dirty="0" err="1">
+                <a:latin typeface="Anuphan" pitchFamily="2" charset="-34"/>
+                <a:cs typeface="Anuphan" pitchFamily="2" charset="-34"/>
+              </a:rPr>
+              <a:t>X_test</a:t>
+            </a:r>
+            <a:r>
+              <a:rPr lang="en-US" sz="1100" dirty="0">
+                <a:latin typeface="Anuphan" pitchFamily="2" charset="-34"/>
+                <a:cs typeface="Anuphan" pitchFamily="2" charset="-34"/>
+              </a:rPr>
+              <a:t>)</a:t>
+            </a:r>
+          </a:p>
+          <a:p>
+            <a:r>
+              <a:rPr lang="en-US" sz="1100" dirty="0" err="1">
+                <a:latin typeface="Anuphan" pitchFamily="2" charset="-34"/>
+                <a:cs typeface="Anuphan" pitchFamily="2" charset="-34"/>
+              </a:rPr>
+              <a:t>y_proba</a:t>
+            </a:r>
+            <a:r>
+              <a:rPr lang="en-US" sz="1100" dirty="0">
+                <a:latin typeface="Anuphan" pitchFamily="2" charset="-34"/>
+                <a:cs typeface="Anuphan" pitchFamily="2" charset="-34"/>
+              </a:rPr>
+              <a:t> = </a:t>
+            </a:r>
+            <a:r>
+              <a:rPr lang="en-US" sz="1100" dirty="0" err="1">
+                <a:latin typeface="Anuphan" pitchFamily="2" charset="-34"/>
+                <a:cs typeface="Anuphan" pitchFamily="2" charset="-34"/>
+              </a:rPr>
+              <a:t>model.predict_proba</a:t>
+            </a:r>
+            <a:r>
+              <a:rPr lang="en-US" sz="1100" dirty="0">
+                <a:latin typeface="Anuphan" pitchFamily="2" charset="-34"/>
+                <a:cs typeface="Anuphan" pitchFamily="2" charset="-34"/>
+              </a:rPr>
+              <a:t>(</a:t>
+            </a:r>
+            <a:r>
+              <a:rPr lang="en-US" sz="1100" dirty="0" err="1">
+                <a:latin typeface="Anuphan" pitchFamily="2" charset="-34"/>
+                <a:cs typeface="Anuphan" pitchFamily="2" charset="-34"/>
+              </a:rPr>
+              <a:t>X_test</a:t>
+            </a:r>
+            <a:r>
+              <a:rPr lang="en-US" sz="1100" dirty="0">
+                <a:latin typeface="Anuphan" pitchFamily="2" charset="-34"/>
+                <a:cs typeface="Anuphan" pitchFamily="2" charset="-34"/>
+              </a:rPr>
+              <a:t>)[:, 1]</a:t>
+            </a:r>
+          </a:p>
+          <a:p>
+            <a:endParaRPr lang="en-US" sz="1100" dirty="0">
+              <a:latin typeface="Anuphan" pitchFamily="2" charset="-34"/>
+              <a:cs typeface="Anuphan" pitchFamily="2" charset="-34"/>
+            </a:endParaRPr>
+          </a:p>
+          <a:p>
+            <a:r>
+              <a:rPr lang="en-US" sz="1100" dirty="0">
+                <a:latin typeface="Anuphan" pitchFamily="2" charset="-34"/>
+                <a:cs typeface="Anuphan" pitchFamily="2" charset="-34"/>
+              </a:rPr>
+              <a:t># Full classification report</a:t>
+            </a:r>
+          </a:p>
+          <a:p>
+            <a:r>
+              <a:rPr lang="en-US" sz="1100" dirty="0">
+                <a:latin typeface="Anuphan" pitchFamily="2" charset="-34"/>
+                <a:cs typeface="Anuphan" pitchFamily="2" charset="-34"/>
+              </a:rPr>
+              <a:t>print(</a:t>
+            </a:r>
+            <a:r>
+              <a:rPr lang="en-US" sz="1100" dirty="0" err="1">
+                <a:latin typeface="Anuphan" pitchFamily="2" charset="-34"/>
+                <a:cs typeface="Anuphan" pitchFamily="2" charset="-34"/>
+              </a:rPr>
+              <a:t>classification_report</a:t>
+            </a:r>
+            <a:r>
+              <a:rPr lang="en-US" sz="1100" dirty="0">
+                <a:latin typeface="Anuphan" pitchFamily="2" charset="-34"/>
+                <a:cs typeface="Anuphan" pitchFamily="2" charset="-34"/>
+              </a:rPr>
+              <a:t>(</a:t>
+            </a:r>
+            <a:r>
+              <a:rPr lang="en-US" sz="1100" dirty="0" err="1">
+                <a:latin typeface="Anuphan" pitchFamily="2" charset="-34"/>
+                <a:cs typeface="Anuphan" pitchFamily="2" charset="-34"/>
+              </a:rPr>
+              <a:t>y_test</a:t>
+            </a:r>
+            <a:r>
+              <a:rPr lang="en-US" sz="1100" dirty="0">
+                <a:latin typeface="Anuphan" pitchFamily="2" charset="-34"/>
+                <a:cs typeface="Anuphan" pitchFamily="2" charset="-34"/>
+              </a:rPr>
+              <a:t>, </a:t>
+            </a:r>
+            <a:r>
+              <a:rPr lang="en-US" sz="1100" dirty="0" err="1">
+                <a:latin typeface="Anuphan" pitchFamily="2" charset="-34"/>
+                <a:cs typeface="Anuphan" pitchFamily="2" charset="-34"/>
+              </a:rPr>
+              <a:t>y_pred</a:t>
+            </a:r>
+            <a:r>
+              <a:rPr lang="en-US" sz="1100" dirty="0">
+                <a:latin typeface="Anuphan" pitchFamily="2" charset="-34"/>
+                <a:cs typeface="Anuphan" pitchFamily="2" charset="-34"/>
+              </a:rPr>
+              <a:t>, </a:t>
+            </a:r>
+            <a:r>
+              <a:rPr lang="en-US" sz="1100" dirty="0" err="1">
+                <a:latin typeface="Anuphan" pitchFamily="2" charset="-34"/>
+                <a:cs typeface="Anuphan" pitchFamily="2" charset="-34"/>
+              </a:rPr>
+              <a:t>target_names</a:t>
+            </a:r>
+            <a:r>
+              <a:rPr lang="en-US" sz="1100" dirty="0">
+                <a:latin typeface="Anuphan" pitchFamily="2" charset="-34"/>
+                <a:cs typeface="Anuphan" pitchFamily="2" charset="-34"/>
+              </a:rPr>
+              <a:t>=['Not Survived', 'Survived']))</a:t>
+            </a:r>
+          </a:p>
+          <a:p>
+            <a:endParaRPr lang="en-US" sz="1100" dirty="0">
+              <a:latin typeface="Anuphan" pitchFamily="2" charset="-34"/>
+              <a:cs typeface="Anuphan" pitchFamily="2" charset="-34"/>
+            </a:endParaRPr>
+          </a:p>
+          <a:p>
+            <a:r>
+              <a:rPr lang="en-US" sz="1100" dirty="0">
+                <a:latin typeface="Anuphan" pitchFamily="2" charset="-34"/>
+                <a:cs typeface="Anuphan" pitchFamily="2" charset="-34"/>
+              </a:rPr>
+              <a:t># Confusion matrix</a:t>
+            </a:r>
+          </a:p>
+          <a:p>
+            <a:r>
+              <a:rPr lang="en-US" sz="1100" dirty="0">
+                <a:latin typeface="Anuphan" pitchFamily="2" charset="-34"/>
+                <a:cs typeface="Anuphan" pitchFamily="2" charset="-34"/>
+              </a:rPr>
+              <a:t>print("Confusion Matrix:")</a:t>
+            </a:r>
+          </a:p>
+          <a:p>
+            <a:r>
+              <a:rPr lang="en-US" sz="1100" dirty="0">
+                <a:latin typeface="Anuphan" pitchFamily="2" charset="-34"/>
+                <a:cs typeface="Anuphan" pitchFamily="2" charset="-34"/>
+              </a:rPr>
+              <a:t>print(</a:t>
+            </a:r>
+            <a:r>
+              <a:rPr lang="en-US" sz="1100" dirty="0" err="1">
+                <a:latin typeface="Anuphan" pitchFamily="2" charset="-34"/>
+                <a:cs typeface="Anuphan" pitchFamily="2" charset="-34"/>
+              </a:rPr>
+              <a:t>confusion_matrix</a:t>
+            </a:r>
+            <a:r>
+              <a:rPr lang="en-US" sz="1100" dirty="0">
+                <a:latin typeface="Anuphan" pitchFamily="2" charset="-34"/>
+                <a:cs typeface="Anuphan" pitchFamily="2" charset="-34"/>
+              </a:rPr>
+              <a:t>(</a:t>
+            </a:r>
+            <a:r>
+              <a:rPr lang="en-US" sz="1100" dirty="0" err="1">
+                <a:latin typeface="Anuphan" pitchFamily="2" charset="-34"/>
+                <a:cs typeface="Anuphan" pitchFamily="2" charset="-34"/>
+              </a:rPr>
+              <a:t>y_test</a:t>
+            </a:r>
+            <a:r>
+              <a:rPr lang="en-US" sz="1100" dirty="0">
+                <a:latin typeface="Anuphan" pitchFamily="2" charset="-34"/>
+                <a:cs typeface="Anuphan" pitchFamily="2" charset="-34"/>
+              </a:rPr>
+              <a:t>, </a:t>
+            </a:r>
+            <a:r>
+              <a:rPr lang="en-US" sz="1100" dirty="0" err="1">
+                <a:latin typeface="Anuphan" pitchFamily="2" charset="-34"/>
+                <a:cs typeface="Anuphan" pitchFamily="2" charset="-34"/>
+              </a:rPr>
+              <a:t>y_pred</a:t>
+            </a:r>
+            <a:r>
+              <a:rPr lang="en-US" sz="1100" dirty="0">
+                <a:latin typeface="Anuphan" pitchFamily="2" charset="-34"/>
+                <a:cs typeface="Anuphan" pitchFamily="2" charset="-34"/>
+              </a:rPr>
+              <a:t>))</a:t>
+            </a:r>
+          </a:p>
+          <a:p>
+            <a:endParaRPr lang="en-US" sz="1100" dirty="0">
+              <a:latin typeface="Anuphan" pitchFamily="2" charset="-34"/>
+              <a:cs typeface="Anuphan" pitchFamily="2" charset="-34"/>
+            </a:endParaRPr>
+          </a:p>
+          <a:p>
+            <a:r>
+              <a:rPr lang="en-US" sz="1100" dirty="0">
+                <a:latin typeface="Anuphan" pitchFamily="2" charset="-34"/>
+                <a:cs typeface="Anuphan" pitchFamily="2" charset="-34"/>
+              </a:rPr>
+              <a:t># ROC-AUC score</a:t>
+            </a:r>
+          </a:p>
+          <a:p>
+            <a:r>
+              <a:rPr lang="en-US" sz="1100" dirty="0">
+                <a:latin typeface="Anuphan" pitchFamily="2" charset="-34"/>
+                <a:cs typeface="Anuphan" pitchFamily="2" charset="-34"/>
+              </a:rPr>
+              <a:t>print("ROC-AUC Score:", </a:t>
+            </a:r>
+            <a:r>
+              <a:rPr lang="en-US" sz="1100" dirty="0" err="1">
+                <a:latin typeface="Anuphan" pitchFamily="2" charset="-34"/>
+                <a:cs typeface="Anuphan" pitchFamily="2" charset="-34"/>
+              </a:rPr>
+              <a:t>roc_auc_score</a:t>
+            </a:r>
+            <a:r>
+              <a:rPr lang="en-US" sz="1100" dirty="0">
+                <a:latin typeface="Anuphan" pitchFamily="2" charset="-34"/>
+                <a:cs typeface="Anuphan" pitchFamily="2" charset="-34"/>
+              </a:rPr>
+              <a:t>(</a:t>
+            </a:r>
+            <a:r>
+              <a:rPr lang="en-US" sz="1100" dirty="0" err="1">
+                <a:latin typeface="Anuphan" pitchFamily="2" charset="-34"/>
+                <a:cs typeface="Anuphan" pitchFamily="2" charset="-34"/>
+              </a:rPr>
+              <a:t>y_test</a:t>
+            </a:r>
+            <a:r>
+              <a:rPr lang="en-US" sz="1100" dirty="0">
+                <a:latin typeface="Anuphan" pitchFamily="2" charset="-34"/>
+                <a:cs typeface="Anuphan" pitchFamily="2" charset="-34"/>
+              </a:rPr>
+              <a:t>, </a:t>
+            </a:r>
+            <a:r>
+              <a:rPr lang="en-US" sz="1100" dirty="0" err="1">
+                <a:latin typeface="Anuphan" pitchFamily="2" charset="-34"/>
+                <a:cs typeface="Anuphan" pitchFamily="2" charset="-34"/>
+              </a:rPr>
+              <a:t>y_proba</a:t>
+            </a:r>
+            <a:r>
+              <a:rPr lang="en-US" sz="1100" dirty="0">
+                <a:latin typeface="Anuphan" pitchFamily="2" charset="-34"/>
+                <a:cs typeface="Anuphan" pitchFamily="2" charset="-34"/>
+              </a:rPr>
+              <a:t>))</a:t>
+            </a:r>
+          </a:p>
+        </p:txBody>
+      </p:sp>
+    </p:spTree>
+    <p:extLst>
+      <p:ext uri="{BB962C8B-B14F-4D97-AF65-F5344CB8AC3E}">
+        <p14:creationId xmlns:p14="http://schemas.microsoft.com/office/powerpoint/2010/main" val="51749877"/>
+      </p:ext>
+    </p:extLst>
+  </p:cSld>
+  <p:clrMapOvr>
+    <a:masterClrMapping/>
+  </p:clrMapOvr>
+</p:sld>
+</file>
+
+<file path=ppt/slides/slide56.xml><?xml version="1.0" encoding="utf-8"?>
 <p:sld xmlns:a="http://schemas.openxmlformats.org/drawingml/2006/main" xmlns:r="http://schemas.openxmlformats.org/officeDocument/2006/relationships" xmlns:p="http://schemas.openxmlformats.org/presentationml/2006/main">
   <p:cSld>
     <p:spTree>
@@ -12731,7 +14209,7 @@
 </p:sld>
 </file>
 
-<file path=ppt/slides/slide55.xml><?xml version="1.0" encoding="utf-8"?>
+<file path=ppt/slides/slide57.xml><?xml version="1.0" encoding="utf-8"?>
 <p:sld xmlns:a="http://schemas.openxmlformats.org/drawingml/2006/main" xmlns:r="http://schemas.openxmlformats.org/officeDocument/2006/relationships" xmlns:p="http://schemas.openxmlformats.org/presentationml/2006/main">
   <p:cSld>
     <p:spTree>
@@ -12900,7 +14378,7 @@
 </p:sld>
 </file>
 
-<file path=ppt/slides/slide56.xml><?xml version="1.0" encoding="utf-8"?>
+<file path=ppt/slides/slide58.xml><?xml version="1.0" encoding="utf-8"?>
 <p:sld xmlns:a="http://schemas.openxmlformats.org/drawingml/2006/main" xmlns:r="http://schemas.openxmlformats.org/officeDocument/2006/relationships" xmlns:p="http://schemas.openxmlformats.org/presentationml/2006/main">
   <p:cSld>
     <p:spTree>
@@ -13069,7 +14547,7 @@
 </p:sld>
 </file>
 
-<file path=ppt/slides/slide57.xml><?xml version="1.0" encoding="utf-8"?>
+<file path=ppt/slides/slide59.xml><?xml version="1.0" encoding="utf-8"?>
 <p:sld xmlns:a="http://schemas.openxmlformats.org/drawingml/2006/main" xmlns:r="http://schemas.openxmlformats.org/officeDocument/2006/relationships" xmlns:p="http://schemas.openxmlformats.org/presentationml/2006/main">
   <p:cSld>
     <p:spTree>
@@ -13229,344 +14707,6 @@
     <p:extLst>
       <p:ext uri="{BB962C8B-B14F-4D97-AF65-F5344CB8AC3E}">
         <p14:creationId xmlns:p14="http://schemas.microsoft.com/office/powerpoint/2010/main" val="676611250"/>
-      </p:ext>
-    </p:extLst>
-  </p:cSld>
-  <p:clrMapOvr>
-    <a:masterClrMapping/>
-  </p:clrMapOvr>
-</p:sld>
-</file>
-
-<file path=ppt/slides/slide58.xml><?xml version="1.0" encoding="utf-8"?>
-<p:sld xmlns:a="http://schemas.openxmlformats.org/drawingml/2006/main" xmlns:r="http://schemas.openxmlformats.org/officeDocument/2006/relationships" xmlns:p="http://schemas.openxmlformats.org/presentationml/2006/main">
-  <p:cSld>
-    <p:spTree>
-      <p:nvGrpSpPr>
-        <p:cNvPr id="1" name="">
-          <a:extLst>
-            <a:ext uri="{FF2B5EF4-FFF2-40B4-BE49-F238E27FC236}">
-              <a16:creationId xmlns:a16="http://schemas.microsoft.com/office/drawing/2014/main" id="{9A4DC686-AC17-0D64-6F8D-EF5EE9156897}"/>
-            </a:ext>
-          </a:extLst>
-        </p:cNvPr>
-        <p:cNvGrpSpPr/>
-        <p:nvPr/>
-      </p:nvGrpSpPr>
-      <p:grpSpPr>
-        <a:xfrm>
-          <a:off x="0" y="0"/>
-          <a:ext cx="0" cy="0"/>
-          <a:chOff x="0" y="0"/>
-          <a:chExt cx="0" cy="0"/>
-        </a:xfrm>
-      </p:grpSpPr>
-      <p:sp>
-        <p:nvSpPr>
-          <p:cNvPr id="2" name="Title 1">
-            <a:extLst>
-              <a:ext uri="{FF2B5EF4-FFF2-40B4-BE49-F238E27FC236}">
-                <a16:creationId xmlns:a16="http://schemas.microsoft.com/office/drawing/2014/main" id="{490873B5-9177-A3B7-93BA-D4293C36C2B8}"/>
-              </a:ext>
-            </a:extLst>
-          </p:cNvPr>
-          <p:cNvSpPr>
-            <a:spLocks noGrp="1"/>
-          </p:cNvSpPr>
-          <p:nvPr>
-            <p:ph type="ctrTitle"/>
-          </p:nvPr>
-        </p:nvSpPr>
-        <p:spPr>
-          <a:xfrm>
-            <a:off x="1317523" y="333332"/>
-            <a:ext cx="9556954" cy="825910"/>
-          </a:xfrm>
-        </p:spPr>
-        <p:txBody>
-          <a:bodyPr>
-            <a:noAutofit/>
-          </a:bodyPr>
-          <a:lstStyle/>
-          <a:p>
-            <a:pPr algn="l"/>
-            <a:r>
-              <a:rPr lang="en-US" sz="4000" dirty="0">
-                <a:solidFill>
-                  <a:schemeClr val="tx1">
-                    <a:lumMod val="75000"/>
-                    <a:lumOff val="25000"/>
-                  </a:schemeClr>
-                </a:solidFill>
-                <a:latin typeface="Anuphan" pitchFamily="2" charset="-34"/>
-                <a:cs typeface="Anuphan" pitchFamily="2" charset="-34"/>
-              </a:rPr>
-              <a:t>Using Machine Learning Model</a:t>
-            </a:r>
-          </a:p>
-        </p:txBody>
-      </p:sp>
-      <p:sp>
-        <p:nvSpPr>
-          <p:cNvPr id="4" name="TextBox 3">
-            <a:extLst>
-              <a:ext uri="{FF2B5EF4-FFF2-40B4-BE49-F238E27FC236}">
-                <a16:creationId xmlns:a16="http://schemas.microsoft.com/office/drawing/2014/main" id="{148645E9-7E7A-311D-164E-792D342F665B}"/>
-              </a:ext>
-            </a:extLst>
-          </p:cNvPr>
-          <p:cNvSpPr txBox="1"/>
-          <p:nvPr/>
-        </p:nvSpPr>
-        <p:spPr>
-          <a:xfrm>
-            <a:off x="1317523" y="1159242"/>
-            <a:ext cx="9556954" cy="338554"/>
-          </a:xfrm>
-          <a:prstGeom prst="rect">
-            <a:avLst/>
-          </a:prstGeom>
-          <a:noFill/>
-        </p:spPr>
-        <p:txBody>
-          <a:bodyPr wrap="square" rtlCol="0">
-            <a:spAutoFit/>
-          </a:bodyPr>
-          <a:lstStyle/>
-          <a:p>
-            <a:r>
-              <a:rPr lang="en-US" sz="1600" dirty="0">
-                <a:solidFill>
-                  <a:schemeClr val="tx1">
-                    <a:lumMod val="75000"/>
-                    <a:lumOff val="25000"/>
-                  </a:schemeClr>
-                </a:solidFill>
-                <a:latin typeface="Anuphan" pitchFamily="2" charset="-34"/>
-                <a:cs typeface="Anuphan" pitchFamily="2" charset="-34"/>
-              </a:rPr>
-              <a:t>made by Claude</a:t>
-            </a:r>
-          </a:p>
-        </p:txBody>
-      </p:sp>
-      <p:pic>
-        <p:nvPicPr>
-          <p:cNvPr id="6" name="Picture 5">
-            <a:extLst>
-              <a:ext uri="{FF2B5EF4-FFF2-40B4-BE49-F238E27FC236}">
-                <a16:creationId xmlns:a16="http://schemas.microsoft.com/office/drawing/2014/main" id="{AEFDA3A2-0F49-DEA0-B692-55C4014EA8CB}"/>
-              </a:ext>
-            </a:extLst>
-          </p:cNvPr>
-          <p:cNvPicPr>
-            <a:picLocks noChangeAspect="1"/>
-          </p:cNvPicPr>
-          <p:nvPr/>
-        </p:nvPicPr>
-        <p:blipFill>
-          <a:blip r:embed="rId2"/>
-          <a:stretch>
-            <a:fillRect/>
-          </a:stretch>
-        </p:blipFill>
-        <p:spPr>
-          <a:xfrm>
-            <a:off x="1728178" y="1561839"/>
-            <a:ext cx="8735644" cy="3734321"/>
-          </a:xfrm>
-          <a:prstGeom prst="rect">
-            <a:avLst/>
-          </a:prstGeom>
-          <a:ln w="38100" cap="sq">
-            <a:solidFill>
-              <a:srgbClr val="000000"/>
-            </a:solidFill>
-            <a:prstDash val="solid"/>
-            <a:miter lim="800000"/>
-          </a:ln>
-          <a:effectLst>
-            <a:outerShdw blurRad="50800" dist="38100" dir="2700000" algn="tl" rotWithShape="0">
-              <a:srgbClr val="000000">
-                <a:alpha val="43000"/>
-              </a:srgbClr>
-            </a:outerShdw>
-          </a:effectLst>
-        </p:spPr>
-      </p:pic>
-    </p:spTree>
-    <p:extLst>
-      <p:ext uri="{BB962C8B-B14F-4D97-AF65-F5344CB8AC3E}">
-        <p14:creationId xmlns:p14="http://schemas.microsoft.com/office/powerpoint/2010/main" val="1954175957"/>
-      </p:ext>
-    </p:extLst>
-  </p:cSld>
-  <p:clrMapOvr>
-    <a:masterClrMapping/>
-  </p:clrMapOvr>
-</p:sld>
-</file>
-
-<file path=ppt/slides/slide59.xml><?xml version="1.0" encoding="utf-8"?>
-<p:sld xmlns:a="http://schemas.openxmlformats.org/drawingml/2006/main" xmlns:r="http://schemas.openxmlformats.org/officeDocument/2006/relationships" xmlns:p="http://schemas.openxmlformats.org/presentationml/2006/main">
-  <p:cSld>
-    <p:spTree>
-      <p:nvGrpSpPr>
-        <p:cNvPr id="1" name="">
-          <a:extLst>
-            <a:ext uri="{FF2B5EF4-FFF2-40B4-BE49-F238E27FC236}">
-              <a16:creationId xmlns:a16="http://schemas.microsoft.com/office/drawing/2014/main" id="{4FB93E4A-CE76-C3BD-F292-5378DA913816}"/>
-            </a:ext>
-          </a:extLst>
-        </p:cNvPr>
-        <p:cNvGrpSpPr/>
-        <p:nvPr/>
-      </p:nvGrpSpPr>
-      <p:grpSpPr>
-        <a:xfrm>
-          <a:off x="0" y="0"/>
-          <a:ext cx="0" cy="0"/>
-          <a:chOff x="0" y="0"/>
-          <a:chExt cx="0" cy="0"/>
-        </a:xfrm>
-      </p:grpSpPr>
-      <p:sp>
-        <p:nvSpPr>
-          <p:cNvPr id="2" name="Title 1">
-            <a:extLst>
-              <a:ext uri="{FF2B5EF4-FFF2-40B4-BE49-F238E27FC236}">
-                <a16:creationId xmlns:a16="http://schemas.microsoft.com/office/drawing/2014/main" id="{021D1CDF-54A2-2B75-99DE-D88B449B57AF}"/>
-              </a:ext>
-            </a:extLst>
-          </p:cNvPr>
-          <p:cNvSpPr>
-            <a:spLocks noGrp="1"/>
-          </p:cNvSpPr>
-          <p:nvPr>
-            <p:ph type="ctrTitle"/>
-          </p:nvPr>
-        </p:nvSpPr>
-        <p:spPr>
-          <a:xfrm>
-            <a:off x="1317523" y="333332"/>
-            <a:ext cx="9556954" cy="825910"/>
-          </a:xfrm>
-        </p:spPr>
-        <p:txBody>
-          <a:bodyPr>
-            <a:noAutofit/>
-          </a:bodyPr>
-          <a:lstStyle/>
-          <a:p>
-            <a:pPr algn="l"/>
-            <a:r>
-              <a:rPr lang="en-US" sz="4000" dirty="0">
-                <a:solidFill>
-                  <a:schemeClr val="tx1">
-                    <a:lumMod val="75000"/>
-                    <a:lumOff val="25000"/>
-                  </a:schemeClr>
-                </a:solidFill>
-                <a:latin typeface="Anuphan" pitchFamily="2" charset="-34"/>
-                <a:cs typeface="Anuphan" pitchFamily="2" charset="-34"/>
-              </a:rPr>
-              <a:t>Using Machine Learning Model</a:t>
-            </a:r>
-          </a:p>
-        </p:txBody>
-      </p:sp>
-      <p:sp>
-        <p:nvSpPr>
-          <p:cNvPr id="4" name="TextBox 3">
-            <a:extLst>
-              <a:ext uri="{FF2B5EF4-FFF2-40B4-BE49-F238E27FC236}">
-                <a16:creationId xmlns:a16="http://schemas.microsoft.com/office/drawing/2014/main" id="{86C6C3D0-6EA5-883F-67F3-6290D1790087}"/>
-              </a:ext>
-            </a:extLst>
-          </p:cNvPr>
-          <p:cNvSpPr txBox="1"/>
-          <p:nvPr/>
-        </p:nvSpPr>
-        <p:spPr>
-          <a:xfrm>
-            <a:off x="1317523" y="1159242"/>
-            <a:ext cx="9556954" cy="338554"/>
-          </a:xfrm>
-          <a:prstGeom prst="rect">
-            <a:avLst/>
-          </a:prstGeom>
-          <a:noFill/>
-        </p:spPr>
-        <p:txBody>
-          <a:bodyPr wrap="square" rtlCol="0">
-            <a:spAutoFit/>
-          </a:bodyPr>
-          <a:lstStyle/>
-          <a:p>
-            <a:r>
-              <a:rPr lang="en-US" sz="1600" dirty="0">
-                <a:solidFill>
-                  <a:schemeClr val="tx1">
-                    <a:lumMod val="75000"/>
-                    <a:lumOff val="25000"/>
-                  </a:schemeClr>
-                </a:solidFill>
-                <a:latin typeface="Anuphan" pitchFamily="2" charset="-34"/>
-                <a:cs typeface="Anuphan" pitchFamily="2" charset="-34"/>
-              </a:rPr>
-              <a:t>made by Claude</a:t>
-            </a:r>
-          </a:p>
-        </p:txBody>
-      </p:sp>
-      <p:pic>
-        <p:nvPicPr>
-          <p:cNvPr id="5" name="Picture 4">
-            <a:extLst>
-              <a:ext uri="{FF2B5EF4-FFF2-40B4-BE49-F238E27FC236}">
-                <a16:creationId xmlns:a16="http://schemas.microsoft.com/office/drawing/2014/main" id="{EC82E080-4F25-78A3-134B-76CC2E462992}"/>
-              </a:ext>
-            </a:extLst>
-          </p:cNvPr>
-          <p:cNvPicPr>
-            <a:picLocks noChangeAspect="1"/>
-          </p:cNvPicPr>
-          <p:nvPr/>
-        </p:nvPicPr>
-        <p:blipFill>
-          <a:blip r:embed="rId2"/>
-          <a:stretch>
-            <a:fillRect/>
-          </a:stretch>
-        </p:blipFill>
-        <p:spPr>
-          <a:xfrm>
-            <a:off x="1671484" y="1652940"/>
-            <a:ext cx="8849032" cy="4045818"/>
-          </a:xfrm>
-          <a:prstGeom prst="rect">
-            <a:avLst/>
-          </a:prstGeom>
-          <a:ln w="38100" cap="sq">
-            <a:solidFill>
-              <a:srgbClr val="000000"/>
-            </a:solidFill>
-            <a:prstDash val="solid"/>
-            <a:miter lim="800000"/>
-          </a:ln>
-          <a:effectLst>
-            <a:outerShdw blurRad="50800" dist="38100" dir="2700000" algn="tl" rotWithShape="0">
-              <a:srgbClr val="000000">
-                <a:alpha val="43000"/>
-              </a:srgbClr>
-            </a:outerShdw>
-          </a:effectLst>
-        </p:spPr>
-      </p:pic>
-    </p:spTree>
-    <p:extLst>
-      <p:ext uri="{BB962C8B-B14F-4D97-AF65-F5344CB8AC3E}">
-        <p14:creationId xmlns:p14="http://schemas.microsoft.com/office/powerpoint/2010/main" val="1543191517"/>
       </p:ext>
     </p:extLst>
   </p:cSld>
@@ -13888,7 +15028,7 @@
         <p:cNvPr id="1" name="">
           <a:extLst>
             <a:ext uri="{FF2B5EF4-FFF2-40B4-BE49-F238E27FC236}">
-              <a16:creationId xmlns:a16="http://schemas.microsoft.com/office/drawing/2014/main" id="{D2BFB2FE-CE4E-98DF-422E-30144C2E96BB}"/>
+              <a16:creationId xmlns:a16="http://schemas.microsoft.com/office/drawing/2014/main" id="{9A4DC686-AC17-0D64-6F8D-EF5EE9156897}"/>
             </a:ext>
           </a:extLst>
         </p:cNvPr>
@@ -13908,7 +15048,7 @@
           <p:cNvPr id="2" name="Title 1">
             <a:extLst>
               <a:ext uri="{FF2B5EF4-FFF2-40B4-BE49-F238E27FC236}">
-                <a16:creationId xmlns:a16="http://schemas.microsoft.com/office/drawing/2014/main" id="{624BC609-1966-40E2-2FAD-78BA4ABB84D2}"/>
+                <a16:creationId xmlns:a16="http://schemas.microsoft.com/office/drawing/2014/main" id="{490873B5-9177-A3B7-93BA-D4293C36C2B8}"/>
               </a:ext>
             </a:extLst>
           </p:cNvPr>
@@ -13953,7 +15093,7 @@
           <p:cNvPr id="4" name="TextBox 3">
             <a:extLst>
               <a:ext uri="{FF2B5EF4-FFF2-40B4-BE49-F238E27FC236}">
-                <a16:creationId xmlns:a16="http://schemas.microsoft.com/office/drawing/2014/main" id="{B7524E80-AAE7-BCD3-9D04-153DB930DC19}"/>
+                <a16:creationId xmlns:a16="http://schemas.microsoft.com/office/drawing/2014/main" id="{148645E9-7E7A-311D-164E-792D342F665B}"/>
               </a:ext>
             </a:extLst>
           </p:cNvPr>
@@ -13994,10 +15134,10 @@
       </p:sp>
       <p:pic>
         <p:nvPicPr>
-          <p:cNvPr id="8" name="Picture 7">
-            <a:extLst>
-              <a:ext uri="{FF2B5EF4-FFF2-40B4-BE49-F238E27FC236}">
-                <a16:creationId xmlns:a16="http://schemas.microsoft.com/office/drawing/2014/main" id="{4103B019-1EC0-F2D6-8B42-70E96DE470C8}"/>
+          <p:cNvPr id="6" name="Picture 5">
+            <a:extLst>
+              <a:ext uri="{FF2B5EF4-FFF2-40B4-BE49-F238E27FC236}">
+                <a16:creationId xmlns:a16="http://schemas.microsoft.com/office/drawing/2014/main" id="{AEFDA3A2-0F49-DEA0-B692-55C4014EA8CB}"/>
               </a:ext>
             </a:extLst>
           </p:cNvPr>
@@ -14014,8 +15154,8 @@
         </p:blipFill>
         <p:spPr>
           <a:xfrm>
-            <a:off x="1747230" y="1783437"/>
-            <a:ext cx="8697539" cy="3915321"/>
+            <a:off x="1728178" y="1561839"/>
+            <a:ext cx="8735644" cy="3734321"/>
           </a:xfrm>
           <a:prstGeom prst="rect">
             <a:avLst/>
@@ -14039,6 +15179,513 @@
     </p:spTree>
     <p:extLst>
       <p:ext uri="{BB962C8B-B14F-4D97-AF65-F5344CB8AC3E}">
+        <p14:creationId xmlns:p14="http://schemas.microsoft.com/office/powerpoint/2010/main" val="1954175957"/>
+      </p:ext>
+    </p:extLst>
+  </p:cSld>
+  <p:clrMapOvr>
+    <a:masterClrMapping/>
+  </p:clrMapOvr>
+</p:sld>
+</file>
+
+<file path=ppt/slides/slide61.xml><?xml version="1.0" encoding="utf-8"?>
+<p:sld xmlns:a="http://schemas.openxmlformats.org/drawingml/2006/main" xmlns:r="http://schemas.openxmlformats.org/officeDocument/2006/relationships" xmlns:p="http://schemas.openxmlformats.org/presentationml/2006/main">
+  <p:cSld>
+    <p:spTree>
+      <p:nvGrpSpPr>
+        <p:cNvPr id="1" name="">
+          <a:extLst>
+            <a:ext uri="{FF2B5EF4-FFF2-40B4-BE49-F238E27FC236}">
+              <a16:creationId xmlns:a16="http://schemas.microsoft.com/office/drawing/2014/main" id="{4FB93E4A-CE76-C3BD-F292-5378DA913816}"/>
+            </a:ext>
+          </a:extLst>
+        </p:cNvPr>
+        <p:cNvGrpSpPr/>
+        <p:nvPr/>
+      </p:nvGrpSpPr>
+      <p:grpSpPr>
+        <a:xfrm>
+          <a:off x="0" y="0"/>
+          <a:ext cx="0" cy="0"/>
+          <a:chOff x="0" y="0"/>
+          <a:chExt cx="0" cy="0"/>
+        </a:xfrm>
+      </p:grpSpPr>
+      <p:sp>
+        <p:nvSpPr>
+          <p:cNvPr id="2" name="Title 1">
+            <a:extLst>
+              <a:ext uri="{FF2B5EF4-FFF2-40B4-BE49-F238E27FC236}">
+                <a16:creationId xmlns:a16="http://schemas.microsoft.com/office/drawing/2014/main" id="{021D1CDF-54A2-2B75-99DE-D88B449B57AF}"/>
+              </a:ext>
+            </a:extLst>
+          </p:cNvPr>
+          <p:cNvSpPr>
+            <a:spLocks noGrp="1"/>
+          </p:cNvSpPr>
+          <p:nvPr>
+            <p:ph type="ctrTitle"/>
+          </p:nvPr>
+        </p:nvSpPr>
+        <p:spPr>
+          <a:xfrm>
+            <a:off x="1317523" y="333332"/>
+            <a:ext cx="9556954" cy="825910"/>
+          </a:xfrm>
+        </p:spPr>
+        <p:txBody>
+          <a:bodyPr>
+            <a:noAutofit/>
+          </a:bodyPr>
+          <a:lstStyle/>
+          <a:p>
+            <a:pPr algn="l"/>
+            <a:r>
+              <a:rPr lang="en-US" sz="4000" dirty="0">
+                <a:solidFill>
+                  <a:schemeClr val="tx1">
+                    <a:lumMod val="75000"/>
+                    <a:lumOff val="25000"/>
+                  </a:schemeClr>
+                </a:solidFill>
+                <a:latin typeface="Anuphan" pitchFamily="2" charset="-34"/>
+                <a:cs typeface="Anuphan" pitchFamily="2" charset="-34"/>
+              </a:rPr>
+              <a:t>Using Machine Learning Model</a:t>
+            </a:r>
+          </a:p>
+        </p:txBody>
+      </p:sp>
+      <p:sp>
+        <p:nvSpPr>
+          <p:cNvPr id="4" name="TextBox 3">
+            <a:extLst>
+              <a:ext uri="{FF2B5EF4-FFF2-40B4-BE49-F238E27FC236}">
+                <a16:creationId xmlns:a16="http://schemas.microsoft.com/office/drawing/2014/main" id="{86C6C3D0-6EA5-883F-67F3-6290D1790087}"/>
+              </a:ext>
+            </a:extLst>
+          </p:cNvPr>
+          <p:cNvSpPr txBox="1"/>
+          <p:nvPr/>
+        </p:nvSpPr>
+        <p:spPr>
+          <a:xfrm>
+            <a:off x="1317523" y="1159242"/>
+            <a:ext cx="9556954" cy="338554"/>
+          </a:xfrm>
+          <a:prstGeom prst="rect">
+            <a:avLst/>
+          </a:prstGeom>
+          <a:noFill/>
+        </p:spPr>
+        <p:txBody>
+          <a:bodyPr wrap="square" rtlCol="0">
+            <a:spAutoFit/>
+          </a:bodyPr>
+          <a:lstStyle/>
+          <a:p>
+            <a:r>
+              <a:rPr lang="en-US" sz="1600" dirty="0">
+                <a:solidFill>
+                  <a:schemeClr val="tx1">
+                    <a:lumMod val="75000"/>
+                    <a:lumOff val="25000"/>
+                  </a:schemeClr>
+                </a:solidFill>
+                <a:latin typeface="Anuphan" pitchFamily="2" charset="-34"/>
+                <a:cs typeface="Anuphan" pitchFamily="2" charset="-34"/>
+              </a:rPr>
+              <a:t>made by Claude</a:t>
+            </a:r>
+          </a:p>
+        </p:txBody>
+      </p:sp>
+      <p:pic>
+        <p:nvPicPr>
+          <p:cNvPr id="5" name="Picture 4">
+            <a:extLst>
+              <a:ext uri="{FF2B5EF4-FFF2-40B4-BE49-F238E27FC236}">
+                <a16:creationId xmlns:a16="http://schemas.microsoft.com/office/drawing/2014/main" id="{EC82E080-4F25-78A3-134B-76CC2E462992}"/>
+              </a:ext>
+            </a:extLst>
+          </p:cNvPr>
+          <p:cNvPicPr>
+            <a:picLocks noChangeAspect="1"/>
+          </p:cNvPicPr>
+          <p:nvPr/>
+        </p:nvPicPr>
+        <p:blipFill>
+          <a:blip r:embed="rId2"/>
+          <a:stretch>
+            <a:fillRect/>
+          </a:stretch>
+        </p:blipFill>
+        <p:spPr>
+          <a:xfrm>
+            <a:off x="1671484" y="1652940"/>
+            <a:ext cx="8849032" cy="4045818"/>
+          </a:xfrm>
+          <a:prstGeom prst="rect">
+            <a:avLst/>
+          </a:prstGeom>
+          <a:ln w="38100" cap="sq">
+            <a:solidFill>
+              <a:srgbClr val="000000"/>
+            </a:solidFill>
+            <a:prstDash val="solid"/>
+            <a:miter lim="800000"/>
+          </a:ln>
+          <a:effectLst>
+            <a:outerShdw blurRad="50800" dist="38100" dir="2700000" algn="tl" rotWithShape="0">
+              <a:srgbClr val="000000">
+                <a:alpha val="43000"/>
+              </a:srgbClr>
+            </a:outerShdw>
+          </a:effectLst>
+        </p:spPr>
+      </p:pic>
+    </p:spTree>
+    <p:extLst>
+      <p:ext uri="{BB962C8B-B14F-4D97-AF65-F5344CB8AC3E}">
+        <p14:creationId xmlns:p14="http://schemas.microsoft.com/office/powerpoint/2010/main" val="1543191517"/>
+      </p:ext>
+    </p:extLst>
+  </p:cSld>
+  <p:clrMapOvr>
+    <a:masterClrMapping/>
+  </p:clrMapOvr>
+</p:sld>
+</file>
+
+<file path=ppt/slides/slide62.xml><?xml version="1.0" encoding="utf-8"?>
+<p:sld xmlns:a="http://schemas.openxmlformats.org/drawingml/2006/main" xmlns:r="http://schemas.openxmlformats.org/officeDocument/2006/relationships" xmlns:p="http://schemas.openxmlformats.org/presentationml/2006/main">
+  <p:cSld>
+    <p:spTree>
+      <p:nvGrpSpPr>
+        <p:cNvPr id="1" name="">
+          <a:extLst>
+            <a:ext uri="{FF2B5EF4-FFF2-40B4-BE49-F238E27FC236}">
+              <a16:creationId xmlns:a16="http://schemas.microsoft.com/office/drawing/2014/main" id="{A047C012-E5AE-605E-1A52-8085ED7AF390}"/>
+            </a:ext>
+          </a:extLst>
+        </p:cNvPr>
+        <p:cNvGrpSpPr/>
+        <p:nvPr/>
+      </p:nvGrpSpPr>
+      <p:grpSpPr>
+        <a:xfrm>
+          <a:off x="0" y="0"/>
+          <a:ext cx="0" cy="0"/>
+          <a:chOff x="0" y="0"/>
+          <a:chExt cx="0" cy="0"/>
+        </a:xfrm>
+      </p:grpSpPr>
+      <p:sp>
+        <p:nvSpPr>
+          <p:cNvPr id="2" name="Title 1">
+            <a:extLst>
+              <a:ext uri="{FF2B5EF4-FFF2-40B4-BE49-F238E27FC236}">
+                <a16:creationId xmlns:a16="http://schemas.microsoft.com/office/drawing/2014/main" id="{EE3D8624-D7C0-D56B-3D4E-0FD9289D20B8}"/>
+              </a:ext>
+            </a:extLst>
+          </p:cNvPr>
+          <p:cNvSpPr>
+            <a:spLocks noGrp="1"/>
+          </p:cNvSpPr>
+          <p:nvPr>
+            <p:ph type="ctrTitle"/>
+          </p:nvPr>
+        </p:nvSpPr>
+        <p:spPr>
+          <a:xfrm>
+            <a:off x="1317523" y="333332"/>
+            <a:ext cx="9556954" cy="825910"/>
+          </a:xfrm>
+        </p:spPr>
+        <p:txBody>
+          <a:bodyPr>
+            <a:noAutofit/>
+          </a:bodyPr>
+          <a:lstStyle/>
+          <a:p>
+            <a:pPr algn="l"/>
+            <a:r>
+              <a:rPr lang="en-US" sz="4000" dirty="0">
+                <a:solidFill>
+                  <a:schemeClr val="tx1">
+                    <a:lumMod val="75000"/>
+                    <a:lumOff val="25000"/>
+                  </a:schemeClr>
+                </a:solidFill>
+                <a:latin typeface="Anuphan" pitchFamily="2" charset="-34"/>
+                <a:cs typeface="Anuphan" pitchFamily="2" charset="-34"/>
+              </a:rPr>
+              <a:t>Using Machine Learning Model</a:t>
+            </a:r>
+          </a:p>
+        </p:txBody>
+      </p:sp>
+      <p:sp>
+        <p:nvSpPr>
+          <p:cNvPr id="4" name="TextBox 3">
+            <a:extLst>
+              <a:ext uri="{FF2B5EF4-FFF2-40B4-BE49-F238E27FC236}">
+                <a16:creationId xmlns:a16="http://schemas.microsoft.com/office/drawing/2014/main" id="{65430526-F5C2-1FA0-9C87-C60768D1565A}"/>
+              </a:ext>
+            </a:extLst>
+          </p:cNvPr>
+          <p:cNvSpPr txBox="1"/>
+          <p:nvPr/>
+        </p:nvSpPr>
+        <p:spPr>
+          <a:xfrm>
+            <a:off x="1317523" y="1159242"/>
+            <a:ext cx="9556954" cy="338554"/>
+          </a:xfrm>
+          <a:prstGeom prst="rect">
+            <a:avLst/>
+          </a:prstGeom>
+          <a:noFill/>
+        </p:spPr>
+        <p:txBody>
+          <a:bodyPr wrap="square" rtlCol="0">
+            <a:spAutoFit/>
+          </a:bodyPr>
+          <a:lstStyle/>
+          <a:p>
+            <a:r>
+              <a:rPr lang="en-US" sz="1600" dirty="0">
+                <a:solidFill>
+                  <a:schemeClr val="tx1">
+                    <a:lumMod val="75000"/>
+                    <a:lumOff val="25000"/>
+                  </a:schemeClr>
+                </a:solidFill>
+                <a:latin typeface="Anuphan" pitchFamily="2" charset="-34"/>
+                <a:cs typeface="Anuphan" pitchFamily="2" charset="-34"/>
+              </a:rPr>
+              <a:t>made by Claude</a:t>
+            </a:r>
+          </a:p>
+        </p:txBody>
+      </p:sp>
+      <p:pic>
+        <p:nvPicPr>
+          <p:cNvPr id="6" name="Picture 5">
+            <a:extLst>
+              <a:ext uri="{FF2B5EF4-FFF2-40B4-BE49-F238E27FC236}">
+                <a16:creationId xmlns:a16="http://schemas.microsoft.com/office/drawing/2014/main" id="{3F019046-044B-B26D-70C2-297693172D45}"/>
+              </a:ext>
+            </a:extLst>
+          </p:cNvPr>
+          <p:cNvPicPr>
+            <a:picLocks noChangeAspect="1"/>
+          </p:cNvPicPr>
+          <p:nvPr/>
+        </p:nvPicPr>
+        <p:blipFill>
+          <a:blip r:embed="rId2"/>
+          <a:stretch>
+            <a:fillRect/>
+          </a:stretch>
+        </p:blipFill>
+        <p:spPr>
+          <a:xfrm>
+            <a:off x="1285203" y="1576454"/>
+            <a:ext cx="9621593" cy="4686954"/>
+          </a:xfrm>
+          <a:prstGeom prst="rect">
+            <a:avLst/>
+          </a:prstGeom>
+          <a:ln w="38100" cap="sq">
+            <a:solidFill>
+              <a:srgbClr val="000000"/>
+            </a:solidFill>
+            <a:prstDash val="solid"/>
+            <a:miter lim="800000"/>
+          </a:ln>
+          <a:effectLst>
+            <a:outerShdw blurRad="50800" dist="38100" dir="2700000" algn="tl" rotWithShape="0">
+              <a:srgbClr val="000000">
+                <a:alpha val="43000"/>
+              </a:srgbClr>
+            </a:outerShdw>
+          </a:effectLst>
+        </p:spPr>
+      </p:pic>
+    </p:spTree>
+    <p:extLst>
+      <p:ext uri="{BB962C8B-B14F-4D97-AF65-F5344CB8AC3E}">
+        <p14:creationId xmlns:p14="http://schemas.microsoft.com/office/powerpoint/2010/main" val="1003278468"/>
+      </p:ext>
+    </p:extLst>
+  </p:cSld>
+  <p:clrMapOvr>
+    <a:masterClrMapping/>
+  </p:clrMapOvr>
+</p:sld>
+</file>
+
+<file path=ppt/slides/slide63.xml><?xml version="1.0" encoding="utf-8"?>
+<p:sld xmlns:a="http://schemas.openxmlformats.org/drawingml/2006/main" xmlns:r="http://schemas.openxmlformats.org/officeDocument/2006/relationships" xmlns:p="http://schemas.openxmlformats.org/presentationml/2006/main">
+  <p:cSld>
+    <p:spTree>
+      <p:nvGrpSpPr>
+        <p:cNvPr id="1" name="">
+          <a:extLst>
+            <a:ext uri="{FF2B5EF4-FFF2-40B4-BE49-F238E27FC236}">
+              <a16:creationId xmlns:a16="http://schemas.microsoft.com/office/drawing/2014/main" id="{D2BFB2FE-CE4E-98DF-422E-30144C2E96BB}"/>
+            </a:ext>
+          </a:extLst>
+        </p:cNvPr>
+        <p:cNvGrpSpPr/>
+        <p:nvPr/>
+      </p:nvGrpSpPr>
+      <p:grpSpPr>
+        <a:xfrm>
+          <a:off x="0" y="0"/>
+          <a:ext cx="0" cy="0"/>
+          <a:chOff x="0" y="0"/>
+          <a:chExt cx="0" cy="0"/>
+        </a:xfrm>
+      </p:grpSpPr>
+      <p:sp>
+        <p:nvSpPr>
+          <p:cNvPr id="2" name="Title 1">
+            <a:extLst>
+              <a:ext uri="{FF2B5EF4-FFF2-40B4-BE49-F238E27FC236}">
+                <a16:creationId xmlns:a16="http://schemas.microsoft.com/office/drawing/2014/main" id="{624BC609-1966-40E2-2FAD-78BA4ABB84D2}"/>
+              </a:ext>
+            </a:extLst>
+          </p:cNvPr>
+          <p:cNvSpPr>
+            <a:spLocks noGrp="1"/>
+          </p:cNvSpPr>
+          <p:nvPr>
+            <p:ph type="ctrTitle"/>
+          </p:nvPr>
+        </p:nvSpPr>
+        <p:spPr>
+          <a:xfrm>
+            <a:off x="1317523" y="333332"/>
+            <a:ext cx="9556954" cy="825910"/>
+          </a:xfrm>
+        </p:spPr>
+        <p:txBody>
+          <a:bodyPr>
+            <a:noAutofit/>
+          </a:bodyPr>
+          <a:lstStyle/>
+          <a:p>
+            <a:pPr algn="l"/>
+            <a:r>
+              <a:rPr lang="en-US" sz="4000" dirty="0">
+                <a:solidFill>
+                  <a:schemeClr val="tx1">
+                    <a:lumMod val="75000"/>
+                    <a:lumOff val="25000"/>
+                  </a:schemeClr>
+                </a:solidFill>
+                <a:latin typeface="Anuphan" pitchFamily="2" charset="-34"/>
+                <a:cs typeface="Anuphan" pitchFamily="2" charset="-34"/>
+              </a:rPr>
+              <a:t>Using Machine Learning Model</a:t>
+            </a:r>
+          </a:p>
+        </p:txBody>
+      </p:sp>
+      <p:sp>
+        <p:nvSpPr>
+          <p:cNvPr id="4" name="TextBox 3">
+            <a:extLst>
+              <a:ext uri="{FF2B5EF4-FFF2-40B4-BE49-F238E27FC236}">
+                <a16:creationId xmlns:a16="http://schemas.microsoft.com/office/drawing/2014/main" id="{B7524E80-AAE7-BCD3-9D04-153DB930DC19}"/>
+              </a:ext>
+            </a:extLst>
+          </p:cNvPr>
+          <p:cNvSpPr txBox="1"/>
+          <p:nvPr/>
+        </p:nvSpPr>
+        <p:spPr>
+          <a:xfrm>
+            <a:off x="1317523" y="1159242"/>
+            <a:ext cx="9556954" cy="338554"/>
+          </a:xfrm>
+          <a:prstGeom prst="rect">
+            <a:avLst/>
+          </a:prstGeom>
+          <a:noFill/>
+        </p:spPr>
+        <p:txBody>
+          <a:bodyPr wrap="square" rtlCol="0">
+            <a:spAutoFit/>
+          </a:bodyPr>
+          <a:lstStyle/>
+          <a:p>
+            <a:r>
+              <a:rPr lang="en-US" sz="1600" dirty="0">
+                <a:solidFill>
+                  <a:schemeClr val="tx1">
+                    <a:lumMod val="75000"/>
+                    <a:lumOff val="25000"/>
+                  </a:schemeClr>
+                </a:solidFill>
+                <a:latin typeface="Anuphan" pitchFamily="2" charset="-34"/>
+                <a:cs typeface="Anuphan" pitchFamily="2" charset="-34"/>
+              </a:rPr>
+              <a:t>made by Claude</a:t>
+            </a:r>
+          </a:p>
+        </p:txBody>
+      </p:sp>
+      <p:pic>
+        <p:nvPicPr>
+          <p:cNvPr id="8" name="Picture 7">
+            <a:extLst>
+              <a:ext uri="{FF2B5EF4-FFF2-40B4-BE49-F238E27FC236}">
+                <a16:creationId xmlns:a16="http://schemas.microsoft.com/office/drawing/2014/main" id="{4103B019-1EC0-F2D6-8B42-70E96DE470C8}"/>
+              </a:ext>
+            </a:extLst>
+          </p:cNvPr>
+          <p:cNvPicPr>
+            <a:picLocks noChangeAspect="1"/>
+          </p:cNvPicPr>
+          <p:nvPr/>
+        </p:nvPicPr>
+        <p:blipFill>
+          <a:blip r:embed="rId2"/>
+          <a:stretch>
+            <a:fillRect/>
+          </a:stretch>
+        </p:blipFill>
+        <p:spPr>
+          <a:xfrm>
+            <a:off x="1747230" y="1783437"/>
+            <a:ext cx="8697539" cy="3915321"/>
+          </a:xfrm>
+          <a:prstGeom prst="rect">
+            <a:avLst/>
+          </a:prstGeom>
+          <a:ln w="38100" cap="sq">
+            <a:solidFill>
+              <a:srgbClr val="000000"/>
+            </a:solidFill>
+            <a:prstDash val="solid"/>
+            <a:miter lim="800000"/>
+          </a:ln>
+          <a:effectLst>
+            <a:outerShdw blurRad="50800" dist="38100" dir="2700000" algn="tl" rotWithShape="0">
+              <a:srgbClr val="000000">
+                <a:alpha val="43000"/>
+              </a:srgbClr>
+            </a:outerShdw>
+          </a:effectLst>
+        </p:spPr>
+      </p:pic>
+    </p:spTree>
+    <p:extLst>
+      <p:ext uri="{BB962C8B-B14F-4D97-AF65-F5344CB8AC3E}">
         <p14:creationId xmlns:p14="http://schemas.microsoft.com/office/powerpoint/2010/main" val="727297150"/>
       </p:ext>
     </p:extLst>
@@ -14049,7 +15696,176 @@
 </p:sld>
 </file>
 
-<file path=ppt/slides/slide61.xml><?xml version="1.0" encoding="utf-8"?>
+<file path=ppt/slides/slide64.xml><?xml version="1.0" encoding="utf-8"?>
+<p:sld xmlns:a="http://schemas.openxmlformats.org/drawingml/2006/main" xmlns:r="http://schemas.openxmlformats.org/officeDocument/2006/relationships" xmlns:p="http://schemas.openxmlformats.org/presentationml/2006/main">
+  <p:cSld>
+    <p:spTree>
+      <p:nvGrpSpPr>
+        <p:cNvPr id="1" name="">
+          <a:extLst>
+            <a:ext uri="{FF2B5EF4-FFF2-40B4-BE49-F238E27FC236}">
+              <a16:creationId xmlns:a16="http://schemas.microsoft.com/office/drawing/2014/main" id="{E958F72D-79E2-DB01-80D9-6C8F06A689BE}"/>
+            </a:ext>
+          </a:extLst>
+        </p:cNvPr>
+        <p:cNvGrpSpPr/>
+        <p:nvPr/>
+      </p:nvGrpSpPr>
+      <p:grpSpPr>
+        <a:xfrm>
+          <a:off x="0" y="0"/>
+          <a:ext cx="0" cy="0"/>
+          <a:chOff x="0" y="0"/>
+          <a:chExt cx="0" cy="0"/>
+        </a:xfrm>
+      </p:grpSpPr>
+      <p:sp>
+        <p:nvSpPr>
+          <p:cNvPr id="2" name="Title 1">
+            <a:extLst>
+              <a:ext uri="{FF2B5EF4-FFF2-40B4-BE49-F238E27FC236}">
+                <a16:creationId xmlns:a16="http://schemas.microsoft.com/office/drawing/2014/main" id="{04D72D16-37AC-224F-83C3-E3EFA3A8AF9C}"/>
+              </a:ext>
+            </a:extLst>
+          </p:cNvPr>
+          <p:cNvSpPr>
+            <a:spLocks noGrp="1"/>
+          </p:cNvSpPr>
+          <p:nvPr>
+            <p:ph type="ctrTitle"/>
+          </p:nvPr>
+        </p:nvSpPr>
+        <p:spPr>
+          <a:xfrm>
+            <a:off x="1317523" y="333332"/>
+            <a:ext cx="9556954" cy="825910"/>
+          </a:xfrm>
+        </p:spPr>
+        <p:txBody>
+          <a:bodyPr>
+            <a:noAutofit/>
+          </a:bodyPr>
+          <a:lstStyle/>
+          <a:p>
+            <a:pPr algn="l"/>
+            <a:r>
+              <a:rPr lang="en-US" sz="4000" dirty="0">
+                <a:solidFill>
+                  <a:schemeClr val="tx1">
+                    <a:lumMod val="75000"/>
+                    <a:lumOff val="25000"/>
+                  </a:schemeClr>
+                </a:solidFill>
+                <a:latin typeface="Anuphan" pitchFamily="2" charset="-34"/>
+                <a:cs typeface="Anuphan" pitchFamily="2" charset="-34"/>
+              </a:rPr>
+              <a:t>Using Machine Learning Model</a:t>
+            </a:r>
+          </a:p>
+        </p:txBody>
+      </p:sp>
+      <p:sp>
+        <p:nvSpPr>
+          <p:cNvPr id="4" name="TextBox 3">
+            <a:extLst>
+              <a:ext uri="{FF2B5EF4-FFF2-40B4-BE49-F238E27FC236}">
+                <a16:creationId xmlns:a16="http://schemas.microsoft.com/office/drawing/2014/main" id="{D5029077-90D4-8394-6DD8-B363FB81B3E4}"/>
+              </a:ext>
+            </a:extLst>
+          </p:cNvPr>
+          <p:cNvSpPr txBox="1"/>
+          <p:nvPr/>
+        </p:nvSpPr>
+        <p:spPr>
+          <a:xfrm>
+            <a:off x="1317523" y="1159242"/>
+            <a:ext cx="9556954" cy="338554"/>
+          </a:xfrm>
+          <a:prstGeom prst="rect">
+            <a:avLst/>
+          </a:prstGeom>
+          <a:noFill/>
+        </p:spPr>
+        <p:txBody>
+          <a:bodyPr wrap="square" rtlCol="0">
+            <a:spAutoFit/>
+          </a:bodyPr>
+          <a:lstStyle/>
+          <a:p>
+            <a:r>
+              <a:rPr lang="en-US" sz="1600" dirty="0">
+                <a:solidFill>
+                  <a:schemeClr val="tx1">
+                    <a:lumMod val="75000"/>
+                    <a:lumOff val="25000"/>
+                  </a:schemeClr>
+                </a:solidFill>
+                <a:latin typeface="Anuphan" pitchFamily="2" charset="-34"/>
+                <a:cs typeface="Anuphan" pitchFamily="2" charset="-34"/>
+              </a:rPr>
+              <a:t>made by Claude</a:t>
+            </a:r>
+          </a:p>
+        </p:txBody>
+      </p:sp>
+      <p:pic>
+        <p:nvPicPr>
+          <p:cNvPr id="5" name="Picture 4">
+            <a:extLst>
+              <a:ext uri="{FF2B5EF4-FFF2-40B4-BE49-F238E27FC236}">
+                <a16:creationId xmlns:a16="http://schemas.microsoft.com/office/drawing/2014/main" id="{A1BF49E9-59F9-49BF-6BEA-12F206EEA14F}"/>
+              </a:ext>
+            </a:extLst>
+          </p:cNvPr>
+          <p:cNvPicPr>
+            <a:picLocks noChangeAspect="1"/>
+          </p:cNvPicPr>
+          <p:nvPr/>
+        </p:nvPicPr>
+        <p:blipFill>
+          <a:blip r:embed="rId2"/>
+          <a:stretch>
+            <a:fillRect/>
+          </a:stretch>
+        </p:blipFill>
+        <p:spPr>
+          <a:xfrm>
+            <a:off x="1223282" y="1983490"/>
+            <a:ext cx="9745435" cy="3715268"/>
+          </a:xfrm>
+          <a:prstGeom prst="rect">
+            <a:avLst/>
+          </a:prstGeom>
+          <a:ln w="38100" cap="sq">
+            <a:solidFill>
+              <a:srgbClr val="000000"/>
+            </a:solidFill>
+            <a:prstDash val="solid"/>
+            <a:miter lim="800000"/>
+          </a:ln>
+          <a:effectLst>
+            <a:outerShdw blurRad="50800" dist="38100" dir="2700000" algn="tl" rotWithShape="0">
+              <a:srgbClr val="000000">
+                <a:alpha val="43000"/>
+              </a:srgbClr>
+            </a:outerShdw>
+          </a:effectLst>
+        </p:spPr>
+      </p:pic>
+    </p:spTree>
+    <p:extLst>
+      <p:ext uri="{BB962C8B-B14F-4D97-AF65-F5344CB8AC3E}">
+        <p14:creationId xmlns:p14="http://schemas.microsoft.com/office/powerpoint/2010/main" val="3716579766"/>
+      </p:ext>
+    </p:extLst>
+  </p:cSld>
+  <p:clrMapOvr>
+    <a:masterClrMapping/>
+  </p:clrMapOvr>
+</p:sld>
+</file>
+
+<file path=ppt/slides/slide65.xml><?xml version="1.0" encoding="utf-8"?>
 <p:sld xmlns:a="http://schemas.openxmlformats.org/drawingml/2006/main" xmlns:r="http://schemas.openxmlformats.org/officeDocument/2006/relationships" xmlns:p="http://schemas.openxmlformats.org/presentationml/2006/main">
   <p:cSld>
     <p:spTree>
@@ -14218,7 +16034,7 @@
 </p:sld>
 </file>
 
-<file path=ppt/slides/slide62.xml><?xml version="1.0" encoding="utf-8"?>
+<file path=ppt/slides/slide66.xml><?xml version="1.0" encoding="utf-8"?>
 <p:sld xmlns:a="http://schemas.openxmlformats.org/drawingml/2006/main" xmlns:r="http://schemas.openxmlformats.org/officeDocument/2006/relationships" xmlns:p="http://schemas.openxmlformats.org/presentationml/2006/main">
   <p:cSld>
     <p:spTree>
@@ -14387,7 +16203,7 @@
 </p:sld>
 </file>
 
-<file path=ppt/slides/slide63.xml><?xml version="1.0" encoding="utf-8"?>
+<file path=ppt/slides/slide67.xml><?xml version="1.0" encoding="utf-8"?>
 <p:sld xmlns:a="http://schemas.openxmlformats.org/drawingml/2006/main" xmlns:r="http://schemas.openxmlformats.org/officeDocument/2006/relationships" xmlns:p="http://schemas.openxmlformats.org/presentationml/2006/main">
   <p:cSld>
     <p:spTree>
@@ -14556,7 +16372,7 @@
 </p:sld>
 </file>
 
-<file path=ppt/slides/slide64.xml><?xml version="1.0" encoding="utf-8"?>
+<file path=ppt/slides/slide68.xml><?xml version="1.0" encoding="utf-8"?>
 <p:sld xmlns:a="http://schemas.openxmlformats.org/drawingml/2006/main" xmlns:r="http://schemas.openxmlformats.org/officeDocument/2006/relationships" xmlns:p="http://schemas.openxmlformats.org/presentationml/2006/main">
   <p:cSld>
     <p:spTree>
@@ -14725,7 +16541,7 @@
 </p:sld>
 </file>
 
-<file path=ppt/slides/slide65.xml><?xml version="1.0" encoding="utf-8"?>
+<file path=ppt/slides/slide69.xml><?xml version="1.0" encoding="utf-8"?>
 <p:sld xmlns:a="http://schemas.openxmlformats.org/drawingml/2006/main" xmlns:r="http://schemas.openxmlformats.org/officeDocument/2006/relationships" xmlns:p="http://schemas.openxmlformats.org/presentationml/2006/main">
   <p:cSld>
     <p:spTree>
@@ -14885,737 +16701,6 @@
     <p:extLst>
       <p:ext uri="{BB962C8B-B14F-4D97-AF65-F5344CB8AC3E}">
         <p14:creationId xmlns:p14="http://schemas.microsoft.com/office/powerpoint/2010/main" val="756237967"/>
-      </p:ext>
-    </p:extLst>
-  </p:cSld>
-  <p:clrMapOvr>
-    <a:masterClrMapping/>
-  </p:clrMapOvr>
-</p:sld>
-</file>
-
-<file path=ppt/slides/slide66.xml><?xml version="1.0" encoding="utf-8"?>
-<p:sld xmlns:a="http://schemas.openxmlformats.org/drawingml/2006/main" xmlns:r="http://schemas.openxmlformats.org/officeDocument/2006/relationships" xmlns:p="http://schemas.openxmlformats.org/presentationml/2006/main">
-  <p:cSld>
-    <p:spTree>
-      <p:nvGrpSpPr>
-        <p:cNvPr id="1" name="">
-          <a:extLst>
-            <a:ext uri="{FF2B5EF4-FFF2-40B4-BE49-F238E27FC236}">
-              <a16:creationId xmlns:a16="http://schemas.microsoft.com/office/drawing/2014/main" id="{5B839538-12C0-37E0-28F1-176D86092CFE}"/>
-            </a:ext>
-          </a:extLst>
-        </p:cNvPr>
-        <p:cNvGrpSpPr/>
-        <p:nvPr/>
-      </p:nvGrpSpPr>
-      <p:grpSpPr>
-        <a:xfrm>
-          <a:off x="0" y="0"/>
-          <a:ext cx="0" cy="0"/>
-          <a:chOff x="0" y="0"/>
-          <a:chExt cx="0" cy="0"/>
-        </a:xfrm>
-      </p:grpSpPr>
-      <p:sp>
-        <p:nvSpPr>
-          <p:cNvPr id="2" name="Title 1">
-            <a:extLst>
-              <a:ext uri="{FF2B5EF4-FFF2-40B4-BE49-F238E27FC236}">
-                <a16:creationId xmlns:a16="http://schemas.microsoft.com/office/drawing/2014/main" id="{E1B62A48-69BF-B95F-8B27-38815D990E5F}"/>
-              </a:ext>
-            </a:extLst>
-          </p:cNvPr>
-          <p:cNvSpPr>
-            <a:spLocks noGrp="1"/>
-          </p:cNvSpPr>
-          <p:nvPr>
-            <p:ph type="ctrTitle"/>
-          </p:nvPr>
-        </p:nvSpPr>
-        <p:spPr>
-          <a:xfrm>
-            <a:off x="1317523" y="333332"/>
-            <a:ext cx="9556954" cy="825910"/>
-          </a:xfrm>
-        </p:spPr>
-        <p:txBody>
-          <a:bodyPr>
-            <a:noAutofit/>
-          </a:bodyPr>
-          <a:lstStyle/>
-          <a:p>
-            <a:pPr algn="l"/>
-            <a:r>
-              <a:rPr lang="en-US" sz="4000" dirty="0">
-                <a:solidFill>
-                  <a:schemeClr val="tx1">
-                    <a:lumMod val="75000"/>
-                    <a:lumOff val="25000"/>
-                  </a:schemeClr>
-                </a:solidFill>
-                <a:latin typeface="Anuphan" pitchFamily="2" charset="-34"/>
-                <a:cs typeface="Anuphan" pitchFamily="2" charset="-34"/>
-              </a:rPr>
-              <a:t>Using Machine Learning Model</a:t>
-            </a:r>
-          </a:p>
-        </p:txBody>
-      </p:sp>
-      <p:sp>
-        <p:nvSpPr>
-          <p:cNvPr id="4" name="TextBox 3">
-            <a:extLst>
-              <a:ext uri="{FF2B5EF4-FFF2-40B4-BE49-F238E27FC236}">
-                <a16:creationId xmlns:a16="http://schemas.microsoft.com/office/drawing/2014/main" id="{6755DB46-6397-146E-1D7E-00D66EC963B3}"/>
-              </a:ext>
-            </a:extLst>
-          </p:cNvPr>
-          <p:cNvSpPr txBox="1"/>
-          <p:nvPr/>
-        </p:nvSpPr>
-        <p:spPr>
-          <a:xfrm>
-            <a:off x="1317523" y="1159242"/>
-            <a:ext cx="9556954" cy="338554"/>
-          </a:xfrm>
-          <a:prstGeom prst="rect">
-            <a:avLst/>
-          </a:prstGeom>
-          <a:noFill/>
-        </p:spPr>
-        <p:txBody>
-          <a:bodyPr wrap="square" rtlCol="0">
-            <a:spAutoFit/>
-          </a:bodyPr>
-          <a:lstStyle/>
-          <a:p>
-            <a:r>
-              <a:rPr lang="en-US" sz="1600" dirty="0">
-                <a:solidFill>
-                  <a:schemeClr val="tx1">
-                    <a:lumMod val="75000"/>
-                    <a:lumOff val="25000"/>
-                  </a:schemeClr>
-                </a:solidFill>
-                <a:latin typeface="Anuphan" pitchFamily="2" charset="-34"/>
-                <a:cs typeface="Anuphan" pitchFamily="2" charset="-34"/>
-              </a:rPr>
-              <a:t>made by Claude</a:t>
-            </a:r>
-          </a:p>
-        </p:txBody>
-      </p:sp>
-      <p:pic>
-        <p:nvPicPr>
-          <p:cNvPr id="5" name="Picture 4">
-            <a:extLst>
-              <a:ext uri="{FF2B5EF4-FFF2-40B4-BE49-F238E27FC236}">
-                <a16:creationId xmlns:a16="http://schemas.microsoft.com/office/drawing/2014/main" id="{5B91579E-22AB-B85D-330D-24222EA936B9}"/>
-              </a:ext>
-            </a:extLst>
-          </p:cNvPr>
-          <p:cNvPicPr>
-            <a:picLocks noChangeAspect="1"/>
-          </p:cNvPicPr>
-          <p:nvPr/>
-        </p:nvPicPr>
-        <p:blipFill>
-          <a:blip r:embed="rId2"/>
-          <a:stretch>
-            <a:fillRect/>
-          </a:stretch>
-        </p:blipFill>
-        <p:spPr>
-          <a:xfrm>
-            <a:off x="2163097" y="1525722"/>
-            <a:ext cx="7865806" cy="4672674"/>
-          </a:xfrm>
-          <a:prstGeom prst="rect">
-            <a:avLst/>
-          </a:prstGeom>
-          <a:ln w="38100" cap="sq">
-            <a:solidFill>
-              <a:srgbClr val="000000"/>
-            </a:solidFill>
-            <a:prstDash val="solid"/>
-            <a:miter lim="800000"/>
-          </a:ln>
-          <a:effectLst>
-            <a:outerShdw blurRad="50800" dist="38100" dir="2700000" algn="tl" rotWithShape="0">
-              <a:srgbClr val="000000">
-                <a:alpha val="43000"/>
-              </a:srgbClr>
-            </a:outerShdw>
-          </a:effectLst>
-        </p:spPr>
-      </p:pic>
-    </p:spTree>
-    <p:extLst>
-      <p:ext uri="{BB962C8B-B14F-4D97-AF65-F5344CB8AC3E}">
-        <p14:creationId xmlns:p14="http://schemas.microsoft.com/office/powerpoint/2010/main" val="195064397"/>
-      </p:ext>
-    </p:extLst>
-  </p:cSld>
-  <p:clrMapOvr>
-    <a:masterClrMapping/>
-  </p:clrMapOvr>
-</p:sld>
-</file>
-
-<file path=ppt/slides/slide67.xml><?xml version="1.0" encoding="utf-8"?>
-<p:sld xmlns:a="http://schemas.openxmlformats.org/drawingml/2006/main" xmlns:r="http://schemas.openxmlformats.org/officeDocument/2006/relationships" xmlns:p="http://schemas.openxmlformats.org/presentationml/2006/main">
-  <p:cSld>
-    <p:spTree>
-      <p:nvGrpSpPr>
-        <p:cNvPr id="1" name="">
-          <a:extLst>
-            <a:ext uri="{FF2B5EF4-FFF2-40B4-BE49-F238E27FC236}">
-              <a16:creationId xmlns:a16="http://schemas.microsoft.com/office/drawing/2014/main" id="{1466F860-90D9-CCCC-7159-C0C64E7B70E3}"/>
-            </a:ext>
-          </a:extLst>
-        </p:cNvPr>
-        <p:cNvGrpSpPr/>
-        <p:nvPr/>
-      </p:nvGrpSpPr>
-      <p:grpSpPr>
-        <a:xfrm>
-          <a:off x="0" y="0"/>
-          <a:ext cx="0" cy="0"/>
-          <a:chOff x="0" y="0"/>
-          <a:chExt cx="0" cy="0"/>
-        </a:xfrm>
-      </p:grpSpPr>
-      <p:sp>
-        <p:nvSpPr>
-          <p:cNvPr id="2" name="Title 1">
-            <a:extLst>
-              <a:ext uri="{FF2B5EF4-FFF2-40B4-BE49-F238E27FC236}">
-                <a16:creationId xmlns:a16="http://schemas.microsoft.com/office/drawing/2014/main" id="{05114043-8F05-F48B-9C3B-DB876302D559}"/>
-              </a:ext>
-            </a:extLst>
-          </p:cNvPr>
-          <p:cNvSpPr>
-            <a:spLocks noGrp="1"/>
-          </p:cNvSpPr>
-          <p:nvPr>
-            <p:ph type="ctrTitle"/>
-          </p:nvPr>
-        </p:nvSpPr>
-        <p:spPr>
-          <a:xfrm>
-            <a:off x="1317523" y="333332"/>
-            <a:ext cx="9556954" cy="825910"/>
-          </a:xfrm>
-        </p:spPr>
-        <p:txBody>
-          <a:bodyPr>
-            <a:noAutofit/>
-          </a:bodyPr>
-          <a:lstStyle/>
-          <a:p>
-            <a:pPr algn="l"/>
-            <a:r>
-              <a:rPr lang="en-US" sz="4000" dirty="0">
-                <a:solidFill>
-                  <a:schemeClr val="tx1">
-                    <a:lumMod val="75000"/>
-                    <a:lumOff val="25000"/>
-                  </a:schemeClr>
-                </a:solidFill>
-                <a:latin typeface="Anuphan" pitchFamily="2" charset="-34"/>
-                <a:cs typeface="Anuphan" pitchFamily="2" charset="-34"/>
-              </a:rPr>
-              <a:t>Using Machine Learning Model</a:t>
-            </a:r>
-          </a:p>
-        </p:txBody>
-      </p:sp>
-      <p:sp>
-        <p:nvSpPr>
-          <p:cNvPr id="4" name="TextBox 3">
-            <a:extLst>
-              <a:ext uri="{FF2B5EF4-FFF2-40B4-BE49-F238E27FC236}">
-                <a16:creationId xmlns:a16="http://schemas.microsoft.com/office/drawing/2014/main" id="{4C6C0B8A-7D82-2179-027A-98DD66AFF4B1}"/>
-              </a:ext>
-            </a:extLst>
-          </p:cNvPr>
-          <p:cNvSpPr txBox="1"/>
-          <p:nvPr/>
-        </p:nvSpPr>
-        <p:spPr>
-          <a:xfrm>
-            <a:off x="1317523" y="1159242"/>
-            <a:ext cx="9556954" cy="338554"/>
-          </a:xfrm>
-          <a:prstGeom prst="rect">
-            <a:avLst/>
-          </a:prstGeom>
-          <a:noFill/>
-        </p:spPr>
-        <p:txBody>
-          <a:bodyPr wrap="square" rtlCol="0">
-            <a:spAutoFit/>
-          </a:bodyPr>
-          <a:lstStyle/>
-          <a:p>
-            <a:r>
-              <a:rPr lang="en-US" sz="1600" dirty="0">
-                <a:solidFill>
-                  <a:schemeClr val="tx1">
-                    <a:lumMod val="75000"/>
-                    <a:lumOff val="25000"/>
-                  </a:schemeClr>
-                </a:solidFill>
-                <a:latin typeface="Anuphan" pitchFamily="2" charset="-34"/>
-                <a:cs typeface="Anuphan" pitchFamily="2" charset="-34"/>
-              </a:rPr>
-              <a:t>made by Claude</a:t>
-            </a:r>
-          </a:p>
-        </p:txBody>
-      </p:sp>
-      <p:pic>
-        <p:nvPicPr>
-          <p:cNvPr id="6" name="Picture 5">
-            <a:extLst>
-              <a:ext uri="{FF2B5EF4-FFF2-40B4-BE49-F238E27FC236}">
-                <a16:creationId xmlns:a16="http://schemas.microsoft.com/office/drawing/2014/main" id="{7A3D6797-E6E0-C5EE-201C-B6604DBD0B1F}"/>
-              </a:ext>
-            </a:extLst>
-          </p:cNvPr>
-          <p:cNvPicPr>
-            <a:picLocks noChangeAspect="1"/>
-          </p:cNvPicPr>
-          <p:nvPr/>
-        </p:nvPicPr>
-        <p:blipFill>
-          <a:blip r:embed="rId2"/>
-          <a:stretch>
-            <a:fillRect/>
-          </a:stretch>
-        </p:blipFill>
-        <p:spPr>
-          <a:xfrm>
-            <a:off x="629263" y="1692211"/>
-            <a:ext cx="6725266" cy="4574790"/>
-          </a:xfrm>
-          <a:prstGeom prst="rect">
-            <a:avLst/>
-          </a:prstGeom>
-          <a:ln w="38100" cap="sq">
-            <a:solidFill>
-              <a:srgbClr val="000000"/>
-            </a:solidFill>
-            <a:prstDash val="solid"/>
-            <a:miter lim="800000"/>
-          </a:ln>
-          <a:effectLst>
-            <a:outerShdw blurRad="50800" dist="38100" dir="2700000" algn="tl" rotWithShape="0">
-              <a:srgbClr val="000000">
-                <a:alpha val="43000"/>
-              </a:srgbClr>
-            </a:outerShdw>
-          </a:effectLst>
-        </p:spPr>
-      </p:pic>
-      <p:sp>
-        <p:nvSpPr>
-          <p:cNvPr id="3" name="TextBox 2">
-            <a:extLst>
-              <a:ext uri="{FF2B5EF4-FFF2-40B4-BE49-F238E27FC236}">
-                <a16:creationId xmlns:a16="http://schemas.microsoft.com/office/drawing/2014/main" id="{553AB28A-1347-F6C9-096A-A151ADF31946}"/>
-              </a:ext>
-            </a:extLst>
-          </p:cNvPr>
-          <p:cNvSpPr txBox="1"/>
-          <p:nvPr/>
-        </p:nvSpPr>
-        <p:spPr>
-          <a:xfrm>
-            <a:off x="7610168" y="1661986"/>
-            <a:ext cx="4080387" cy="1323439"/>
-          </a:xfrm>
-          <a:prstGeom prst="rect">
-            <a:avLst/>
-          </a:prstGeom>
-          <a:noFill/>
-        </p:spPr>
-        <p:txBody>
-          <a:bodyPr wrap="square" rtlCol="0">
-            <a:spAutoFit/>
-          </a:bodyPr>
-          <a:lstStyle/>
-          <a:p>
-            <a:r>
-              <a:rPr lang="en-US" sz="1600" b="1" dirty="0">
-                <a:latin typeface="Anuphan" pitchFamily="2" charset="-34"/>
-                <a:cs typeface="Anuphan" pitchFamily="2" charset="-34"/>
-              </a:rPr>
-              <a:t>Why limited?</a:t>
-            </a:r>
-            <a:r>
-              <a:rPr lang="en-US" sz="1600" dirty="0">
-                <a:latin typeface="Anuphan" pitchFamily="2" charset="-34"/>
-                <a:cs typeface="Anuphan" pitchFamily="2" charset="-34"/>
-              </a:rPr>
-              <a:t> Complex models like Random Forest have hundreds of trees with thousands of nodes — JSON is not designed to store that kind of structure efficiently. Best for simple models only.</a:t>
-            </a:r>
-            <a:endParaRPr lang="en-US" sz="1600" dirty="0">
-              <a:solidFill>
-                <a:schemeClr val="tx1">
-                  <a:lumMod val="75000"/>
-                  <a:lumOff val="25000"/>
-                </a:schemeClr>
-              </a:solidFill>
-              <a:latin typeface="Anuphan" pitchFamily="2" charset="-34"/>
-              <a:cs typeface="Anuphan" pitchFamily="2" charset="-34"/>
-            </a:endParaRPr>
-          </a:p>
-        </p:txBody>
-      </p:sp>
-    </p:spTree>
-    <p:extLst>
-      <p:ext uri="{BB962C8B-B14F-4D97-AF65-F5344CB8AC3E}">
-        <p14:creationId xmlns:p14="http://schemas.microsoft.com/office/powerpoint/2010/main" val="3528733869"/>
-      </p:ext>
-    </p:extLst>
-  </p:cSld>
-  <p:clrMapOvr>
-    <a:masterClrMapping/>
-  </p:clrMapOvr>
-</p:sld>
-</file>
-
-<file path=ppt/slides/slide68.xml><?xml version="1.0" encoding="utf-8"?>
-<p:sld xmlns:a="http://schemas.openxmlformats.org/drawingml/2006/main" xmlns:r="http://schemas.openxmlformats.org/officeDocument/2006/relationships" xmlns:p="http://schemas.openxmlformats.org/presentationml/2006/main">
-  <p:cSld>
-    <p:spTree>
-      <p:nvGrpSpPr>
-        <p:cNvPr id="1" name="">
-          <a:extLst>
-            <a:ext uri="{FF2B5EF4-FFF2-40B4-BE49-F238E27FC236}">
-              <a16:creationId xmlns:a16="http://schemas.microsoft.com/office/drawing/2014/main" id="{0106C904-547E-CFD6-A472-4E5991145806}"/>
-            </a:ext>
-          </a:extLst>
-        </p:cNvPr>
-        <p:cNvGrpSpPr/>
-        <p:nvPr/>
-      </p:nvGrpSpPr>
-      <p:grpSpPr>
-        <a:xfrm>
-          <a:off x="0" y="0"/>
-          <a:ext cx="0" cy="0"/>
-          <a:chOff x="0" y="0"/>
-          <a:chExt cx="0" cy="0"/>
-        </a:xfrm>
-      </p:grpSpPr>
-      <p:sp>
-        <p:nvSpPr>
-          <p:cNvPr id="2" name="Title 1">
-            <a:extLst>
-              <a:ext uri="{FF2B5EF4-FFF2-40B4-BE49-F238E27FC236}">
-                <a16:creationId xmlns:a16="http://schemas.microsoft.com/office/drawing/2014/main" id="{DFDE8D9F-99BB-ECC3-86A1-01ACA4122EEE}"/>
-              </a:ext>
-            </a:extLst>
-          </p:cNvPr>
-          <p:cNvSpPr>
-            <a:spLocks noGrp="1"/>
-          </p:cNvSpPr>
-          <p:nvPr>
-            <p:ph type="ctrTitle"/>
-          </p:nvPr>
-        </p:nvSpPr>
-        <p:spPr>
-          <a:xfrm>
-            <a:off x="1317523" y="333332"/>
-            <a:ext cx="9556954" cy="825910"/>
-          </a:xfrm>
-        </p:spPr>
-        <p:txBody>
-          <a:bodyPr>
-            <a:noAutofit/>
-          </a:bodyPr>
-          <a:lstStyle/>
-          <a:p>
-            <a:pPr algn="l"/>
-            <a:r>
-              <a:rPr lang="en-US" sz="4000" dirty="0">
-                <a:solidFill>
-                  <a:schemeClr val="tx1">
-                    <a:lumMod val="75000"/>
-                    <a:lumOff val="25000"/>
-                  </a:schemeClr>
-                </a:solidFill>
-                <a:latin typeface="Anuphan" pitchFamily="2" charset="-34"/>
-                <a:cs typeface="Anuphan" pitchFamily="2" charset="-34"/>
-              </a:rPr>
-              <a:t>Using Machine Learning Model</a:t>
-            </a:r>
-          </a:p>
-        </p:txBody>
-      </p:sp>
-      <p:sp>
-        <p:nvSpPr>
-          <p:cNvPr id="4" name="TextBox 3">
-            <a:extLst>
-              <a:ext uri="{FF2B5EF4-FFF2-40B4-BE49-F238E27FC236}">
-                <a16:creationId xmlns:a16="http://schemas.microsoft.com/office/drawing/2014/main" id="{41BC7178-F2F5-1261-1E0A-85C12D6EA4BB}"/>
-              </a:ext>
-            </a:extLst>
-          </p:cNvPr>
-          <p:cNvSpPr txBox="1"/>
-          <p:nvPr/>
-        </p:nvSpPr>
-        <p:spPr>
-          <a:xfrm>
-            <a:off x="1317523" y="1159242"/>
-            <a:ext cx="9556954" cy="338554"/>
-          </a:xfrm>
-          <a:prstGeom prst="rect">
-            <a:avLst/>
-          </a:prstGeom>
-          <a:noFill/>
-        </p:spPr>
-        <p:txBody>
-          <a:bodyPr wrap="square" rtlCol="0">
-            <a:spAutoFit/>
-          </a:bodyPr>
-          <a:lstStyle/>
-          <a:p>
-            <a:r>
-              <a:rPr lang="en-US" sz="1600" dirty="0">
-                <a:solidFill>
-                  <a:schemeClr val="tx1">
-                    <a:lumMod val="75000"/>
-                    <a:lumOff val="25000"/>
-                  </a:schemeClr>
-                </a:solidFill>
-                <a:latin typeface="Anuphan" pitchFamily="2" charset="-34"/>
-                <a:cs typeface="Anuphan" pitchFamily="2" charset="-34"/>
-              </a:rPr>
-              <a:t>made by Claude</a:t>
-            </a:r>
-          </a:p>
-        </p:txBody>
-      </p:sp>
-      <p:pic>
-        <p:nvPicPr>
-          <p:cNvPr id="7" name="Picture 6">
-            <a:extLst>
-              <a:ext uri="{FF2B5EF4-FFF2-40B4-BE49-F238E27FC236}">
-                <a16:creationId xmlns:a16="http://schemas.microsoft.com/office/drawing/2014/main" id="{E51F6B08-ED10-5235-EA94-56B4EC7DAD90}"/>
-              </a:ext>
-            </a:extLst>
-          </p:cNvPr>
-          <p:cNvPicPr>
-            <a:picLocks noChangeAspect="1"/>
-          </p:cNvPicPr>
-          <p:nvPr/>
-        </p:nvPicPr>
-        <p:blipFill>
-          <a:blip r:embed="rId2"/>
-          <a:stretch>
-            <a:fillRect/>
-          </a:stretch>
-        </p:blipFill>
-        <p:spPr>
-          <a:xfrm>
-            <a:off x="2128284" y="1628135"/>
-            <a:ext cx="7935432" cy="4896533"/>
-          </a:xfrm>
-          <a:prstGeom prst="rect">
-            <a:avLst/>
-          </a:prstGeom>
-          <a:ln w="38100" cap="sq">
-            <a:solidFill>
-              <a:srgbClr val="000000"/>
-            </a:solidFill>
-            <a:prstDash val="solid"/>
-            <a:miter lim="800000"/>
-          </a:ln>
-          <a:effectLst>
-            <a:outerShdw blurRad="50800" dist="38100" dir="2700000" algn="tl" rotWithShape="0">
-              <a:srgbClr val="000000">
-                <a:alpha val="43000"/>
-              </a:srgbClr>
-            </a:outerShdw>
-          </a:effectLst>
-        </p:spPr>
-      </p:pic>
-    </p:spTree>
-    <p:extLst>
-      <p:ext uri="{BB962C8B-B14F-4D97-AF65-F5344CB8AC3E}">
-        <p14:creationId xmlns:p14="http://schemas.microsoft.com/office/powerpoint/2010/main" val="1317308559"/>
-      </p:ext>
-    </p:extLst>
-  </p:cSld>
-  <p:clrMapOvr>
-    <a:masterClrMapping/>
-  </p:clrMapOvr>
-</p:sld>
-</file>
-
-<file path=ppt/slides/slide69.xml><?xml version="1.0" encoding="utf-8"?>
-<p:sld xmlns:a="http://schemas.openxmlformats.org/drawingml/2006/main" xmlns:r="http://schemas.openxmlformats.org/officeDocument/2006/relationships" xmlns:p="http://schemas.openxmlformats.org/presentationml/2006/main">
-  <p:cSld>
-    <p:spTree>
-      <p:nvGrpSpPr>
-        <p:cNvPr id="1" name="">
-          <a:extLst>
-            <a:ext uri="{FF2B5EF4-FFF2-40B4-BE49-F238E27FC236}">
-              <a16:creationId xmlns:a16="http://schemas.microsoft.com/office/drawing/2014/main" id="{FB29B13A-B71E-F4AF-F048-60098F877856}"/>
-            </a:ext>
-          </a:extLst>
-        </p:cNvPr>
-        <p:cNvGrpSpPr/>
-        <p:nvPr/>
-      </p:nvGrpSpPr>
-      <p:grpSpPr>
-        <a:xfrm>
-          <a:off x="0" y="0"/>
-          <a:ext cx="0" cy="0"/>
-          <a:chOff x="0" y="0"/>
-          <a:chExt cx="0" cy="0"/>
-        </a:xfrm>
-      </p:grpSpPr>
-      <p:sp>
-        <p:nvSpPr>
-          <p:cNvPr id="2" name="Title 1">
-            <a:extLst>
-              <a:ext uri="{FF2B5EF4-FFF2-40B4-BE49-F238E27FC236}">
-                <a16:creationId xmlns:a16="http://schemas.microsoft.com/office/drawing/2014/main" id="{100FECE2-CD35-789A-A1D8-6DDB5A4C7706}"/>
-              </a:ext>
-            </a:extLst>
-          </p:cNvPr>
-          <p:cNvSpPr>
-            <a:spLocks noGrp="1"/>
-          </p:cNvSpPr>
-          <p:nvPr>
-            <p:ph type="ctrTitle"/>
-          </p:nvPr>
-        </p:nvSpPr>
-        <p:spPr>
-          <a:xfrm>
-            <a:off x="1317523" y="333332"/>
-            <a:ext cx="9556954" cy="825910"/>
-          </a:xfrm>
-        </p:spPr>
-        <p:txBody>
-          <a:bodyPr>
-            <a:noAutofit/>
-          </a:bodyPr>
-          <a:lstStyle/>
-          <a:p>
-            <a:pPr algn="l"/>
-            <a:r>
-              <a:rPr lang="en-US" sz="4000" dirty="0">
-                <a:solidFill>
-                  <a:schemeClr val="tx1">
-                    <a:lumMod val="75000"/>
-                    <a:lumOff val="25000"/>
-                  </a:schemeClr>
-                </a:solidFill>
-                <a:latin typeface="Anuphan" pitchFamily="2" charset="-34"/>
-                <a:cs typeface="Anuphan" pitchFamily="2" charset="-34"/>
-              </a:rPr>
-              <a:t>Using Machine Learning Model</a:t>
-            </a:r>
-          </a:p>
-        </p:txBody>
-      </p:sp>
-      <p:sp>
-        <p:nvSpPr>
-          <p:cNvPr id="4" name="TextBox 3">
-            <a:extLst>
-              <a:ext uri="{FF2B5EF4-FFF2-40B4-BE49-F238E27FC236}">
-                <a16:creationId xmlns:a16="http://schemas.microsoft.com/office/drawing/2014/main" id="{40E6CFEE-633A-CA97-0079-F8E8747DF833}"/>
-              </a:ext>
-            </a:extLst>
-          </p:cNvPr>
-          <p:cNvSpPr txBox="1"/>
-          <p:nvPr/>
-        </p:nvSpPr>
-        <p:spPr>
-          <a:xfrm>
-            <a:off x="1317523" y="1159242"/>
-            <a:ext cx="9556954" cy="338554"/>
-          </a:xfrm>
-          <a:prstGeom prst="rect">
-            <a:avLst/>
-          </a:prstGeom>
-          <a:noFill/>
-        </p:spPr>
-        <p:txBody>
-          <a:bodyPr wrap="square" rtlCol="0">
-            <a:spAutoFit/>
-          </a:bodyPr>
-          <a:lstStyle/>
-          <a:p>
-            <a:r>
-              <a:rPr lang="en-US" sz="1600" dirty="0">
-                <a:solidFill>
-                  <a:schemeClr val="tx1">
-                    <a:lumMod val="75000"/>
-                    <a:lumOff val="25000"/>
-                  </a:schemeClr>
-                </a:solidFill>
-                <a:latin typeface="Anuphan" pitchFamily="2" charset="-34"/>
-                <a:cs typeface="Anuphan" pitchFamily="2" charset="-34"/>
-              </a:rPr>
-              <a:t>made by Claude</a:t>
-            </a:r>
-          </a:p>
-        </p:txBody>
-      </p:sp>
-      <p:pic>
-        <p:nvPicPr>
-          <p:cNvPr id="5" name="Picture 4">
-            <a:extLst>
-              <a:ext uri="{FF2B5EF4-FFF2-40B4-BE49-F238E27FC236}">
-                <a16:creationId xmlns:a16="http://schemas.microsoft.com/office/drawing/2014/main" id="{EEAFF4A8-A040-A52E-D8DA-454CE29E84C1}"/>
-              </a:ext>
-            </a:extLst>
-          </p:cNvPr>
-          <p:cNvPicPr>
-            <a:picLocks noChangeAspect="1"/>
-          </p:cNvPicPr>
-          <p:nvPr/>
-        </p:nvPicPr>
-        <p:blipFill>
-          <a:blip r:embed="rId2"/>
-          <a:stretch>
-            <a:fillRect/>
-          </a:stretch>
-        </p:blipFill>
-        <p:spPr>
-          <a:xfrm>
-            <a:off x="2099705" y="1790471"/>
-            <a:ext cx="7992590" cy="3277057"/>
-          </a:xfrm>
-          <a:prstGeom prst="rect">
-            <a:avLst/>
-          </a:prstGeom>
-          <a:ln w="38100" cap="sq">
-            <a:solidFill>
-              <a:srgbClr val="000000"/>
-            </a:solidFill>
-            <a:prstDash val="solid"/>
-            <a:miter lim="800000"/>
-          </a:ln>
-          <a:effectLst>
-            <a:outerShdw blurRad="50800" dist="38100" dir="2700000" algn="tl" rotWithShape="0">
-              <a:srgbClr val="000000">
-                <a:alpha val="43000"/>
-              </a:srgbClr>
-            </a:outerShdw>
-          </a:effectLst>
-        </p:spPr>
-      </p:pic>
-    </p:spTree>
-    <p:extLst>
-      <p:ext uri="{BB962C8B-B14F-4D97-AF65-F5344CB8AC3E}">
-        <p14:creationId xmlns:p14="http://schemas.microsoft.com/office/powerpoint/2010/main" val="2722437459"/>
       </p:ext>
     </p:extLst>
   </p:cSld>
@@ -16022,7 +17107,7 @@
         <p:cNvPr id="1" name="">
           <a:extLst>
             <a:ext uri="{FF2B5EF4-FFF2-40B4-BE49-F238E27FC236}">
-              <a16:creationId xmlns:a16="http://schemas.microsoft.com/office/drawing/2014/main" id="{66C36FC4-F00F-D6EC-CB8B-B0E0C9EEAD83}"/>
+              <a16:creationId xmlns:a16="http://schemas.microsoft.com/office/drawing/2014/main" id="{5B839538-12C0-37E0-28F1-176D86092CFE}"/>
             </a:ext>
           </a:extLst>
         </p:cNvPr>
@@ -16042,7 +17127,7 @@
           <p:cNvPr id="2" name="Title 1">
             <a:extLst>
               <a:ext uri="{FF2B5EF4-FFF2-40B4-BE49-F238E27FC236}">
-                <a16:creationId xmlns:a16="http://schemas.microsoft.com/office/drawing/2014/main" id="{C064E2BF-F42B-F254-8C55-220CAC40A43C}"/>
+                <a16:creationId xmlns:a16="http://schemas.microsoft.com/office/drawing/2014/main" id="{E1B62A48-69BF-B95F-8B27-38815D990E5F}"/>
               </a:ext>
             </a:extLst>
           </p:cNvPr>
@@ -16087,7 +17172,7 @@
           <p:cNvPr id="4" name="TextBox 3">
             <a:extLst>
               <a:ext uri="{FF2B5EF4-FFF2-40B4-BE49-F238E27FC236}">
-                <a16:creationId xmlns:a16="http://schemas.microsoft.com/office/drawing/2014/main" id="{FB840088-BBEF-3750-2F7B-5B9AD190D3BB}"/>
+                <a16:creationId xmlns:a16="http://schemas.microsoft.com/office/drawing/2014/main" id="{6755DB46-6397-146E-1D7E-00D66EC963B3}"/>
               </a:ext>
             </a:extLst>
           </p:cNvPr>
@@ -16128,10 +17213,10 @@
       </p:sp>
       <p:pic>
         <p:nvPicPr>
-          <p:cNvPr id="6" name="Picture 5">
-            <a:extLst>
-              <a:ext uri="{FF2B5EF4-FFF2-40B4-BE49-F238E27FC236}">
-                <a16:creationId xmlns:a16="http://schemas.microsoft.com/office/drawing/2014/main" id="{8B74E8B8-76D7-DD6B-231D-DD1E45A7F91E}"/>
+          <p:cNvPr id="5" name="Picture 4">
+            <a:extLst>
+              <a:ext uri="{FF2B5EF4-FFF2-40B4-BE49-F238E27FC236}">
+                <a16:creationId xmlns:a16="http://schemas.microsoft.com/office/drawing/2014/main" id="{5B91579E-22AB-B85D-330D-24222EA936B9}"/>
               </a:ext>
             </a:extLst>
           </p:cNvPr>
@@ -16148,8 +17233,8 @@
         </p:blipFill>
         <p:spPr>
           <a:xfrm>
-            <a:off x="3337026" y="1328519"/>
-            <a:ext cx="7891412" cy="5091232"/>
+            <a:off x="2163097" y="1525722"/>
+            <a:ext cx="7865806" cy="4672674"/>
           </a:xfrm>
           <a:prstGeom prst="rect">
             <a:avLst/>
@@ -16173,6 +17258,737 @@
     </p:spTree>
     <p:extLst>
       <p:ext uri="{BB962C8B-B14F-4D97-AF65-F5344CB8AC3E}">
+        <p14:creationId xmlns:p14="http://schemas.microsoft.com/office/powerpoint/2010/main" val="195064397"/>
+      </p:ext>
+    </p:extLst>
+  </p:cSld>
+  <p:clrMapOvr>
+    <a:masterClrMapping/>
+  </p:clrMapOvr>
+</p:sld>
+</file>
+
+<file path=ppt/slides/slide71.xml><?xml version="1.0" encoding="utf-8"?>
+<p:sld xmlns:a="http://schemas.openxmlformats.org/drawingml/2006/main" xmlns:r="http://schemas.openxmlformats.org/officeDocument/2006/relationships" xmlns:p="http://schemas.openxmlformats.org/presentationml/2006/main">
+  <p:cSld>
+    <p:spTree>
+      <p:nvGrpSpPr>
+        <p:cNvPr id="1" name="">
+          <a:extLst>
+            <a:ext uri="{FF2B5EF4-FFF2-40B4-BE49-F238E27FC236}">
+              <a16:creationId xmlns:a16="http://schemas.microsoft.com/office/drawing/2014/main" id="{1466F860-90D9-CCCC-7159-C0C64E7B70E3}"/>
+            </a:ext>
+          </a:extLst>
+        </p:cNvPr>
+        <p:cNvGrpSpPr/>
+        <p:nvPr/>
+      </p:nvGrpSpPr>
+      <p:grpSpPr>
+        <a:xfrm>
+          <a:off x="0" y="0"/>
+          <a:ext cx="0" cy="0"/>
+          <a:chOff x="0" y="0"/>
+          <a:chExt cx="0" cy="0"/>
+        </a:xfrm>
+      </p:grpSpPr>
+      <p:sp>
+        <p:nvSpPr>
+          <p:cNvPr id="2" name="Title 1">
+            <a:extLst>
+              <a:ext uri="{FF2B5EF4-FFF2-40B4-BE49-F238E27FC236}">
+                <a16:creationId xmlns:a16="http://schemas.microsoft.com/office/drawing/2014/main" id="{05114043-8F05-F48B-9C3B-DB876302D559}"/>
+              </a:ext>
+            </a:extLst>
+          </p:cNvPr>
+          <p:cNvSpPr>
+            <a:spLocks noGrp="1"/>
+          </p:cNvSpPr>
+          <p:nvPr>
+            <p:ph type="ctrTitle"/>
+          </p:nvPr>
+        </p:nvSpPr>
+        <p:spPr>
+          <a:xfrm>
+            <a:off x="1317523" y="333332"/>
+            <a:ext cx="9556954" cy="825910"/>
+          </a:xfrm>
+        </p:spPr>
+        <p:txBody>
+          <a:bodyPr>
+            <a:noAutofit/>
+          </a:bodyPr>
+          <a:lstStyle/>
+          <a:p>
+            <a:pPr algn="l"/>
+            <a:r>
+              <a:rPr lang="en-US" sz="4000" dirty="0">
+                <a:solidFill>
+                  <a:schemeClr val="tx1">
+                    <a:lumMod val="75000"/>
+                    <a:lumOff val="25000"/>
+                  </a:schemeClr>
+                </a:solidFill>
+                <a:latin typeface="Anuphan" pitchFamily="2" charset="-34"/>
+                <a:cs typeface="Anuphan" pitchFamily="2" charset="-34"/>
+              </a:rPr>
+              <a:t>Using Machine Learning Model</a:t>
+            </a:r>
+          </a:p>
+        </p:txBody>
+      </p:sp>
+      <p:sp>
+        <p:nvSpPr>
+          <p:cNvPr id="4" name="TextBox 3">
+            <a:extLst>
+              <a:ext uri="{FF2B5EF4-FFF2-40B4-BE49-F238E27FC236}">
+                <a16:creationId xmlns:a16="http://schemas.microsoft.com/office/drawing/2014/main" id="{4C6C0B8A-7D82-2179-027A-98DD66AFF4B1}"/>
+              </a:ext>
+            </a:extLst>
+          </p:cNvPr>
+          <p:cNvSpPr txBox="1"/>
+          <p:nvPr/>
+        </p:nvSpPr>
+        <p:spPr>
+          <a:xfrm>
+            <a:off x="1317523" y="1159242"/>
+            <a:ext cx="9556954" cy="338554"/>
+          </a:xfrm>
+          <a:prstGeom prst="rect">
+            <a:avLst/>
+          </a:prstGeom>
+          <a:noFill/>
+        </p:spPr>
+        <p:txBody>
+          <a:bodyPr wrap="square" rtlCol="0">
+            <a:spAutoFit/>
+          </a:bodyPr>
+          <a:lstStyle/>
+          <a:p>
+            <a:r>
+              <a:rPr lang="en-US" sz="1600" dirty="0">
+                <a:solidFill>
+                  <a:schemeClr val="tx1">
+                    <a:lumMod val="75000"/>
+                    <a:lumOff val="25000"/>
+                  </a:schemeClr>
+                </a:solidFill>
+                <a:latin typeface="Anuphan" pitchFamily="2" charset="-34"/>
+                <a:cs typeface="Anuphan" pitchFamily="2" charset="-34"/>
+              </a:rPr>
+              <a:t>made by Claude</a:t>
+            </a:r>
+          </a:p>
+        </p:txBody>
+      </p:sp>
+      <p:pic>
+        <p:nvPicPr>
+          <p:cNvPr id="6" name="Picture 5">
+            <a:extLst>
+              <a:ext uri="{FF2B5EF4-FFF2-40B4-BE49-F238E27FC236}">
+                <a16:creationId xmlns:a16="http://schemas.microsoft.com/office/drawing/2014/main" id="{7A3D6797-E6E0-C5EE-201C-B6604DBD0B1F}"/>
+              </a:ext>
+            </a:extLst>
+          </p:cNvPr>
+          <p:cNvPicPr>
+            <a:picLocks noChangeAspect="1"/>
+          </p:cNvPicPr>
+          <p:nvPr/>
+        </p:nvPicPr>
+        <p:blipFill>
+          <a:blip r:embed="rId2"/>
+          <a:stretch>
+            <a:fillRect/>
+          </a:stretch>
+        </p:blipFill>
+        <p:spPr>
+          <a:xfrm>
+            <a:off x="629263" y="1692211"/>
+            <a:ext cx="6725266" cy="4574790"/>
+          </a:xfrm>
+          <a:prstGeom prst="rect">
+            <a:avLst/>
+          </a:prstGeom>
+          <a:ln w="38100" cap="sq">
+            <a:solidFill>
+              <a:srgbClr val="000000"/>
+            </a:solidFill>
+            <a:prstDash val="solid"/>
+            <a:miter lim="800000"/>
+          </a:ln>
+          <a:effectLst>
+            <a:outerShdw blurRad="50800" dist="38100" dir="2700000" algn="tl" rotWithShape="0">
+              <a:srgbClr val="000000">
+                <a:alpha val="43000"/>
+              </a:srgbClr>
+            </a:outerShdw>
+          </a:effectLst>
+        </p:spPr>
+      </p:pic>
+      <p:sp>
+        <p:nvSpPr>
+          <p:cNvPr id="3" name="TextBox 2">
+            <a:extLst>
+              <a:ext uri="{FF2B5EF4-FFF2-40B4-BE49-F238E27FC236}">
+                <a16:creationId xmlns:a16="http://schemas.microsoft.com/office/drawing/2014/main" id="{553AB28A-1347-F6C9-096A-A151ADF31946}"/>
+              </a:ext>
+            </a:extLst>
+          </p:cNvPr>
+          <p:cNvSpPr txBox="1"/>
+          <p:nvPr/>
+        </p:nvSpPr>
+        <p:spPr>
+          <a:xfrm>
+            <a:off x="7610168" y="1661986"/>
+            <a:ext cx="4080387" cy="1323439"/>
+          </a:xfrm>
+          <a:prstGeom prst="rect">
+            <a:avLst/>
+          </a:prstGeom>
+          <a:noFill/>
+        </p:spPr>
+        <p:txBody>
+          <a:bodyPr wrap="square" rtlCol="0">
+            <a:spAutoFit/>
+          </a:bodyPr>
+          <a:lstStyle/>
+          <a:p>
+            <a:r>
+              <a:rPr lang="en-US" sz="1600" b="1" dirty="0">
+                <a:latin typeface="Anuphan" pitchFamily="2" charset="-34"/>
+                <a:cs typeface="Anuphan" pitchFamily="2" charset="-34"/>
+              </a:rPr>
+              <a:t>Why limited?</a:t>
+            </a:r>
+            <a:r>
+              <a:rPr lang="en-US" sz="1600" dirty="0">
+                <a:latin typeface="Anuphan" pitchFamily="2" charset="-34"/>
+                <a:cs typeface="Anuphan" pitchFamily="2" charset="-34"/>
+              </a:rPr>
+              <a:t> Complex models like Random Forest have hundreds of trees with thousands of nodes — JSON is not designed to store that kind of structure efficiently. Best for simple models only.</a:t>
+            </a:r>
+            <a:endParaRPr lang="en-US" sz="1600" dirty="0">
+              <a:solidFill>
+                <a:schemeClr val="tx1">
+                  <a:lumMod val="75000"/>
+                  <a:lumOff val="25000"/>
+                </a:schemeClr>
+              </a:solidFill>
+              <a:latin typeface="Anuphan" pitchFamily="2" charset="-34"/>
+              <a:cs typeface="Anuphan" pitchFamily="2" charset="-34"/>
+            </a:endParaRPr>
+          </a:p>
+        </p:txBody>
+      </p:sp>
+    </p:spTree>
+    <p:extLst>
+      <p:ext uri="{BB962C8B-B14F-4D97-AF65-F5344CB8AC3E}">
+        <p14:creationId xmlns:p14="http://schemas.microsoft.com/office/powerpoint/2010/main" val="3528733869"/>
+      </p:ext>
+    </p:extLst>
+  </p:cSld>
+  <p:clrMapOvr>
+    <a:masterClrMapping/>
+  </p:clrMapOvr>
+</p:sld>
+</file>
+
+<file path=ppt/slides/slide72.xml><?xml version="1.0" encoding="utf-8"?>
+<p:sld xmlns:a="http://schemas.openxmlformats.org/drawingml/2006/main" xmlns:r="http://schemas.openxmlformats.org/officeDocument/2006/relationships" xmlns:p="http://schemas.openxmlformats.org/presentationml/2006/main">
+  <p:cSld>
+    <p:spTree>
+      <p:nvGrpSpPr>
+        <p:cNvPr id="1" name="">
+          <a:extLst>
+            <a:ext uri="{FF2B5EF4-FFF2-40B4-BE49-F238E27FC236}">
+              <a16:creationId xmlns:a16="http://schemas.microsoft.com/office/drawing/2014/main" id="{0106C904-547E-CFD6-A472-4E5991145806}"/>
+            </a:ext>
+          </a:extLst>
+        </p:cNvPr>
+        <p:cNvGrpSpPr/>
+        <p:nvPr/>
+      </p:nvGrpSpPr>
+      <p:grpSpPr>
+        <a:xfrm>
+          <a:off x="0" y="0"/>
+          <a:ext cx="0" cy="0"/>
+          <a:chOff x="0" y="0"/>
+          <a:chExt cx="0" cy="0"/>
+        </a:xfrm>
+      </p:grpSpPr>
+      <p:sp>
+        <p:nvSpPr>
+          <p:cNvPr id="2" name="Title 1">
+            <a:extLst>
+              <a:ext uri="{FF2B5EF4-FFF2-40B4-BE49-F238E27FC236}">
+                <a16:creationId xmlns:a16="http://schemas.microsoft.com/office/drawing/2014/main" id="{DFDE8D9F-99BB-ECC3-86A1-01ACA4122EEE}"/>
+              </a:ext>
+            </a:extLst>
+          </p:cNvPr>
+          <p:cNvSpPr>
+            <a:spLocks noGrp="1"/>
+          </p:cNvSpPr>
+          <p:nvPr>
+            <p:ph type="ctrTitle"/>
+          </p:nvPr>
+        </p:nvSpPr>
+        <p:spPr>
+          <a:xfrm>
+            <a:off x="1317523" y="333332"/>
+            <a:ext cx="9556954" cy="825910"/>
+          </a:xfrm>
+        </p:spPr>
+        <p:txBody>
+          <a:bodyPr>
+            <a:noAutofit/>
+          </a:bodyPr>
+          <a:lstStyle/>
+          <a:p>
+            <a:pPr algn="l"/>
+            <a:r>
+              <a:rPr lang="en-US" sz="4000" dirty="0">
+                <a:solidFill>
+                  <a:schemeClr val="tx1">
+                    <a:lumMod val="75000"/>
+                    <a:lumOff val="25000"/>
+                  </a:schemeClr>
+                </a:solidFill>
+                <a:latin typeface="Anuphan" pitchFamily="2" charset="-34"/>
+                <a:cs typeface="Anuphan" pitchFamily="2" charset="-34"/>
+              </a:rPr>
+              <a:t>Using Machine Learning Model</a:t>
+            </a:r>
+          </a:p>
+        </p:txBody>
+      </p:sp>
+      <p:sp>
+        <p:nvSpPr>
+          <p:cNvPr id="4" name="TextBox 3">
+            <a:extLst>
+              <a:ext uri="{FF2B5EF4-FFF2-40B4-BE49-F238E27FC236}">
+                <a16:creationId xmlns:a16="http://schemas.microsoft.com/office/drawing/2014/main" id="{41BC7178-F2F5-1261-1E0A-85C12D6EA4BB}"/>
+              </a:ext>
+            </a:extLst>
+          </p:cNvPr>
+          <p:cNvSpPr txBox="1"/>
+          <p:nvPr/>
+        </p:nvSpPr>
+        <p:spPr>
+          <a:xfrm>
+            <a:off x="1317523" y="1159242"/>
+            <a:ext cx="9556954" cy="338554"/>
+          </a:xfrm>
+          <a:prstGeom prst="rect">
+            <a:avLst/>
+          </a:prstGeom>
+          <a:noFill/>
+        </p:spPr>
+        <p:txBody>
+          <a:bodyPr wrap="square" rtlCol="0">
+            <a:spAutoFit/>
+          </a:bodyPr>
+          <a:lstStyle/>
+          <a:p>
+            <a:r>
+              <a:rPr lang="en-US" sz="1600" dirty="0">
+                <a:solidFill>
+                  <a:schemeClr val="tx1">
+                    <a:lumMod val="75000"/>
+                    <a:lumOff val="25000"/>
+                  </a:schemeClr>
+                </a:solidFill>
+                <a:latin typeface="Anuphan" pitchFamily="2" charset="-34"/>
+                <a:cs typeface="Anuphan" pitchFamily="2" charset="-34"/>
+              </a:rPr>
+              <a:t>made by Claude</a:t>
+            </a:r>
+          </a:p>
+        </p:txBody>
+      </p:sp>
+      <p:pic>
+        <p:nvPicPr>
+          <p:cNvPr id="7" name="Picture 6">
+            <a:extLst>
+              <a:ext uri="{FF2B5EF4-FFF2-40B4-BE49-F238E27FC236}">
+                <a16:creationId xmlns:a16="http://schemas.microsoft.com/office/drawing/2014/main" id="{E51F6B08-ED10-5235-EA94-56B4EC7DAD90}"/>
+              </a:ext>
+            </a:extLst>
+          </p:cNvPr>
+          <p:cNvPicPr>
+            <a:picLocks noChangeAspect="1"/>
+          </p:cNvPicPr>
+          <p:nvPr/>
+        </p:nvPicPr>
+        <p:blipFill>
+          <a:blip r:embed="rId2"/>
+          <a:stretch>
+            <a:fillRect/>
+          </a:stretch>
+        </p:blipFill>
+        <p:spPr>
+          <a:xfrm>
+            <a:off x="2128284" y="1628135"/>
+            <a:ext cx="7935432" cy="4896533"/>
+          </a:xfrm>
+          <a:prstGeom prst="rect">
+            <a:avLst/>
+          </a:prstGeom>
+          <a:ln w="38100" cap="sq">
+            <a:solidFill>
+              <a:srgbClr val="000000"/>
+            </a:solidFill>
+            <a:prstDash val="solid"/>
+            <a:miter lim="800000"/>
+          </a:ln>
+          <a:effectLst>
+            <a:outerShdw blurRad="50800" dist="38100" dir="2700000" algn="tl" rotWithShape="0">
+              <a:srgbClr val="000000">
+                <a:alpha val="43000"/>
+              </a:srgbClr>
+            </a:outerShdw>
+          </a:effectLst>
+        </p:spPr>
+      </p:pic>
+    </p:spTree>
+    <p:extLst>
+      <p:ext uri="{BB962C8B-B14F-4D97-AF65-F5344CB8AC3E}">
+        <p14:creationId xmlns:p14="http://schemas.microsoft.com/office/powerpoint/2010/main" val="1317308559"/>
+      </p:ext>
+    </p:extLst>
+  </p:cSld>
+  <p:clrMapOvr>
+    <a:masterClrMapping/>
+  </p:clrMapOvr>
+</p:sld>
+</file>
+
+<file path=ppt/slides/slide73.xml><?xml version="1.0" encoding="utf-8"?>
+<p:sld xmlns:a="http://schemas.openxmlformats.org/drawingml/2006/main" xmlns:r="http://schemas.openxmlformats.org/officeDocument/2006/relationships" xmlns:p="http://schemas.openxmlformats.org/presentationml/2006/main">
+  <p:cSld>
+    <p:spTree>
+      <p:nvGrpSpPr>
+        <p:cNvPr id="1" name="">
+          <a:extLst>
+            <a:ext uri="{FF2B5EF4-FFF2-40B4-BE49-F238E27FC236}">
+              <a16:creationId xmlns:a16="http://schemas.microsoft.com/office/drawing/2014/main" id="{FB29B13A-B71E-F4AF-F048-60098F877856}"/>
+            </a:ext>
+          </a:extLst>
+        </p:cNvPr>
+        <p:cNvGrpSpPr/>
+        <p:nvPr/>
+      </p:nvGrpSpPr>
+      <p:grpSpPr>
+        <a:xfrm>
+          <a:off x="0" y="0"/>
+          <a:ext cx="0" cy="0"/>
+          <a:chOff x="0" y="0"/>
+          <a:chExt cx="0" cy="0"/>
+        </a:xfrm>
+      </p:grpSpPr>
+      <p:sp>
+        <p:nvSpPr>
+          <p:cNvPr id="2" name="Title 1">
+            <a:extLst>
+              <a:ext uri="{FF2B5EF4-FFF2-40B4-BE49-F238E27FC236}">
+                <a16:creationId xmlns:a16="http://schemas.microsoft.com/office/drawing/2014/main" id="{100FECE2-CD35-789A-A1D8-6DDB5A4C7706}"/>
+              </a:ext>
+            </a:extLst>
+          </p:cNvPr>
+          <p:cNvSpPr>
+            <a:spLocks noGrp="1"/>
+          </p:cNvSpPr>
+          <p:nvPr>
+            <p:ph type="ctrTitle"/>
+          </p:nvPr>
+        </p:nvSpPr>
+        <p:spPr>
+          <a:xfrm>
+            <a:off x="1317523" y="333332"/>
+            <a:ext cx="9556954" cy="825910"/>
+          </a:xfrm>
+        </p:spPr>
+        <p:txBody>
+          <a:bodyPr>
+            <a:noAutofit/>
+          </a:bodyPr>
+          <a:lstStyle/>
+          <a:p>
+            <a:pPr algn="l"/>
+            <a:r>
+              <a:rPr lang="en-US" sz="4000" dirty="0">
+                <a:solidFill>
+                  <a:schemeClr val="tx1">
+                    <a:lumMod val="75000"/>
+                    <a:lumOff val="25000"/>
+                  </a:schemeClr>
+                </a:solidFill>
+                <a:latin typeface="Anuphan" pitchFamily="2" charset="-34"/>
+                <a:cs typeface="Anuphan" pitchFamily="2" charset="-34"/>
+              </a:rPr>
+              <a:t>Using Machine Learning Model</a:t>
+            </a:r>
+          </a:p>
+        </p:txBody>
+      </p:sp>
+      <p:sp>
+        <p:nvSpPr>
+          <p:cNvPr id="4" name="TextBox 3">
+            <a:extLst>
+              <a:ext uri="{FF2B5EF4-FFF2-40B4-BE49-F238E27FC236}">
+                <a16:creationId xmlns:a16="http://schemas.microsoft.com/office/drawing/2014/main" id="{40E6CFEE-633A-CA97-0079-F8E8747DF833}"/>
+              </a:ext>
+            </a:extLst>
+          </p:cNvPr>
+          <p:cNvSpPr txBox="1"/>
+          <p:nvPr/>
+        </p:nvSpPr>
+        <p:spPr>
+          <a:xfrm>
+            <a:off x="1317523" y="1159242"/>
+            <a:ext cx="9556954" cy="338554"/>
+          </a:xfrm>
+          <a:prstGeom prst="rect">
+            <a:avLst/>
+          </a:prstGeom>
+          <a:noFill/>
+        </p:spPr>
+        <p:txBody>
+          <a:bodyPr wrap="square" rtlCol="0">
+            <a:spAutoFit/>
+          </a:bodyPr>
+          <a:lstStyle/>
+          <a:p>
+            <a:r>
+              <a:rPr lang="en-US" sz="1600" dirty="0">
+                <a:solidFill>
+                  <a:schemeClr val="tx1">
+                    <a:lumMod val="75000"/>
+                    <a:lumOff val="25000"/>
+                  </a:schemeClr>
+                </a:solidFill>
+                <a:latin typeface="Anuphan" pitchFamily="2" charset="-34"/>
+                <a:cs typeface="Anuphan" pitchFamily="2" charset="-34"/>
+              </a:rPr>
+              <a:t>made by Claude</a:t>
+            </a:r>
+          </a:p>
+        </p:txBody>
+      </p:sp>
+      <p:pic>
+        <p:nvPicPr>
+          <p:cNvPr id="5" name="Picture 4">
+            <a:extLst>
+              <a:ext uri="{FF2B5EF4-FFF2-40B4-BE49-F238E27FC236}">
+                <a16:creationId xmlns:a16="http://schemas.microsoft.com/office/drawing/2014/main" id="{EEAFF4A8-A040-A52E-D8DA-454CE29E84C1}"/>
+              </a:ext>
+            </a:extLst>
+          </p:cNvPr>
+          <p:cNvPicPr>
+            <a:picLocks noChangeAspect="1"/>
+          </p:cNvPicPr>
+          <p:nvPr/>
+        </p:nvPicPr>
+        <p:blipFill>
+          <a:blip r:embed="rId2"/>
+          <a:stretch>
+            <a:fillRect/>
+          </a:stretch>
+        </p:blipFill>
+        <p:spPr>
+          <a:xfrm>
+            <a:off x="2099705" y="1790471"/>
+            <a:ext cx="7992590" cy="3277057"/>
+          </a:xfrm>
+          <a:prstGeom prst="rect">
+            <a:avLst/>
+          </a:prstGeom>
+          <a:ln w="38100" cap="sq">
+            <a:solidFill>
+              <a:srgbClr val="000000"/>
+            </a:solidFill>
+            <a:prstDash val="solid"/>
+            <a:miter lim="800000"/>
+          </a:ln>
+          <a:effectLst>
+            <a:outerShdw blurRad="50800" dist="38100" dir="2700000" algn="tl" rotWithShape="0">
+              <a:srgbClr val="000000">
+                <a:alpha val="43000"/>
+              </a:srgbClr>
+            </a:outerShdw>
+          </a:effectLst>
+        </p:spPr>
+      </p:pic>
+    </p:spTree>
+    <p:extLst>
+      <p:ext uri="{BB962C8B-B14F-4D97-AF65-F5344CB8AC3E}">
+        <p14:creationId xmlns:p14="http://schemas.microsoft.com/office/powerpoint/2010/main" val="2722437459"/>
+      </p:ext>
+    </p:extLst>
+  </p:cSld>
+  <p:clrMapOvr>
+    <a:masterClrMapping/>
+  </p:clrMapOvr>
+</p:sld>
+</file>
+
+<file path=ppt/slides/slide74.xml><?xml version="1.0" encoding="utf-8"?>
+<p:sld xmlns:a="http://schemas.openxmlformats.org/drawingml/2006/main" xmlns:r="http://schemas.openxmlformats.org/officeDocument/2006/relationships" xmlns:p="http://schemas.openxmlformats.org/presentationml/2006/main">
+  <p:cSld>
+    <p:spTree>
+      <p:nvGrpSpPr>
+        <p:cNvPr id="1" name="">
+          <a:extLst>
+            <a:ext uri="{FF2B5EF4-FFF2-40B4-BE49-F238E27FC236}">
+              <a16:creationId xmlns:a16="http://schemas.microsoft.com/office/drawing/2014/main" id="{66C36FC4-F00F-D6EC-CB8B-B0E0C9EEAD83}"/>
+            </a:ext>
+          </a:extLst>
+        </p:cNvPr>
+        <p:cNvGrpSpPr/>
+        <p:nvPr/>
+      </p:nvGrpSpPr>
+      <p:grpSpPr>
+        <a:xfrm>
+          <a:off x="0" y="0"/>
+          <a:ext cx="0" cy="0"/>
+          <a:chOff x="0" y="0"/>
+          <a:chExt cx="0" cy="0"/>
+        </a:xfrm>
+      </p:grpSpPr>
+      <p:sp>
+        <p:nvSpPr>
+          <p:cNvPr id="2" name="Title 1">
+            <a:extLst>
+              <a:ext uri="{FF2B5EF4-FFF2-40B4-BE49-F238E27FC236}">
+                <a16:creationId xmlns:a16="http://schemas.microsoft.com/office/drawing/2014/main" id="{C064E2BF-F42B-F254-8C55-220CAC40A43C}"/>
+              </a:ext>
+            </a:extLst>
+          </p:cNvPr>
+          <p:cNvSpPr>
+            <a:spLocks noGrp="1"/>
+          </p:cNvSpPr>
+          <p:nvPr>
+            <p:ph type="ctrTitle"/>
+          </p:nvPr>
+        </p:nvSpPr>
+        <p:spPr>
+          <a:xfrm>
+            <a:off x="1317523" y="333332"/>
+            <a:ext cx="9556954" cy="825910"/>
+          </a:xfrm>
+        </p:spPr>
+        <p:txBody>
+          <a:bodyPr>
+            <a:noAutofit/>
+          </a:bodyPr>
+          <a:lstStyle/>
+          <a:p>
+            <a:pPr algn="l"/>
+            <a:r>
+              <a:rPr lang="en-US" sz="4000" dirty="0">
+                <a:solidFill>
+                  <a:schemeClr val="tx1">
+                    <a:lumMod val="75000"/>
+                    <a:lumOff val="25000"/>
+                  </a:schemeClr>
+                </a:solidFill>
+                <a:latin typeface="Anuphan" pitchFamily="2" charset="-34"/>
+                <a:cs typeface="Anuphan" pitchFamily="2" charset="-34"/>
+              </a:rPr>
+              <a:t>Using Machine Learning Model</a:t>
+            </a:r>
+          </a:p>
+        </p:txBody>
+      </p:sp>
+      <p:sp>
+        <p:nvSpPr>
+          <p:cNvPr id="4" name="TextBox 3">
+            <a:extLst>
+              <a:ext uri="{FF2B5EF4-FFF2-40B4-BE49-F238E27FC236}">
+                <a16:creationId xmlns:a16="http://schemas.microsoft.com/office/drawing/2014/main" id="{FB840088-BBEF-3750-2F7B-5B9AD190D3BB}"/>
+              </a:ext>
+            </a:extLst>
+          </p:cNvPr>
+          <p:cNvSpPr txBox="1"/>
+          <p:nvPr/>
+        </p:nvSpPr>
+        <p:spPr>
+          <a:xfrm>
+            <a:off x="1317523" y="1159242"/>
+            <a:ext cx="9556954" cy="338554"/>
+          </a:xfrm>
+          <a:prstGeom prst="rect">
+            <a:avLst/>
+          </a:prstGeom>
+          <a:noFill/>
+        </p:spPr>
+        <p:txBody>
+          <a:bodyPr wrap="square" rtlCol="0">
+            <a:spAutoFit/>
+          </a:bodyPr>
+          <a:lstStyle/>
+          <a:p>
+            <a:r>
+              <a:rPr lang="en-US" sz="1600" dirty="0">
+                <a:solidFill>
+                  <a:schemeClr val="tx1">
+                    <a:lumMod val="75000"/>
+                    <a:lumOff val="25000"/>
+                  </a:schemeClr>
+                </a:solidFill>
+                <a:latin typeface="Anuphan" pitchFamily="2" charset="-34"/>
+                <a:cs typeface="Anuphan" pitchFamily="2" charset="-34"/>
+              </a:rPr>
+              <a:t>made by Claude</a:t>
+            </a:r>
+          </a:p>
+        </p:txBody>
+      </p:sp>
+      <p:pic>
+        <p:nvPicPr>
+          <p:cNvPr id="6" name="Picture 5">
+            <a:extLst>
+              <a:ext uri="{FF2B5EF4-FFF2-40B4-BE49-F238E27FC236}">
+                <a16:creationId xmlns:a16="http://schemas.microsoft.com/office/drawing/2014/main" id="{8B74E8B8-76D7-DD6B-231D-DD1E45A7F91E}"/>
+              </a:ext>
+            </a:extLst>
+          </p:cNvPr>
+          <p:cNvPicPr>
+            <a:picLocks noChangeAspect="1"/>
+          </p:cNvPicPr>
+          <p:nvPr/>
+        </p:nvPicPr>
+        <p:blipFill>
+          <a:blip r:embed="rId2"/>
+          <a:stretch>
+            <a:fillRect/>
+          </a:stretch>
+        </p:blipFill>
+        <p:spPr>
+          <a:xfrm>
+            <a:off x="3337026" y="1328519"/>
+            <a:ext cx="7891412" cy="5091232"/>
+          </a:xfrm>
+          <a:prstGeom prst="rect">
+            <a:avLst/>
+          </a:prstGeom>
+          <a:ln w="38100" cap="sq">
+            <a:solidFill>
+              <a:srgbClr val="000000"/>
+            </a:solidFill>
+            <a:prstDash val="solid"/>
+            <a:miter lim="800000"/>
+          </a:ln>
+          <a:effectLst>
+            <a:outerShdw blurRad="50800" dist="38100" dir="2700000" algn="tl" rotWithShape="0">
+              <a:srgbClr val="000000">
+                <a:alpha val="43000"/>
+              </a:srgbClr>
+            </a:outerShdw>
+          </a:effectLst>
+        </p:spPr>
+      </p:pic>
+    </p:spTree>
+    <p:extLst>
+      <p:ext uri="{BB962C8B-B14F-4D97-AF65-F5344CB8AC3E}">
         <p14:creationId xmlns:p14="http://schemas.microsoft.com/office/powerpoint/2010/main" val="4036199650"/>
       </p:ext>
     </p:extLst>
@@ -16183,7 +17999,7 @@
 </p:sld>
 </file>
 
-<file path=ppt/slides/slide71.xml><?xml version="1.0" encoding="utf-8"?>
+<file path=ppt/slides/slide75.xml><?xml version="1.0" encoding="utf-8"?>
 <p:sld xmlns:a="http://schemas.openxmlformats.org/drawingml/2006/main" xmlns:r="http://schemas.openxmlformats.org/officeDocument/2006/relationships" xmlns:p="http://schemas.openxmlformats.org/presentationml/2006/main">
   <p:cSld>
     <p:spTree>
@@ -16352,7 +18168,7 @@
 </p:sld>
 </file>
 
-<file path=ppt/slides/slide72.xml><?xml version="1.0" encoding="utf-8"?>
+<file path=ppt/slides/slide76.xml><?xml version="1.0" encoding="utf-8"?>
 <p:sld xmlns:a="http://schemas.openxmlformats.org/drawingml/2006/main" xmlns:r="http://schemas.openxmlformats.org/officeDocument/2006/relationships" xmlns:p="http://schemas.openxmlformats.org/presentationml/2006/main">
   <p:cSld>
     <p:spTree>
@@ -16521,7 +18337,7 @@
 </p:sld>
 </file>
 
-<file path=ppt/slides/slide73.xml><?xml version="1.0" encoding="utf-8"?>
+<file path=ppt/slides/slide77.xml><?xml version="1.0" encoding="utf-8"?>
 <p:sld xmlns:a="http://schemas.openxmlformats.org/drawingml/2006/main" xmlns:r="http://schemas.openxmlformats.org/officeDocument/2006/relationships" xmlns:p="http://schemas.openxmlformats.org/presentationml/2006/main">
   <p:cSld>
     <p:spTree>
@@ -16627,7 +18443,7 @@
 </p:sld>
 </file>
 
-<file path=ppt/slides/slide74.xml><?xml version="1.0" encoding="utf-8"?>
+<file path=ppt/slides/slide78.xml><?xml version="1.0" encoding="utf-8"?>
 <p:sld xmlns:a="http://schemas.openxmlformats.org/drawingml/2006/main" xmlns:r="http://schemas.openxmlformats.org/officeDocument/2006/relationships" xmlns:p="http://schemas.openxmlformats.org/presentationml/2006/main">
   <p:cSld>
     <p:spTree>
@@ -16756,7 +18572,7 @@
 </p:sld>
 </file>
 
-<file path=ppt/slides/slide75.xml><?xml version="1.0" encoding="utf-8"?>
+<file path=ppt/slides/slide79.xml><?xml version="1.0" encoding="utf-8"?>
 <p:sld xmlns:a="http://schemas.openxmlformats.org/drawingml/2006/main" xmlns:r="http://schemas.openxmlformats.org/officeDocument/2006/relationships" xmlns:p="http://schemas.openxmlformats.org/presentationml/2006/main">
   <p:cSld>
     <p:spTree>
@@ -16876,510 +18692,6 @@
     <p:extLst>
       <p:ext uri="{BB962C8B-B14F-4D97-AF65-F5344CB8AC3E}">
         <p14:creationId xmlns:p14="http://schemas.microsoft.com/office/powerpoint/2010/main" val="352280969"/>
-      </p:ext>
-    </p:extLst>
-  </p:cSld>
-  <p:clrMapOvr>
-    <a:masterClrMapping/>
-  </p:clrMapOvr>
-</p:sld>
-</file>
-
-<file path=ppt/slides/slide76.xml><?xml version="1.0" encoding="utf-8"?>
-<p:sld xmlns:a="http://schemas.openxmlformats.org/drawingml/2006/main" xmlns:r="http://schemas.openxmlformats.org/officeDocument/2006/relationships" xmlns:p="http://schemas.openxmlformats.org/presentationml/2006/main">
-  <p:cSld>
-    <p:spTree>
-      <p:nvGrpSpPr>
-        <p:cNvPr id="1" name="">
-          <a:extLst>
-            <a:ext uri="{FF2B5EF4-FFF2-40B4-BE49-F238E27FC236}">
-              <a16:creationId xmlns:a16="http://schemas.microsoft.com/office/drawing/2014/main" id="{3040711A-3750-ACEA-F3DB-6BA425E69E36}"/>
-            </a:ext>
-          </a:extLst>
-        </p:cNvPr>
-        <p:cNvGrpSpPr/>
-        <p:nvPr/>
-      </p:nvGrpSpPr>
-      <p:grpSpPr>
-        <a:xfrm>
-          <a:off x="0" y="0"/>
-          <a:ext cx="0" cy="0"/>
-          <a:chOff x="0" y="0"/>
-          <a:chExt cx="0" cy="0"/>
-        </a:xfrm>
-      </p:grpSpPr>
-      <p:sp>
-        <p:nvSpPr>
-          <p:cNvPr id="2" name="Title 1">
-            <a:extLst>
-              <a:ext uri="{FF2B5EF4-FFF2-40B4-BE49-F238E27FC236}">
-                <a16:creationId xmlns:a16="http://schemas.microsoft.com/office/drawing/2014/main" id="{64D65FEE-D0A1-960A-1419-06A3BB59A6A0}"/>
-              </a:ext>
-            </a:extLst>
-          </p:cNvPr>
-          <p:cNvSpPr>
-            <a:spLocks noGrp="1"/>
-          </p:cNvSpPr>
-          <p:nvPr>
-            <p:ph type="ctrTitle"/>
-          </p:nvPr>
-        </p:nvSpPr>
-        <p:spPr>
-          <a:xfrm>
-            <a:off x="1317523" y="983225"/>
-            <a:ext cx="9556954" cy="825910"/>
-          </a:xfrm>
-        </p:spPr>
-        <p:txBody>
-          <a:bodyPr>
-            <a:noAutofit/>
-          </a:bodyPr>
-          <a:lstStyle/>
-          <a:p>
-            <a:pPr algn="l"/>
-            <a:r>
-              <a:rPr lang="en-US" sz="3600" dirty="0"/>
-              <a:t>Data Terminology</a:t>
-            </a:r>
-            <a:endParaRPr lang="en-US" sz="3600" b="1" dirty="0">
-              <a:solidFill>
-                <a:schemeClr val="tx1">
-                  <a:lumMod val="75000"/>
-                  <a:lumOff val="25000"/>
-                </a:schemeClr>
-              </a:solidFill>
-              <a:latin typeface="Anuphan" pitchFamily="2" charset="-34"/>
-              <a:cs typeface="Anuphan" pitchFamily="2" charset="-34"/>
-            </a:endParaRPr>
-          </a:p>
-        </p:txBody>
-      </p:sp>
-      <p:pic>
-        <p:nvPicPr>
-          <p:cNvPr id="5" name="Picture 4">
-            <a:extLst>
-              <a:ext uri="{FF2B5EF4-FFF2-40B4-BE49-F238E27FC236}">
-                <a16:creationId xmlns:a16="http://schemas.microsoft.com/office/drawing/2014/main" id="{B42C6E10-32DF-7275-5C8C-32101EB1C9BE}"/>
-              </a:ext>
-            </a:extLst>
-          </p:cNvPr>
-          <p:cNvPicPr>
-            <a:picLocks noChangeAspect="1"/>
-          </p:cNvPicPr>
-          <p:nvPr/>
-        </p:nvPicPr>
-        <p:blipFill>
-          <a:blip r:embed="rId2"/>
-          <a:stretch>
-            <a:fillRect/>
-          </a:stretch>
-        </p:blipFill>
-        <p:spPr>
-          <a:xfrm>
-            <a:off x="931209" y="2300746"/>
-            <a:ext cx="10329582" cy="3239734"/>
-          </a:xfrm>
-          <a:prstGeom prst="rect">
-            <a:avLst/>
-          </a:prstGeom>
-          <a:ln w="38100" cap="sq">
-            <a:solidFill>
-              <a:srgbClr val="000000"/>
-            </a:solidFill>
-            <a:prstDash val="solid"/>
-            <a:miter lim="800000"/>
-          </a:ln>
-          <a:effectLst>
-            <a:outerShdw blurRad="50800" dist="38100" dir="2700000" algn="tl" rotWithShape="0">
-              <a:srgbClr val="000000">
-                <a:alpha val="43000"/>
-              </a:srgbClr>
-            </a:outerShdw>
-          </a:effectLst>
-        </p:spPr>
-      </p:pic>
-    </p:spTree>
-    <p:extLst>
-      <p:ext uri="{BB962C8B-B14F-4D97-AF65-F5344CB8AC3E}">
-        <p14:creationId xmlns:p14="http://schemas.microsoft.com/office/powerpoint/2010/main" val="3298895514"/>
-      </p:ext>
-    </p:extLst>
-  </p:cSld>
-  <p:clrMapOvr>
-    <a:masterClrMapping/>
-  </p:clrMapOvr>
-</p:sld>
-</file>
-
-<file path=ppt/slides/slide77.xml><?xml version="1.0" encoding="utf-8"?>
-<p:sld xmlns:a="http://schemas.openxmlformats.org/drawingml/2006/main" xmlns:r="http://schemas.openxmlformats.org/officeDocument/2006/relationships" xmlns:p="http://schemas.openxmlformats.org/presentationml/2006/main">
-  <p:cSld>
-    <p:spTree>
-      <p:nvGrpSpPr>
-        <p:cNvPr id="1" name="">
-          <a:extLst>
-            <a:ext uri="{FF2B5EF4-FFF2-40B4-BE49-F238E27FC236}">
-              <a16:creationId xmlns:a16="http://schemas.microsoft.com/office/drawing/2014/main" id="{9F39DB9A-55CF-00CE-8018-55D3F8901CA8}"/>
-            </a:ext>
-          </a:extLst>
-        </p:cNvPr>
-        <p:cNvGrpSpPr/>
-        <p:nvPr/>
-      </p:nvGrpSpPr>
-      <p:grpSpPr>
-        <a:xfrm>
-          <a:off x="0" y="0"/>
-          <a:ext cx="0" cy="0"/>
-          <a:chOff x="0" y="0"/>
-          <a:chExt cx="0" cy="0"/>
-        </a:xfrm>
-      </p:grpSpPr>
-      <p:sp>
-        <p:nvSpPr>
-          <p:cNvPr id="2" name="Title 1">
-            <a:extLst>
-              <a:ext uri="{FF2B5EF4-FFF2-40B4-BE49-F238E27FC236}">
-                <a16:creationId xmlns:a16="http://schemas.microsoft.com/office/drawing/2014/main" id="{C9C912BA-4E78-E975-EAC8-1EC203A790A0}"/>
-              </a:ext>
-            </a:extLst>
-          </p:cNvPr>
-          <p:cNvSpPr>
-            <a:spLocks noGrp="1"/>
-          </p:cNvSpPr>
-          <p:nvPr>
-            <p:ph type="ctrTitle"/>
-          </p:nvPr>
-        </p:nvSpPr>
-        <p:spPr>
-          <a:xfrm>
-            <a:off x="1317523" y="983225"/>
-            <a:ext cx="9556954" cy="825910"/>
-          </a:xfrm>
-        </p:spPr>
-        <p:txBody>
-          <a:bodyPr>
-            <a:noAutofit/>
-          </a:bodyPr>
-          <a:lstStyle/>
-          <a:p>
-            <a:pPr algn="l"/>
-            <a:r>
-              <a:rPr lang="en-US" sz="3600" dirty="0"/>
-              <a:t>Data Terminology</a:t>
-            </a:r>
-            <a:endParaRPr lang="en-US" sz="3600" b="1" dirty="0">
-              <a:solidFill>
-                <a:schemeClr val="tx1">
-                  <a:lumMod val="75000"/>
-                  <a:lumOff val="25000"/>
-                </a:schemeClr>
-              </a:solidFill>
-              <a:latin typeface="Anuphan" pitchFamily="2" charset="-34"/>
-              <a:cs typeface="Anuphan" pitchFamily="2" charset="-34"/>
-            </a:endParaRPr>
-          </a:p>
-        </p:txBody>
-      </p:sp>
-      <p:pic>
-        <p:nvPicPr>
-          <p:cNvPr id="4" name="Picture 3">
-            <a:extLst>
-              <a:ext uri="{FF2B5EF4-FFF2-40B4-BE49-F238E27FC236}">
-                <a16:creationId xmlns:a16="http://schemas.microsoft.com/office/drawing/2014/main" id="{195655E0-2F16-47F6-BC27-C1F4AAB29822}"/>
-              </a:ext>
-            </a:extLst>
-          </p:cNvPr>
-          <p:cNvPicPr>
-            <a:picLocks noChangeAspect="1"/>
-          </p:cNvPicPr>
-          <p:nvPr/>
-        </p:nvPicPr>
-        <p:blipFill>
-          <a:blip r:embed="rId2"/>
-          <a:stretch>
-            <a:fillRect/>
-          </a:stretch>
-        </p:blipFill>
-        <p:spPr>
-          <a:xfrm>
-            <a:off x="805477" y="2059858"/>
-            <a:ext cx="10581046" cy="3603524"/>
-          </a:xfrm>
-          <a:prstGeom prst="rect">
-            <a:avLst/>
-          </a:prstGeom>
-          <a:ln w="38100" cap="sq">
-            <a:solidFill>
-              <a:srgbClr val="000000"/>
-            </a:solidFill>
-            <a:prstDash val="solid"/>
-            <a:miter lim="800000"/>
-          </a:ln>
-          <a:effectLst>
-            <a:outerShdw blurRad="50800" dist="38100" dir="2700000" algn="tl" rotWithShape="0">
-              <a:srgbClr val="000000">
-                <a:alpha val="43000"/>
-              </a:srgbClr>
-            </a:outerShdw>
-          </a:effectLst>
-        </p:spPr>
-      </p:pic>
-    </p:spTree>
-    <p:extLst>
-      <p:ext uri="{BB962C8B-B14F-4D97-AF65-F5344CB8AC3E}">
-        <p14:creationId xmlns:p14="http://schemas.microsoft.com/office/powerpoint/2010/main" val="4111927899"/>
-      </p:ext>
-    </p:extLst>
-  </p:cSld>
-  <p:clrMapOvr>
-    <a:masterClrMapping/>
-  </p:clrMapOvr>
-</p:sld>
-</file>
-
-<file path=ppt/slides/slide78.xml><?xml version="1.0" encoding="utf-8"?>
-<p:sld xmlns:a="http://schemas.openxmlformats.org/drawingml/2006/main" xmlns:r="http://schemas.openxmlformats.org/officeDocument/2006/relationships" xmlns:p="http://schemas.openxmlformats.org/presentationml/2006/main">
-  <p:cSld>
-    <p:spTree>
-      <p:nvGrpSpPr>
-        <p:cNvPr id="1" name="">
-          <a:extLst>
-            <a:ext uri="{FF2B5EF4-FFF2-40B4-BE49-F238E27FC236}">
-              <a16:creationId xmlns:a16="http://schemas.microsoft.com/office/drawing/2014/main" id="{5AC994BA-D35A-6D6B-5942-FCA542FF8FA5}"/>
-            </a:ext>
-          </a:extLst>
-        </p:cNvPr>
-        <p:cNvGrpSpPr/>
-        <p:nvPr/>
-      </p:nvGrpSpPr>
-      <p:grpSpPr>
-        <a:xfrm>
-          <a:off x="0" y="0"/>
-          <a:ext cx="0" cy="0"/>
-          <a:chOff x="0" y="0"/>
-          <a:chExt cx="0" cy="0"/>
-        </a:xfrm>
-      </p:grpSpPr>
-      <p:sp>
-        <p:nvSpPr>
-          <p:cNvPr id="2" name="Title 1">
-            <a:extLst>
-              <a:ext uri="{FF2B5EF4-FFF2-40B4-BE49-F238E27FC236}">
-                <a16:creationId xmlns:a16="http://schemas.microsoft.com/office/drawing/2014/main" id="{F38423A8-6052-9604-B8D5-A52B9B690D51}"/>
-              </a:ext>
-            </a:extLst>
-          </p:cNvPr>
-          <p:cNvSpPr>
-            <a:spLocks noGrp="1"/>
-          </p:cNvSpPr>
-          <p:nvPr>
-            <p:ph type="ctrTitle"/>
-          </p:nvPr>
-        </p:nvSpPr>
-        <p:spPr>
-          <a:xfrm>
-            <a:off x="1317523" y="983225"/>
-            <a:ext cx="9556954" cy="825910"/>
-          </a:xfrm>
-        </p:spPr>
-        <p:txBody>
-          <a:bodyPr>
-            <a:noAutofit/>
-          </a:bodyPr>
-          <a:lstStyle/>
-          <a:p>
-            <a:pPr algn="l"/>
-            <a:r>
-              <a:rPr lang="en-US" sz="3600" dirty="0"/>
-              <a:t>Model Terminology</a:t>
-            </a:r>
-            <a:endParaRPr lang="en-US" sz="3600" b="1" dirty="0">
-              <a:solidFill>
-                <a:schemeClr val="tx1">
-                  <a:lumMod val="75000"/>
-                  <a:lumOff val="25000"/>
-                </a:schemeClr>
-              </a:solidFill>
-              <a:latin typeface="Anuphan" pitchFamily="2" charset="-34"/>
-              <a:cs typeface="Anuphan" pitchFamily="2" charset="-34"/>
-            </a:endParaRPr>
-          </a:p>
-        </p:txBody>
-      </p:sp>
-      <p:pic>
-        <p:nvPicPr>
-          <p:cNvPr id="5" name="Picture 4">
-            <a:extLst>
-              <a:ext uri="{FF2B5EF4-FFF2-40B4-BE49-F238E27FC236}">
-                <a16:creationId xmlns:a16="http://schemas.microsoft.com/office/drawing/2014/main" id="{0542F131-501E-3267-0511-2909D02A6209}"/>
-              </a:ext>
-            </a:extLst>
-          </p:cNvPr>
-          <p:cNvPicPr>
-            <a:picLocks noChangeAspect="1"/>
-          </p:cNvPicPr>
-          <p:nvPr/>
-        </p:nvPicPr>
-        <p:blipFill>
-          <a:blip r:embed="rId2"/>
-          <a:stretch>
-            <a:fillRect/>
-          </a:stretch>
-        </p:blipFill>
-        <p:spPr>
-          <a:xfrm>
-            <a:off x="742672" y="2040193"/>
-            <a:ext cx="10706656" cy="2777614"/>
-          </a:xfrm>
-          <a:prstGeom prst="rect">
-            <a:avLst/>
-          </a:prstGeom>
-          <a:ln w="38100" cap="sq">
-            <a:solidFill>
-              <a:srgbClr val="000000"/>
-            </a:solidFill>
-            <a:prstDash val="solid"/>
-            <a:miter lim="800000"/>
-          </a:ln>
-          <a:effectLst>
-            <a:outerShdw blurRad="50800" dist="38100" dir="2700000" algn="tl" rotWithShape="0">
-              <a:srgbClr val="000000">
-                <a:alpha val="43000"/>
-              </a:srgbClr>
-            </a:outerShdw>
-          </a:effectLst>
-        </p:spPr>
-      </p:pic>
-    </p:spTree>
-    <p:extLst>
-      <p:ext uri="{BB962C8B-B14F-4D97-AF65-F5344CB8AC3E}">
-        <p14:creationId xmlns:p14="http://schemas.microsoft.com/office/powerpoint/2010/main" val="1258016362"/>
-      </p:ext>
-    </p:extLst>
-  </p:cSld>
-  <p:clrMapOvr>
-    <a:masterClrMapping/>
-  </p:clrMapOvr>
-</p:sld>
-</file>
-
-<file path=ppt/slides/slide79.xml><?xml version="1.0" encoding="utf-8"?>
-<p:sld xmlns:a="http://schemas.openxmlformats.org/drawingml/2006/main" xmlns:r="http://schemas.openxmlformats.org/officeDocument/2006/relationships" xmlns:p="http://schemas.openxmlformats.org/presentationml/2006/main">
-  <p:cSld>
-    <p:spTree>
-      <p:nvGrpSpPr>
-        <p:cNvPr id="1" name="">
-          <a:extLst>
-            <a:ext uri="{FF2B5EF4-FFF2-40B4-BE49-F238E27FC236}">
-              <a16:creationId xmlns:a16="http://schemas.microsoft.com/office/drawing/2014/main" id="{142ECE9B-B5E9-F783-35F9-C8F029CA2A15}"/>
-            </a:ext>
-          </a:extLst>
-        </p:cNvPr>
-        <p:cNvGrpSpPr/>
-        <p:nvPr/>
-      </p:nvGrpSpPr>
-      <p:grpSpPr>
-        <a:xfrm>
-          <a:off x="0" y="0"/>
-          <a:ext cx="0" cy="0"/>
-          <a:chOff x="0" y="0"/>
-          <a:chExt cx="0" cy="0"/>
-        </a:xfrm>
-      </p:grpSpPr>
-      <p:sp>
-        <p:nvSpPr>
-          <p:cNvPr id="2" name="Title 1">
-            <a:extLst>
-              <a:ext uri="{FF2B5EF4-FFF2-40B4-BE49-F238E27FC236}">
-                <a16:creationId xmlns:a16="http://schemas.microsoft.com/office/drawing/2014/main" id="{A9AE56B4-66F9-C05A-1B4D-31C4538A9307}"/>
-              </a:ext>
-            </a:extLst>
-          </p:cNvPr>
-          <p:cNvSpPr>
-            <a:spLocks noGrp="1"/>
-          </p:cNvSpPr>
-          <p:nvPr>
-            <p:ph type="ctrTitle"/>
-          </p:nvPr>
-        </p:nvSpPr>
-        <p:spPr>
-          <a:xfrm>
-            <a:off x="1317523" y="983225"/>
-            <a:ext cx="9556954" cy="825910"/>
-          </a:xfrm>
-        </p:spPr>
-        <p:txBody>
-          <a:bodyPr>
-            <a:noAutofit/>
-          </a:bodyPr>
-          <a:lstStyle/>
-          <a:p>
-            <a:pPr algn="l"/>
-            <a:r>
-              <a:rPr lang="en-US" sz="3600" dirty="0"/>
-              <a:t>Algorithm Names</a:t>
-            </a:r>
-            <a:endParaRPr lang="en-US" sz="3600" b="1" dirty="0">
-              <a:solidFill>
-                <a:schemeClr val="tx1">
-                  <a:lumMod val="75000"/>
-                  <a:lumOff val="25000"/>
-                </a:schemeClr>
-              </a:solidFill>
-              <a:latin typeface="Anuphan" pitchFamily="2" charset="-34"/>
-              <a:cs typeface="Anuphan" pitchFamily="2" charset="-34"/>
-            </a:endParaRPr>
-          </a:p>
-        </p:txBody>
-      </p:sp>
-      <p:pic>
-        <p:nvPicPr>
-          <p:cNvPr id="7" name="Picture 6">
-            <a:extLst>
-              <a:ext uri="{FF2B5EF4-FFF2-40B4-BE49-F238E27FC236}">
-                <a16:creationId xmlns:a16="http://schemas.microsoft.com/office/drawing/2014/main" id="{F55B2BB8-4F19-C4FB-68A0-D713352F43F5}"/>
-              </a:ext>
-            </a:extLst>
-          </p:cNvPr>
-          <p:cNvPicPr>
-            <a:picLocks noChangeAspect="1"/>
-          </p:cNvPicPr>
-          <p:nvPr/>
-        </p:nvPicPr>
-        <p:blipFill>
-          <a:blip r:embed="rId2"/>
-          <a:stretch>
-            <a:fillRect/>
-          </a:stretch>
-        </p:blipFill>
-        <p:spPr>
-          <a:xfrm>
-            <a:off x="943538" y="2054944"/>
-            <a:ext cx="10304924" cy="2993922"/>
-          </a:xfrm>
-          <a:prstGeom prst="rect">
-            <a:avLst/>
-          </a:prstGeom>
-          <a:ln w="38100" cap="sq">
-            <a:solidFill>
-              <a:srgbClr val="000000"/>
-            </a:solidFill>
-            <a:prstDash val="solid"/>
-            <a:miter lim="800000"/>
-          </a:ln>
-          <a:effectLst>
-            <a:outerShdw blurRad="50800" dist="38100" dir="2700000" algn="tl" rotWithShape="0">
-              <a:srgbClr val="000000">
-                <a:alpha val="43000"/>
-              </a:srgbClr>
-            </a:outerShdw>
-          </a:effectLst>
-        </p:spPr>
-      </p:pic>
-    </p:spTree>
-    <p:extLst>
-      <p:ext uri="{BB962C8B-B14F-4D97-AF65-F5344CB8AC3E}">
-        <p14:creationId xmlns:p14="http://schemas.microsoft.com/office/powerpoint/2010/main" val="3992942633"/>
       </p:ext>
     </p:extLst>
   </p:cSld>
@@ -17720,7 +19032,7 @@
         <p:cNvPr id="1" name="">
           <a:extLst>
             <a:ext uri="{FF2B5EF4-FFF2-40B4-BE49-F238E27FC236}">
-              <a16:creationId xmlns:a16="http://schemas.microsoft.com/office/drawing/2014/main" id="{34B41E6B-136E-9E97-4882-6A700E039A9D}"/>
+              <a16:creationId xmlns:a16="http://schemas.microsoft.com/office/drawing/2014/main" id="{3040711A-3750-ACEA-F3DB-6BA425E69E36}"/>
             </a:ext>
           </a:extLst>
         </p:cNvPr>
@@ -17740,7 +19052,7 @@
           <p:cNvPr id="2" name="Title 1">
             <a:extLst>
               <a:ext uri="{FF2B5EF4-FFF2-40B4-BE49-F238E27FC236}">
-                <a16:creationId xmlns:a16="http://schemas.microsoft.com/office/drawing/2014/main" id="{C2512475-EE30-EE21-BBDC-2503E13B35A9}"/>
+                <a16:creationId xmlns:a16="http://schemas.microsoft.com/office/drawing/2014/main" id="{64D65FEE-D0A1-960A-1419-06A3BB59A6A0}"/>
               </a:ext>
             </a:extLst>
           </p:cNvPr>
@@ -17766,7 +19078,7 @@
             <a:pPr algn="l"/>
             <a:r>
               <a:rPr lang="en-US" sz="3600" dirty="0"/>
-              <a:t>Algorithm Names</a:t>
+              <a:t>Data Terminology</a:t>
             </a:r>
             <a:endParaRPr lang="en-US" sz="3600" b="1" dirty="0">
               <a:solidFill>
@@ -17783,10 +19095,10 @@
       </p:sp>
       <p:pic>
         <p:nvPicPr>
-          <p:cNvPr id="4" name="Picture 3">
-            <a:extLst>
-              <a:ext uri="{FF2B5EF4-FFF2-40B4-BE49-F238E27FC236}">
-                <a16:creationId xmlns:a16="http://schemas.microsoft.com/office/drawing/2014/main" id="{18500248-C259-9146-5A91-148A2A87BF35}"/>
+          <p:cNvPr id="5" name="Picture 4">
+            <a:extLst>
+              <a:ext uri="{FF2B5EF4-FFF2-40B4-BE49-F238E27FC236}">
+                <a16:creationId xmlns:a16="http://schemas.microsoft.com/office/drawing/2014/main" id="{B42C6E10-32DF-7275-5C8C-32101EB1C9BE}"/>
               </a:ext>
             </a:extLst>
           </p:cNvPr>
@@ -17803,8 +19115,8 @@
         </p:blipFill>
         <p:spPr>
           <a:xfrm>
-            <a:off x="398349" y="2271255"/>
-            <a:ext cx="11395302" cy="2649792"/>
+            <a:off x="931209" y="2300746"/>
+            <a:ext cx="10329582" cy="3239734"/>
           </a:xfrm>
           <a:prstGeom prst="rect">
             <a:avLst/>
@@ -17828,6 +19140,510 @@
     </p:spTree>
     <p:extLst>
       <p:ext uri="{BB962C8B-B14F-4D97-AF65-F5344CB8AC3E}">
+        <p14:creationId xmlns:p14="http://schemas.microsoft.com/office/powerpoint/2010/main" val="3298895514"/>
+      </p:ext>
+    </p:extLst>
+  </p:cSld>
+  <p:clrMapOvr>
+    <a:masterClrMapping/>
+  </p:clrMapOvr>
+</p:sld>
+</file>
+
+<file path=ppt/slides/slide81.xml><?xml version="1.0" encoding="utf-8"?>
+<p:sld xmlns:a="http://schemas.openxmlformats.org/drawingml/2006/main" xmlns:r="http://schemas.openxmlformats.org/officeDocument/2006/relationships" xmlns:p="http://schemas.openxmlformats.org/presentationml/2006/main">
+  <p:cSld>
+    <p:spTree>
+      <p:nvGrpSpPr>
+        <p:cNvPr id="1" name="">
+          <a:extLst>
+            <a:ext uri="{FF2B5EF4-FFF2-40B4-BE49-F238E27FC236}">
+              <a16:creationId xmlns:a16="http://schemas.microsoft.com/office/drawing/2014/main" id="{9F39DB9A-55CF-00CE-8018-55D3F8901CA8}"/>
+            </a:ext>
+          </a:extLst>
+        </p:cNvPr>
+        <p:cNvGrpSpPr/>
+        <p:nvPr/>
+      </p:nvGrpSpPr>
+      <p:grpSpPr>
+        <a:xfrm>
+          <a:off x="0" y="0"/>
+          <a:ext cx="0" cy="0"/>
+          <a:chOff x="0" y="0"/>
+          <a:chExt cx="0" cy="0"/>
+        </a:xfrm>
+      </p:grpSpPr>
+      <p:sp>
+        <p:nvSpPr>
+          <p:cNvPr id="2" name="Title 1">
+            <a:extLst>
+              <a:ext uri="{FF2B5EF4-FFF2-40B4-BE49-F238E27FC236}">
+                <a16:creationId xmlns:a16="http://schemas.microsoft.com/office/drawing/2014/main" id="{C9C912BA-4E78-E975-EAC8-1EC203A790A0}"/>
+              </a:ext>
+            </a:extLst>
+          </p:cNvPr>
+          <p:cNvSpPr>
+            <a:spLocks noGrp="1"/>
+          </p:cNvSpPr>
+          <p:nvPr>
+            <p:ph type="ctrTitle"/>
+          </p:nvPr>
+        </p:nvSpPr>
+        <p:spPr>
+          <a:xfrm>
+            <a:off x="1317523" y="983225"/>
+            <a:ext cx="9556954" cy="825910"/>
+          </a:xfrm>
+        </p:spPr>
+        <p:txBody>
+          <a:bodyPr>
+            <a:noAutofit/>
+          </a:bodyPr>
+          <a:lstStyle/>
+          <a:p>
+            <a:pPr algn="l"/>
+            <a:r>
+              <a:rPr lang="en-US" sz="3600" dirty="0"/>
+              <a:t>Data Terminology</a:t>
+            </a:r>
+            <a:endParaRPr lang="en-US" sz="3600" b="1" dirty="0">
+              <a:solidFill>
+                <a:schemeClr val="tx1">
+                  <a:lumMod val="75000"/>
+                  <a:lumOff val="25000"/>
+                </a:schemeClr>
+              </a:solidFill>
+              <a:latin typeface="Anuphan" pitchFamily="2" charset="-34"/>
+              <a:cs typeface="Anuphan" pitchFamily="2" charset="-34"/>
+            </a:endParaRPr>
+          </a:p>
+        </p:txBody>
+      </p:sp>
+      <p:pic>
+        <p:nvPicPr>
+          <p:cNvPr id="4" name="Picture 3">
+            <a:extLst>
+              <a:ext uri="{FF2B5EF4-FFF2-40B4-BE49-F238E27FC236}">
+                <a16:creationId xmlns:a16="http://schemas.microsoft.com/office/drawing/2014/main" id="{195655E0-2F16-47F6-BC27-C1F4AAB29822}"/>
+              </a:ext>
+            </a:extLst>
+          </p:cNvPr>
+          <p:cNvPicPr>
+            <a:picLocks noChangeAspect="1"/>
+          </p:cNvPicPr>
+          <p:nvPr/>
+        </p:nvPicPr>
+        <p:blipFill>
+          <a:blip r:embed="rId2"/>
+          <a:stretch>
+            <a:fillRect/>
+          </a:stretch>
+        </p:blipFill>
+        <p:spPr>
+          <a:xfrm>
+            <a:off x="805477" y="2059858"/>
+            <a:ext cx="10581046" cy="3603524"/>
+          </a:xfrm>
+          <a:prstGeom prst="rect">
+            <a:avLst/>
+          </a:prstGeom>
+          <a:ln w="38100" cap="sq">
+            <a:solidFill>
+              <a:srgbClr val="000000"/>
+            </a:solidFill>
+            <a:prstDash val="solid"/>
+            <a:miter lim="800000"/>
+          </a:ln>
+          <a:effectLst>
+            <a:outerShdw blurRad="50800" dist="38100" dir="2700000" algn="tl" rotWithShape="0">
+              <a:srgbClr val="000000">
+                <a:alpha val="43000"/>
+              </a:srgbClr>
+            </a:outerShdw>
+          </a:effectLst>
+        </p:spPr>
+      </p:pic>
+    </p:spTree>
+    <p:extLst>
+      <p:ext uri="{BB962C8B-B14F-4D97-AF65-F5344CB8AC3E}">
+        <p14:creationId xmlns:p14="http://schemas.microsoft.com/office/powerpoint/2010/main" val="4111927899"/>
+      </p:ext>
+    </p:extLst>
+  </p:cSld>
+  <p:clrMapOvr>
+    <a:masterClrMapping/>
+  </p:clrMapOvr>
+</p:sld>
+</file>
+
+<file path=ppt/slides/slide82.xml><?xml version="1.0" encoding="utf-8"?>
+<p:sld xmlns:a="http://schemas.openxmlformats.org/drawingml/2006/main" xmlns:r="http://schemas.openxmlformats.org/officeDocument/2006/relationships" xmlns:p="http://schemas.openxmlformats.org/presentationml/2006/main">
+  <p:cSld>
+    <p:spTree>
+      <p:nvGrpSpPr>
+        <p:cNvPr id="1" name="">
+          <a:extLst>
+            <a:ext uri="{FF2B5EF4-FFF2-40B4-BE49-F238E27FC236}">
+              <a16:creationId xmlns:a16="http://schemas.microsoft.com/office/drawing/2014/main" id="{5AC994BA-D35A-6D6B-5942-FCA542FF8FA5}"/>
+            </a:ext>
+          </a:extLst>
+        </p:cNvPr>
+        <p:cNvGrpSpPr/>
+        <p:nvPr/>
+      </p:nvGrpSpPr>
+      <p:grpSpPr>
+        <a:xfrm>
+          <a:off x="0" y="0"/>
+          <a:ext cx="0" cy="0"/>
+          <a:chOff x="0" y="0"/>
+          <a:chExt cx="0" cy="0"/>
+        </a:xfrm>
+      </p:grpSpPr>
+      <p:sp>
+        <p:nvSpPr>
+          <p:cNvPr id="2" name="Title 1">
+            <a:extLst>
+              <a:ext uri="{FF2B5EF4-FFF2-40B4-BE49-F238E27FC236}">
+                <a16:creationId xmlns:a16="http://schemas.microsoft.com/office/drawing/2014/main" id="{F38423A8-6052-9604-B8D5-A52B9B690D51}"/>
+              </a:ext>
+            </a:extLst>
+          </p:cNvPr>
+          <p:cNvSpPr>
+            <a:spLocks noGrp="1"/>
+          </p:cNvSpPr>
+          <p:nvPr>
+            <p:ph type="ctrTitle"/>
+          </p:nvPr>
+        </p:nvSpPr>
+        <p:spPr>
+          <a:xfrm>
+            <a:off x="1317523" y="983225"/>
+            <a:ext cx="9556954" cy="825910"/>
+          </a:xfrm>
+        </p:spPr>
+        <p:txBody>
+          <a:bodyPr>
+            <a:noAutofit/>
+          </a:bodyPr>
+          <a:lstStyle/>
+          <a:p>
+            <a:pPr algn="l"/>
+            <a:r>
+              <a:rPr lang="en-US" sz="3600" dirty="0"/>
+              <a:t>Model Terminology</a:t>
+            </a:r>
+            <a:endParaRPr lang="en-US" sz="3600" b="1" dirty="0">
+              <a:solidFill>
+                <a:schemeClr val="tx1">
+                  <a:lumMod val="75000"/>
+                  <a:lumOff val="25000"/>
+                </a:schemeClr>
+              </a:solidFill>
+              <a:latin typeface="Anuphan" pitchFamily="2" charset="-34"/>
+              <a:cs typeface="Anuphan" pitchFamily="2" charset="-34"/>
+            </a:endParaRPr>
+          </a:p>
+        </p:txBody>
+      </p:sp>
+      <p:pic>
+        <p:nvPicPr>
+          <p:cNvPr id="5" name="Picture 4">
+            <a:extLst>
+              <a:ext uri="{FF2B5EF4-FFF2-40B4-BE49-F238E27FC236}">
+                <a16:creationId xmlns:a16="http://schemas.microsoft.com/office/drawing/2014/main" id="{0542F131-501E-3267-0511-2909D02A6209}"/>
+              </a:ext>
+            </a:extLst>
+          </p:cNvPr>
+          <p:cNvPicPr>
+            <a:picLocks noChangeAspect="1"/>
+          </p:cNvPicPr>
+          <p:nvPr/>
+        </p:nvPicPr>
+        <p:blipFill>
+          <a:blip r:embed="rId2"/>
+          <a:stretch>
+            <a:fillRect/>
+          </a:stretch>
+        </p:blipFill>
+        <p:spPr>
+          <a:xfrm>
+            <a:off x="742672" y="2040193"/>
+            <a:ext cx="10706656" cy="2777614"/>
+          </a:xfrm>
+          <a:prstGeom prst="rect">
+            <a:avLst/>
+          </a:prstGeom>
+          <a:ln w="38100" cap="sq">
+            <a:solidFill>
+              <a:srgbClr val="000000"/>
+            </a:solidFill>
+            <a:prstDash val="solid"/>
+            <a:miter lim="800000"/>
+          </a:ln>
+          <a:effectLst>
+            <a:outerShdw blurRad="50800" dist="38100" dir="2700000" algn="tl" rotWithShape="0">
+              <a:srgbClr val="000000">
+                <a:alpha val="43000"/>
+              </a:srgbClr>
+            </a:outerShdw>
+          </a:effectLst>
+        </p:spPr>
+      </p:pic>
+    </p:spTree>
+    <p:extLst>
+      <p:ext uri="{BB962C8B-B14F-4D97-AF65-F5344CB8AC3E}">
+        <p14:creationId xmlns:p14="http://schemas.microsoft.com/office/powerpoint/2010/main" val="1258016362"/>
+      </p:ext>
+    </p:extLst>
+  </p:cSld>
+  <p:clrMapOvr>
+    <a:masterClrMapping/>
+  </p:clrMapOvr>
+</p:sld>
+</file>
+
+<file path=ppt/slides/slide83.xml><?xml version="1.0" encoding="utf-8"?>
+<p:sld xmlns:a="http://schemas.openxmlformats.org/drawingml/2006/main" xmlns:r="http://schemas.openxmlformats.org/officeDocument/2006/relationships" xmlns:p="http://schemas.openxmlformats.org/presentationml/2006/main">
+  <p:cSld>
+    <p:spTree>
+      <p:nvGrpSpPr>
+        <p:cNvPr id="1" name="">
+          <a:extLst>
+            <a:ext uri="{FF2B5EF4-FFF2-40B4-BE49-F238E27FC236}">
+              <a16:creationId xmlns:a16="http://schemas.microsoft.com/office/drawing/2014/main" id="{142ECE9B-B5E9-F783-35F9-C8F029CA2A15}"/>
+            </a:ext>
+          </a:extLst>
+        </p:cNvPr>
+        <p:cNvGrpSpPr/>
+        <p:nvPr/>
+      </p:nvGrpSpPr>
+      <p:grpSpPr>
+        <a:xfrm>
+          <a:off x="0" y="0"/>
+          <a:ext cx="0" cy="0"/>
+          <a:chOff x="0" y="0"/>
+          <a:chExt cx="0" cy="0"/>
+        </a:xfrm>
+      </p:grpSpPr>
+      <p:sp>
+        <p:nvSpPr>
+          <p:cNvPr id="2" name="Title 1">
+            <a:extLst>
+              <a:ext uri="{FF2B5EF4-FFF2-40B4-BE49-F238E27FC236}">
+                <a16:creationId xmlns:a16="http://schemas.microsoft.com/office/drawing/2014/main" id="{A9AE56B4-66F9-C05A-1B4D-31C4538A9307}"/>
+              </a:ext>
+            </a:extLst>
+          </p:cNvPr>
+          <p:cNvSpPr>
+            <a:spLocks noGrp="1"/>
+          </p:cNvSpPr>
+          <p:nvPr>
+            <p:ph type="ctrTitle"/>
+          </p:nvPr>
+        </p:nvSpPr>
+        <p:spPr>
+          <a:xfrm>
+            <a:off x="1317523" y="983225"/>
+            <a:ext cx="9556954" cy="825910"/>
+          </a:xfrm>
+        </p:spPr>
+        <p:txBody>
+          <a:bodyPr>
+            <a:noAutofit/>
+          </a:bodyPr>
+          <a:lstStyle/>
+          <a:p>
+            <a:pPr algn="l"/>
+            <a:r>
+              <a:rPr lang="en-US" sz="3600" dirty="0"/>
+              <a:t>Algorithm Names</a:t>
+            </a:r>
+            <a:endParaRPr lang="en-US" sz="3600" b="1" dirty="0">
+              <a:solidFill>
+                <a:schemeClr val="tx1">
+                  <a:lumMod val="75000"/>
+                  <a:lumOff val="25000"/>
+                </a:schemeClr>
+              </a:solidFill>
+              <a:latin typeface="Anuphan" pitchFamily="2" charset="-34"/>
+              <a:cs typeface="Anuphan" pitchFamily="2" charset="-34"/>
+            </a:endParaRPr>
+          </a:p>
+        </p:txBody>
+      </p:sp>
+      <p:pic>
+        <p:nvPicPr>
+          <p:cNvPr id="7" name="Picture 6">
+            <a:extLst>
+              <a:ext uri="{FF2B5EF4-FFF2-40B4-BE49-F238E27FC236}">
+                <a16:creationId xmlns:a16="http://schemas.microsoft.com/office/drawing/2014/main" id="{F55B2BB8-4F19-C4FB-68A0-D713352F43F5}"/>
+              </a:ext>
+            </a:extLst>
+          </p:cNvPr>
+          <p:cNvPicPr>
+            <a:picLocks noChangeAspect="1"/>
+          </p:cNvPicPr>
+          <p:nvPr/>
+        </p:nvPicPr>
+        <p:blipFill>
+          <a:blip r:embed="rId2"/>
+          <a:stretch>
+            <a:fillRect/>
+          </a:stretch>
+        </p:blipFill>
+        <p:spPr>
+          <a:xfrm>
+            <a:off x="943538" y="2054944"/>
+            <a:ext cx="10304924" cy="2993922"/>
+          </a:xfrm>
+          <a:prstGeom prst="rect">
+            <a:avLst/>
+          </a:prstGeom>
+          <a:ln w="38100" cap="sq">
+            <a:solidFill>
+              <a:srgbClr val="000000"/>
+            </a:solidFill>
+            <a:prstDash val="solid"/>
+            <a:miter lim="800000"/>
+          </a:ln>
+          <a:effectLst>
+            <a:outerShdw blurRad="50800" dist="38100" dir="2700000" algn="tl" rotWithShape="0">
+              <a:srgbClr val="000000">
+                <a:alpha val="43000"/>
+              </a:srgbClr>
+            </a:outerShdw>
+          </a:effectLst>
+        </p:spPr>
+      </p:pic>
+    </p:spTree>
+    <p:extLst>
+      <p:ext uri="{BB962C8B-B14F-4D97-AF65-F5344CB8AC3E}">
+        <p14:creationId xmlns:p14="http://schemas.microsoft.com/office/powerpoint/2010/main" val="3992942633"/>
+      </p:ext>
+    </p:extLst>
+  </p:cSld>
+  <p:clrMapOvr>
+    <a:masterClrMapping/>
+  </p:clrMapOvr>
+</p:sld>
+</file>
+
+<file path=ppt/slides/slide84.xml><?xml version="1.0" encoding="utf-8"?>
+<p:sld xmlns:a="http://schemas.openxmlformats.org/drawingml/2006/main" xmlns:r="http://schemas.openxmlformats.org/officeDocument/2006/relationships" xmlns:p="http://schemas.openxmlformats.org/presentationml/2006/main">
+  <p:cSld>
+    <p:spTree>
+      <p:nvGrpSpPr>
+        <p:cNvPr id="1" name="">
+          <a:extLst>
+            <a:ext uri="{FF2B5EF4-FFF2-40B4-BE49-F238E27FC236}">
+              <a16:creationId xmlns:a16="http://schemas.microsoft.com/office/drawing/2014/main" id="{34B41E6B-136E-9E97-4882-6A700E039A9D}"/>
+            </a:ext>
+          </a:extLst>
+        </p:cNvPr>
+        <p:cNvGrpSpPr/>
+        <p:nvPr/>
+      </p:nvGrpSpPr>
+      <p:grpSpPr>
+        <a:xfrm>
+          <a:off x="0" y="0"/>
+          <a:ext cx="0" cy="0"/>
+          <a:chOff x="0" y="0"/>
+          <a:chExt cx="0" cy="0"/>
+        </a:xfrm>
+      </p:grpSpPr>
+      <p:sp>
+        <p:nvSpPr>
+          <p:cNvPr id="2" name="Title 1">
+            <a:extLst>
+              <a:ext uri="{FF2B5EF4-FFF2-40B4-BE49-F238E27FC236}">
+                <a16:creationId xmlns:a16="http://schemas.microsoft.com/office/drawing/2014/main" id="{C2512475-EE30-EE21-BBDC-2503E13B35A9}"/>
+              </a:ext>
+            </a:extLst>
+          </p:cNvPr>
+          <p:cNvSpPr>
+            <a:spLocks noGrp="1"/>
+          </p:cNvSpPr>
+          <p:nvPr>
+            <p:ph type="ctrTitle"/>
+          </p:nvPr>
+        </p:nvSpPr>
+        <p:spPr>
+          <a:xfrm>
+            <a:off x="1317523" y="983225"/>
+            <a:ext cx="9556954" cy="825910"/>
+          </a:xfrm>
+        </p:spPr>
+        <p:txBody>
+          <a:bodyPr>
+            <a:noAutofit/>
+          </a:bodyPr>
+          <a:lstStyle/>
+          <a:p>
+            <a:pPr algn="l"/>
+            <a:r>
+              <a:rPr lang="en-US" sz="3600" dirty="0"/>
+              <a:t>Algorithm Names</a:t>
+            </a:r>
+            <a:endParaRPr lang="en-US" sz="3600" b="1" dirty="0">
+              <a:solidFill>
+                <a:schemeClr val="tx1">
+                  <a:lumMod val="75000"/>
+                  <a:lumOff val="25000"/>
+                </a:schemeClr>
+              </a:solidFill>
+              <a:latin typeface="Anuphan" pitchFamily="2" charset="-34"/>
+              <a:cs typeface="Anuphan" pitchFamily="2" charset="-34"/>
+            </a:endParaRPr>
+          </a:p>
+        </p:txBody>
+      </p:sp>
+      <p:pic>
+        <p:nvPicPr>
+          <p:cNvPr id="4" name="Picture 3">
+            <a:extLst>
+              <a:ext uri="{FF2B5EF4-FFF2-40B4-BE49-F238E27FC236}">
+                <a16:creationId xmlns:a16="http://schemas.microsoft.com/office/drawing/2014/main" id="{18500248-C259-9146-5A91-148A2A87BF35}"/>
+              </a:ext>
+            </a:extLst>
+          </p:cNvPr>
+          <p:cNvPicPr>
+            <a:picLocks noChangeAspect="1"/>
+          </p:cNvPicPr>
+          <p:nvPr/>
+        </p:nvPicPr>
+        <p:blipFill>
+          <a:blip r:embed="rId2"/>
+          <a:stretch>
+            <a:fillRect/>
+          </a:stretch>
+        </p:blipFill>
+        <p:spPr>
+          <a:xfrm>
+            <a:off x="398349" y="2271255"/>
+            <a:ext cx="11395302" cy="2649792"/>
+          </a:xfrm>
+          <a:prstGeom prst="rect">
+            <a:avLst/>
+          </a:prstGeom>
+          <a:ln w="38100" cap="sq">
+            <a:solidFill>
+              <a:srgbClr val="000000"/>
+            </a:solidFill>
+            <a:prstDash val="solid"/>
+            <a:miter lim="800000"/>
+          </a:ln>
+          <a:effectLst>
+            <a:outerShdw blurRad="50800" dist="38100" dir="2700000" algn="tl" rotWithShape="0">
+              <a:srgbClr val="000000">
+                <a:alpha val="43000"/>
+              </a:srgbClr>
+            </a:outerShdw>
+          </a:effectLst>
+        </p:spPr>
+      </p:pic>
+    </p:spTree>
+    <p:extLst>
+      <p:ext uri="{BB962C8B-B14F-4D97-AF65-F5344CB8AC3E}">
         <p14:creationId xmlns:p14="http://schemas.microsoft.com/office/powerpoint/2010/main" val="2936340216"/>
       </p:ext>
     </p:extLst>
@@ -17838,7 +19654,7 @@
 </p:sld>
 </file>
 
-<file path=ppt/slides/slide81.xml><?xml version="1.0" encoding="utf-8"?>
+<file path=ppt/slides/slide85.xml><?xml version="1.0" encoding="utf-8"?>
 <p:sld xmlns:a="http://schemas.openxmlformats.org/drawingml/2006/main" xmlns:r="http://schemas.openxmlformats.org/officeDocument/2006/relationships" xmlns:p="http://schemas.openxmlformats.org/presentationml/2006/main">
   <p:cSld>
     <p:spTree>
@@ -17964,7 +19780,7 @@
 </p:sld>
 </file>
 
-<file path=ppt/slides/slide82.xml><?xml version="1.0" encoding="utf-8"?>
+<file path=ppt/slides/slide86.xml><?xml version="1.0" encoding="utf-8"?>
 <p:sld xmlns:a="http://schemas.openxmlformats.org/drawingml/2006/main" xmlns:r="http://schemas.openxmlformats.org/officeDocument/2006/relationships" xmlns:p="http://schemas.openxmlformats.org/presentationml/2006/main">
   <p:cSld>
     <p:spTree>
@@ -18090,7 +19906,7 @@
 </p:sld>
 </file>
 
-<file path=ppt/slides/slide83.xml><?xml version="1.0" encoding="utf-8"?>
+<file path=ppt/slides/slide87.xml><?xml version="1.0" encoding="utf-8"?>
 <p:sld xmlns:a="http://schemas.openxmlformats.org/drawingml/2006/main" xmlns:r="http://schemas.openxmlformats.org/officeDocument/2006/relationships" xmlns:p="http://schemas.openxmlformats.org/presentationml/2006/main">
   <p:cSld>
     <p:spTree>
@@ -18216,7 +20032,7 @@
 </p:sld>
 </file>
 
-<file path=ppt/slides/slide84.xml><?xml version="1.0" encoding="utf-8"?>
+<file path=ppt/slides/slide88.xml><?xml version="1.0" encoding="utf-8"?>
 <p:sld xmlns:a="http://schemas.openxmlformats.org/drawingml/2006/main" xmlns:r="http://schemas.openxmlformats.org/officeDocument/2006/relationships" xmlns:p="http://schemas.openxmlformats.org/presentationml/2006/main">
   <p:cSld>
     <p:spTree>
@@ -18342,7 +20158,7 @@
 </p:sld>
 </file>
 
-<file path=ppt/slides/slide85.xml><?xml version="1.0" encoding="utf-8"?>
+<file path=ppt/slides/slide89.xml><?xml version="1.0" encoding="utf-8"?>
 <p:sld xmlns:a="http://schemas.openxmlformats.org/drawingml/2006/main" xmlns:r="http://schemas.openxmlformats.org/officeDocument/2006/relationships" xmlns:p="http://schemas.openxmlformats.org/presentationml/2006/main">
   <p:cSld>
     <p:spTree>
@@ -18459,212 +20275,6 @@
     <p:extLst>
       <p:ext uri="{BB962C8B-B14F-4D97-AF65-F5344CB8AC3E}">
         <p14:creationId xmlns:p14="http://schemas.microsoft.com/office/powerpoint/2010/main" val="938041974"/>
-      </p:ext>
-    </p:extLst>
-  </p:cSld>
-  <p:clrMapOvr>
-    <a:masterClrMapping/>
-  </p:clrMapOvr>
-</p:sld>
-</file>
-
-<file path=ppt/slides/slide86.xml><?xml version="1.0" encoding="utf-8"?>
-<p:sld xmlns:a="http://schemas.openxmlformats.org/drawingml/2006/main" xmlns:r="http://schemas.openxmlformats.org/officeDocument/2006/relationships" xmlns:p="http://schemas.openxmlformats.org/presentationml/2006/main">
-  <p:cSld>
-    <p:spTree>
-      <p:nvGrpSpPr>
-        <p:cNvPr id="1" name="">
-          <a:extLst>
-            <a:ext uri="{FF2B5EF4-FFF2-40B4-BE49-F238E27FC236}">
-              <a16:creationId xmlns:a16="http://schemas.microsoft.com/office/drawing/2014/main" id="{AC8AB27B-B8F3-8B1D-77E2-248D52C349B7}"/>
-            </a:ext>
-          </a:extLst>
-        </p:cNvPr>
-        <p:cNvGrpSpPr/>
-        <p:nvPr/>
-      </p:nvGrpSpPr>
-      <p:grpSpPr>
-        <a:xfrm>
-          <a:off x="0" y="0"/>
-          <a:ext cx="0" cy="0"/>
-          <a:chOff x="0" y="0"/>
-          <a:chExt cx="0" cy="0"/>
-        </a:xfrm>
-      </p:grpSpPr>
-      <p:sp>
-        <p:nvSpPr>
-          <p:cNvPr id="2" name="Title 1">
-            <a:extLst>
-              <a:ext uri="{FF2B5EF4-FFF2-40B4-BE49-F238E27FC236}">
-                <a16:creationId xmlns:a16="http://schemas.microsoft.com/office/drawing/2014/main" id="{B397E80E-8ABC-0A71-3286-F5F4FF13C843}"/>
-              </a:ext>
-            </a:extLst>
-          </p:cNvPr>
-          <p:cNvSpPr>
-            <a:spLocks noGrp="1"/>
-          </p:cNvSpPr>
-          <p:nvPr>
-            <p:ph type="ctrTitle"/>
-          </p:nvPr>
-        </p:nvSpPr>
-        <p:spPr>
-          <a:xfrm>
-            <a:off x="1317523" y="983225"/>
-            <a:ext cx="9556954" cy="825910"/>
-          </a:xfrm>
-        </p:spPr>
-        <p:txBody>
-          <a:bodyPr>
-            <a:noAutofit/>
-          </a:bodyPr>
-          <a:lstStyle/>
-          <a:p>
-            <a:pPr algn="l"/>
-            <a:r>
-              <a:rPr lang="en-US" sz="3600" dirty="0"/>
-              <a:t>Preprocessing Terminology</a:t>
-            </a:r>
-            <a:endParaRPr lang="en-US" sz="3600" b="1" dirty="0">
-              <a:solidFill>
-                <a:schemeClr val="tx1">
-                  <a:lumMod val="75000"/>
-                  <a:lumOff val="25000"/>
-                </a:schemeClr>
-              </a:solidFill>
-              <a:latin typeface="Anuphan" pitchFamily="2" charset="-34"/>
-              <a:cs typeface="Anuphan" pitchFamily="2" charset="-34"/>
-            </a:endParaRPr>
-          </a:p>
-        </p:txBody>
-      </p:sp>
-      <p:pic>
-        <p:nvPicPr>
-          <p:cNvPr id="4" name="Picture 3">
-            <a:extLst>
-              <a:ext uri="{FF2B5EF4-FFF2-40B4-BE49-F238E27FC236}">
-                <a16:creationId xmlns:a16="http://schemas.microsoft.com/office/drawing/2014/main" id="{44A29343-404D-73C2-1E0D-4E3B752B69CE}"/>
-              </a:ext>
-            </a:extLst>
-          </p:cNvPr>
-          <p:cNvPicPr>
-            <a:picLocks noChangeAspect="1"/>
-          </p:cNvPicPr>
-          <p:nvPr/>
-        </p:nvPicPr>
-        <p:blipFill>
-          <a:blip r:embed="rId2"/>
-          <a:stretch>
-            <a:fillRect/>
-          </a:stretch>
-        </p:blipFill>
-        <p:spPr>
-          <a:xfrm>
-            <a:off x="936042" y="2113935"/>
-            <a:ext cx="10319916" cy="2630130"/>
-          </a:xfrm>
-          <a:prstGeom prst="rect">
-            <a:avLst/>
-          </a:prstGeom>
-          <a:ln w="38100" cap="sq">
-            <a:solidFill>
-              <a:srgbClr val="000000"/>
-            </a:solidFill>
-            <a:prstDash val="solid"/>
-            <a:miter lim="800000"/>
-          </a:ln>
-          <a:effectLst>
-            <a:outerShdw blurRad="50800" dist="38100" dir="2700000" algn="tl" rotWithShape="0">
-              <a:srgbClr val="000000">
-                <a:alpha val="43000"/>
-              </a:srgbClr>
-            </a:outerShdw>
-          </a:effectLst>
-        </p:spPr>
-      </p:pic>
-    </p:spTree>
-    <p:extLst>
-      <p:ext uri="{BB962C8B-B14F-4D97-AF65-F5344CB8AC3E}">
-        <p14:creationId xmlns:p14="http://schemas.microsoft.com/office/powerpoint/2010/main" val="2201420832"/>
-      </p:ext>
-    </p:extLst>
-  </p:cSld>
-  <p:clrMapOvr>
-    <a:masterClrMapping/>
-  </p:clrMapOvr>
-</p:sld>
-</file>
-
-<file path=ppt/slides/slide87.xml><?xml version="1.0" encoding="utf-8"?>
-<p:sld xmlns:a="http://schemas.openxmlformats.org/drawingml/2006/main" xmlns:r="http://schemas.openxmlformats.org/officeDocument/2006/relationships" xmlns:p="http://schemas.openxmlformats.org/presentationml/2006/main">
-  <p:cSld>
-    <p:spTree>
-      <p:nvGrpSpPr>
-        <p:cNvPr id="1" name="">
-          <a:extLst>
-            <a:ext uri="{FF2B5EF4-FFF2-40B4-BE49-F238E27FC236}">
-              <a16:creationId xmlns:a16="http://schemas.microsoft.com/office/drawing/2014/main" id="{F61D45A6-9986-DEBD-5C87-61B069A781FD}"/>
-            </a:ext>
-          </a:extLst>
-        </p:cNvPr>
-        <p:cNvGrpSpPr/>
-        <p:nvPr/>
-      </p:nvGrpSpPr>
-      <p:grpSpPr>
-        <a:xfrm>
-          <a:off x="0" y="0"/>
-          <a:ext cx="0" cy="0"/>
-          <a:chOff x="0" y="0"/>
-          <a:chExt cx="0" cy="0"/>
-        </a:xfrm>
-      </p:grpSpPr>
-      <p:pic>
-        <p:nvPicPr>
-          <p:cNvPr id="7" name="Picture 6">
-            <a:extLst>
-              <a:ext uri="{FF2B5EF4-FFF2-40B4-BE49-F238E27FC236}">
-                <a16:creationId xmlns:a16="http://schemas.microsoft.com/office/drawing/2014/main" id="{11CD92F8-E56A-C703-5924-21935E6B551D}"/>
-              </a:ext>
-            </a:extLst>
-          </p:cNvPr>
-          <p:cNvPicPr>
-            <a:picLocks noChangeAspect="1"/>
-          </p:cNvPicPr>
-          <p:nvPr/>
-        </p:nvPicPr>
-        <p:blipFill>
-          <a:blip r:embed="rId2"/>
-          <a:stretch>
-            <a:fillRect/>
-          </a:stretch>
-        </p:blipFill>
-        <p:spPr>
-          <a:xfrm>
-            <a:off x="688421" y="2684207"/>
-            <a:ext cx="10815158" cy="1489586"/>
-          </a:xfrm>
-          <a:prstGeom prst="rect">
-            <a:avLst/>
-          </a:prstGeom>
-          <a:ln w="38100" cap="sq">
-            <a:solidFill>
-              <a:srgbClr val="000000"/>
-            </a:solidFill>
-            <a:prstDash val="solid"/>
-            <a:miter lim="800000"/>
-          </a:ln>
-          <a:effectLst>
-            <a:outerShdw blurRad="50800" dist="38100" dir="2700000" algn="tl" rotWithShape="0">
-              <a:srgbClr val="000000">
-                <a:alpha val="43000"/>
-              </a:srgbClr>
-            </a:outerShdw>
-          </a:effectLst>
-        </p:spPr>
-      </p:pic>
-    </p:spTree>
-    <p:extLst>
-      <p:ext uri="{BB962C8B-B14F-4D97-AF65-F5344CB8AC3E}">
-        <p14:creationId xmlns:p14="http://schemas.microsoft.com/office/powerpoint/2010/main" val="3486311710"/>
       </p:ext>
     </p:extLst>
   </p:cSld>
@@ -18984,6 +20594,212 @@
     <p:extLst>
       <p:ext uri="{BB962C8B-B14F-4D97-AF65-F5344CB8AC3E}">
         <p14:creationId xmlns:p14="http://schemas.microsoft.com/office/powerpoint/2010/main" val="1780492966"/>
+      </p:ext>
+    </p:extLst>
+  </p:cSld>
+  <p:clrMapOvr>
+    <a:masterClrMapping/>
+  </p:clrMapOvr>
+</p:sld>
+</file>
+
+<file path=ppt/slides/slide90.xml><?xml version="1.0" encoding="utf-8"?>
+<p:sld xmlns:a="http://schemas.openxmlformats.org/drawingml/2006/main" xmlns:r="http://schemas.openxmlformats.org/officeDocument/2006/relationships" xmlns:p="http://schemas.openxmlformats.org/presentationml/2006/main">
+  <p:cSld>
+    <p:spTree>
+      <p:nvGrpSpPr>
+        <p:cNvPr id="1" name="">
+          <a:extLst>
+            <a:ext uri="{FF2B5EF4-FFF2-40B4-BE49-F238E27FC236}">
+              <a16:creationId xmlns:a16="http://schemas.microsoft.com/office/drawing/2014/main" id="{AC8AB27B-B8F3-8B1D-77E2-248D52C349B7}"/>
+            </a:ext>
+          </a:extLst>
+        </p:cNvPr>
+        <p:cNvGrpSpPr/>
+        <p:nvPr/>
+      </p:nvGrpSpPr>
+      <p:grpSpPr>
+        <a:xfrm>
+          <a:off x="0" y="0"/>
+          <a:ext cx="0" cy="0"/>
+          <a:chOff x="0" y="0"/>
+          <a:chExt cx="0" cy="0"/>
+        </a:xfrm>
+      </p:grpSpPr>
+      <p:sp>
+        <p:nvSpPr>
+          <p:cNvPr id="2" name="Title 1">
+            <a:extLst>
+              <a:ext uri="{FF2B5EF4-FFF2-40B4-BE49-F238E27FC236}">
+                <a16:creationId xmlns:a16="http://schemas.microsoft.com/office/drawing/2014/main" id="{B397E80E-8ABC-0A71-3286-F5F4FF13C843}"/>
+              </a:ext>
+            </a:extLst>
+          </p:cNvPr>
+          <p:cNvSpPr>
+            <a:spLocks noGrp="1"/>
+          </p:cNvSpPr>
+          <p:nvPr>
+            <p:ph type="ctrTitle"/>
+          </p:nvPr>
+        </p:nvSpPr>
+        <p:spPr>
+          <a:xfrm>
+            <a:off x="1317523" y="983225"/>
+            <a:ext cx="9556954" cy="825910"/>
+          </a:xfrm>
+        </p:spPr>
+        <p:txBody>
+          <a:bodyPr>
+            <a:noAutofit/>
+          </a:bodyPr>
+          <a:lstStyle/>
+          <a:p>
+            <a:pPr algn="l"/>
+            <a:r>
+              <a:rPr lang="en-US" sz="3600" dirty="0"/>
+              <a:t>Preprocessing Terminology</a:t>
+            </a:r>
+            <a:endParaRPr lang="en-US" sz="3600" b="1" dirty="0">
+              <a:solidFill>
+                <a:schemeClr val="tx1">
+                  <a:lumMod val="75000"/>
+                  <a:lumOff val="25000"/>
+                </a:schemeClr>
+              </a:solidFill>
+              <a:latin typeface="Anuphan" pitchFamily="2" charset="-34"/>
+              <a:cs typeface="Anuphan" pitchFamily="2" charset="-34"/>
+            </a:endParaRPr>
+          </a:p>
+        </p:txBody>
+      </p:sp>
+      <p:pic>
+        <p:nvPicPr>
+          <p:cNvPr id="4" name="Picture 3">
+            <a:extLst>
+              <a:ext uri="{FF2B5EF4-FFF2-40B4-BE49-F238E27FC236}">
+                <a16:creationId xmlns:a16="http://schemas.microsoft.com/office/drawing/2014/main" id="{44A29343-404D-73C2-1E0D-4E3B752B69CE}"/>
+              </a:ext>
+            </a:extLst>
+          </p:cNvPr>
+          <p:cNvPicPr>
+            <a:picLocks noChangeAspect="1"/>
+          </p:cNvPicPr>
+          <p:nvPr/>
+        </p:nvPicPr>
+        <p:blipFill>
+          <a:blip r:embed="rId2"/>
+          <a:stretch>
+            <a:fillRect/>
+          </a:stretch>
+        </p:blipFill>
+        <p:spPr>
+          <a:xfrm>
+            <a:off x="936042" y="2113935"/>
+            <a:ext cx="10319916" cy="2630130"/>
+          </a:xfrm>
+          <a:prstGeom prst="rect">
+            <a:avLst/>
+          </a:prstGeom>
+          <a:ln w="38100" cap="sq">
+            <a:solidFill>
+              <a:srgbClr val="000000"/>
+            </a:solidFill>
+            <a:prstDash val="solid"/>
+            <a:miter lim="800000"/>
+          </a:ln>
+          <a:effectLst>
+            <a:outerShdw blurRad="50800" dist="38100" dir="2700000" algn="tl" rotWithShape="0">
+              <a:srgbClr val="000000">
+                <a:alpha val="43000"/>
+              </a:srgbClr>
+            </a:outerShdw>
+          </a:effectLst>
+        </p:spPr>
+      </p:pic>
+    </p:spTree>
+    <p:extLst>
+      <p:ext uri="{BB962C8B-B14F-4D97-AF65-F5344CB8AC3E}">
+        <p14:creationId xmlns:p14="http://schemas.microsoft.com/office/powerpoint/2010/main" val="2201420832"/>
+      </p:ext>
+    </p:extLst>
+  </p:cSld>
+  <p:clrMapOvr>
+    <a:masterClrMapping/>
+  </p:clrMapOvr>
+</p:sld>
+</file>
+
+<file path=ppt/slides/slide91.xml><?xml version="1.0" encoding="utf-8"?>
+<p:sld xmlns:a="http://schemas.openxmlformats.org/drawingml/2006/main" xmlns:r="http://schemas.openxmlformats.org/officeDocument/2006/relationships" xmlns:p="http://schemas.openxmlformats.org/presentationml/2006/main">
+  <p:cSld>
+    <p:spTree>
+      <p:nvGrpSpPr>
+        <p:cNvPr id="1" name="">
+          <a:extLst>
+            <a:ext uri="{FF2B5EF4-FFF2-40B4-BE49-F238E27FC236}">
+              <a16:creationId xmlns:a16="http://schemas.microsoft.com/office/drawing/2014/main" id="{F61D45A6-9986-DEBD-5C87-61B069A781FD}"/>
+            </a:ext>
+          </a:extLst>
+        </p:cNvPr>
+        <p:cNvGrpSpPr/>
+        <p:nvPr/>
+      </p:nvGrpSpPr>
+      <p:grpSpPr>
+        <a:xfrm>
+          <a:off x="0" y="0"/>
+          <a:ext cx="0" cy="0"/>
+          <a:chOff x="0" y="0"/>
+          <a:chExt cx="0" cy="0"/>
+        </a:xfrm>
+      </p:grpSpPr>
+      <p:pic>
+        <p:nvPicPr>
+          <p:cNvPr id="7" name="Picture 6">
+            <a:extLst>
+              <a:ext uri="{FF2B5EF4-FFF2-40B4-BE49-F238E27FC236}">
+                <a16:creationId xmlns:a16="http://schemas.microsoft.com/office/drawing/2014/main" id="{11CD92F8-E56A-C703-5924-21935E6B551D}"/>
+              </a:ext>
+            </a:extLst>
+          </p:cNvPr>
+          <p:cNvPicPr>
+            <a:picLocks noChangeAspect="1"/>
+          </p:cNvPicPr>
+          <p:nvPr/>
+        </p:nvPicPr>
+        <p:blipFill>
+          <a:blip r:embed="rId2"/>
+          <a:stretch>
+            <a:fillRect/>
+          </a:stretch>
+        </p:blipFill>
+        <p:spPr>
+          <a:xfrm>
+            <a:off x="688421" y="2684207"/>
+            <a:ext cx="10815158" cy="1489586"/>
+          </a:xfrm>
+          <a:prstGeom prst="rect">
+            <a:avLst/>
+          </a:prstGeom>
+          <a:ln w="38100" cap="sq">
+            <a:solidFill>
+              <a:srgbClr val="000000"/>
+            </a:solidFill>
+            <a:prstDash val="solid"/>
+            <a:miter lim="800000"/>
+          </a:ln>
+          <a:effectLst>
+            <a:outerShdw blurRad="50800" dist="38100" dir="2700000" algn="tl" rotWithShape="0">
+              <a:srgbClr val="000000">
+                <a:alpha val="43000"/>
+              </a:srgbClr>
+            </a:outerShdw>
+          </a:effectLst>
+        </p:spPr>
+      </p:pic>
+    </p:spTree>
+    <p:extLst>
+      <p:ext uri="{BB962C8B-B14F-4D97-AF65-F5344CB8AC3E}">
+        <p14:creationId xmlns:p14="http://schemas.microsoft.com/office/powerpoint/2010/main" val="3486311710"/>
       </p:ext>
     </p:extLst>
   </p:cSld>
